--- a/slides/00-setup.pptx
+++ b/slides/00-setup.pptx
@@ -2032,145 +2032,9 @@
           <a:chExt cx="0" cy="0"/>
         </a:xfrm>
       </p:grpSpPr>
-      <p:sp>
-        <p:nvSpPr>
-          <p:cNvPr id="2" name="Text 0"/>
-          <p:cNvSpPr/>
-          <p:nvPr/>
-        </p:nvSpPr>
-        <p:spPr>
-          <a:xfrm>
-            <a:off x="5968901" y="0"/>
-            <a:ext cx="3174950" cy="5143500"/>
-          </a:xfrm>
-          <a:prstGeom prst="rect">
-            <a:avLst/>
-          </a:prstGeom>
-          <a:solidFill>
-            <a:srgbClr val="1A7F37"/>
-          </a:solidFill>
-          <a:ln/>
-        </p:spPr>
-        <p:txBody>
-          <a:bodyPr wrap="square" rtlCol="0" anchor="ctr"/>
-          <a:lstStyle/>
-          <a:p>
-            <a:pPr indent="0" marL="0">
-              <a:buNone/>
-            </a:pPr>
-            <a:endParaRPr lang="en-US" dirty="0"/>
-          </a:p>
-        </p:txBody>
-      </p:sp>
-      <p:sp>
-        <p:nvSpPr>
-          <p:cNvPr id="3" name="Text 1"/>
-          <p:cNvSpPr/>
-          <p:nvPr/>
-        </p:nvSpPr>
-        <p:spPr>
-          <a:xfrm>
-            <a:off x="5939692" y="1269950"/>
-            <a:ext cx="2979319" cy="2159050"/>
-          </a:xfrm>
-          <a:prstGeom prst="rect">
-            <a:avLst/>
-          </a:prstGeom>
-          <a:noFill/>
-          <a:ln/>
-        </p:spPr>
-        <p:txBody>
-          <a:bodyPr wrap="square" lIns="0" tIns="0" rIns="0" bIns="0" rtlCol="0" anchor="t"/>
-          <a:lstStyle/>
-          <a:p>
-            <a:pPr algn="ctr" indent="0" marL="0">
-              <a:lnSpc>
-                <a:spcPts val="17000"/>
-              </a:lnSpc>
-              <a:buNone/>
-            </a:pPr>
-            <a:r>
-              <a:rPr lang="en-US" sz="15000" b="1" dirty="0">
-                <a:solidFill>
-                  <a:srgbClr val="2DA44E"/>
-                </a:solidFill>
-                <a:latin typeface="Arial" pitchFamily="34" charset="0"/>
-                <a:ea typeface="Arial" pitchFamily="34" charset="-122"/>
-                <a:cs typeface="Arial" pitchFamily="34" charset="-120"/>
-              </a:rPr>
-              <a:t>00</a:t>
-            </a:r>
-            <a:endParaRPr lang="en-US" sz="15000" dirty="0"/>
-          </a:p>
-        </p:txBody>
-      </p:sp>
-      <p:sp>
-        <p:nvSpPr>
-          <p:cNvPr id="4" name="Text 2"/>
-          <p:cNvSpPr/>
-          <p:nvPr/>
-        </p:nvSpPr>
-        <p:spPr>
-          <a:xfrm>
-            <a:off x="6069330" y="3682901"/>
-            <a:ext cx="2720340" cy="431899"/>
-          </a:xfrm>
-          <a:prstGeom prst="rect">
-            <a:avLst/>
-          </a:prstGeom>
-          <a:noFill/>
-          <a:ln/>
-        </p:spPr>
-        <p:txBody>
-          <a:bodyPr wrap="square" lIns="0" tIns="0" rIns="0" bIns="0" rtlCol="0" anchor="t"/>
-          <a:lstStyle/>
-          <a:p>
-            <a:pPr algn="ctr" indent="0" marL="0">
-              <a:lnSpc>
-                <a:spcPts val="1700"/>
-              </a:lnSpc>
-              <a:buNone/>
-            </a:pPr>
-            <a:r>
-              <a:rPr lang="en-US" sz="1350" dirty="0">
-                <a:solidFill>
-                  <a:srgbClr val="FFFFFF"/>
-                </a:solidFill>
-                <a:latin typeface="Arial" pitchFamily="34" charset="0"/>
-                <a:ea typeface="Arial" pitchFamily="34" charset="-122"/>
-                <a:cs typeface="Arial" pitchFamily="34" charset="-120"/>
-              </a:rPr>
-              <a:t>GITHUB COPILOT APP</a:t>
-            </a:r>
-            <a:endParaRPr lang="en-US" sz="1350" dirty="0"/>
-          </a:p>
-          <a:p>
-            <a:pPr algn="ctr" indent="0" marL="0">
-              <a:lnSpc>
-                <a:spcPts val="1700"/>
-              </a:lnSpc>
-              <a:buNone/>
-            </a:pPr>
-            <a:r>
-              <a:rPr lang="en-US" sz="1350" dirty="0">
-                <a:solidFill>
-                  <a:srgbClr val="FFFFFF"/>
-                </a:solidFill>
-                <a:latin typeface="Arial" pitchFamily="34" charset="0"/>
-                <a:ea typeface="Arial" pitchFamily="34" charset="-122"/>
-                <a:cs typeface="Arial" pitchFamily="34" charset="-120"/>
-              </a:rPr>
-              <a:t>FOR BEGINNERS</a:t>
-            </a:r>
-            <a:endParaRPr lang="en-US" sz="1350" dirty="0"/>
-          </a:p>
-        </p:txBody>
-      </p:sp>
       <p:pic>
         <p:nvPicPr>
-          <p:cNvPr id="5" name="Image 0" descr="/Users/danwahlin/.copilot/session-state/56a7a0da-def8-48d4-b5e8-0ac3878cb8dd/files/slides-build/icons/FaGithub-FFFFFF.png">
-            <a:hlinkClick r:id="rId2" tooltip="https://github.com/github/copilot-app-for-beginners/tree/main/00-setup"/>
-          </p:cNvPr>
+          <p:cNvPr id="2" name="Image 0" descr="/Users/danwahlin/.copilot/session-state/56a7a0da-def8-48d4-b5e8-0ac3878cb8dd/files/slides-build/img/grad-title.jpg">    </p:cNvPr>
           <p:cNvPicPr>
             <a:picLocks noChangeAspect="1"/>
           </p:cNvPicPr>
@@ -2184,6 +2048,32 @@
         </p:blipFill>
         <p:spPr>
           <a:xfrm>
+            <a:off x="0" y="0"/>
+            <a:ext cx="9144000" cy="5143500"/>
+          </a:xfrm>
+          <a:prstGeom prst="rect">
+            <a:avLst/>
+          </a:prstGeom>
+        </p:spPr>
+      </p:pic>
+      <p:pic>
+        <p:nvPicPr>
+          <p:cNvPr id="3" name="Image 1" descr="/Users/danwahlin/.copilot/session-state/56a7a0da-def8-48d4-b5e8-0ac3878cb8dd/files/slides-build/icons/FaGithub-1F2328.png">
+            <a:hlinkClick r:id="rId3" tooltip="https://github.com/github/copilot-app-for-beginners/tree/main/00-setup"/>
+          </p:cNvPr>
+          <p:cNvPicPr>
+            <a:picLocks noChangeAspect="1"/>
+          </p:cNvPicPr>
+          <p:nvPr/>
+        </p:nvPicPr>
+        <p:blipFill>
+          <a:blip r:embed="rId2"/>
+          <a:stretch>
+            <a:fillRect/>
+          </a:stretch>
+        </p:blipFill>
+        <p:spPr>
+          <a:xfrm>
             <a:off x="8635901" y="203150"/>
             <a:ext cx="304800" cy="304800"/>
           </a:xfrm>
@@ -2194,14 +2084,14 @@
       </p:pic>
       <p:sp>
         <p:nvSpPr>
-          <p:cNvPr id="6" name="Text 3"/>
-          <p:cNvSpPr/>
-          <p:nvPr/>
-        </p:nvSpPr>
-        <p:spPr>
-          <a:xfrm>
-            <a:off x="609600" y="1241524"/>
-            <a:ext cx="5052060" cy="209550"/>
+          <p:cNvPr id="4" name="Text 0"/>
+          <p:cNvSpPr/>
+          <p:nvPr/>
+        </p:nvSpPr>
+        <p:spPr>
+          <a:xfrm>
+            <a:off x="1015901" y="989112"/>
+            <a:ext cx="6088279" cy="209550"/>
           </a:xfrm>
           <a:prstGeom prst="rect">
             <a:avLst/>
@@ -2233,14 +2123,14 @@
       </p:sp>
       <p:sp>
         <p:nvSpPr>
-          <p:cNvPr id="7" name="Text 4"/>
-          <p:cNvSpPr/>
-          <p:nvPr/>
-        </p:nvSpPr>
-        <p:spPr>
-          <a:xfrm>
-            <a:off x="609600" y="1552575"/>
-            <a:ext cx="5052060" cy="1168301"/>
+          <p:cNvPr id="5" name="Text 1"/>
+          <p:cNvSpPr/>
+          <p:nvPr/>
+        </p:nvSpPr>
+        <p:spPr>
+          <a:xfrm>
+            <a:off x="1015901" y="1300163"/>
+            <a:ext cx="6088279" cy="1219200"/>
           </a:xfrm>
           <a:prstGeom prst="rect">
             <a:avLst/>
@@ -2254,7 +2144,7 @@
           <a:p>
             <a:pPr algn="l" indent="0" marL="0">
               <a:lnSpc>
-                <a:spcPts val="4600"/>
+                <a:spcPts val="4800"/>
               </a:lnSpc>
               <a:spcBef>
                 <a:spcPts val="800"/>
@@ -2262,7 +2152,7 @@
               <a:buNone/>
             </a:pPr>
             <a:r>
-              <a:rPr lang="en-US" sz="4000" b="1" dirty="0">
+              <a:rPr lang="en-US" sz="4200" b="1" dirty="0">
                 <a:solidFill>
                   <a:srgbClr val="1F2328"/>
                 </a:solidFill>
@@ -2272,19 +2162,19 @@
               </a:rPr>
               <a:t>Set Up the GitHub Copilot app</a:t>
             </a:r>
-            <a:endParaRPr lang="en-US" sz="4000" dirty="0"/>
-          </a:p>
-        </p:txBody>
-      </p:sp>
-      <p:sp>
-        <p:nvSpPr>
-          <p:cNvPr id="8" name="Text 5"/>
-          <p:cNvSpPr/>
-          <p:nvPr/>
-        </p:nvSpPr>
-        <p:spPr>
-          <a:xfrm>
-            <a:off x="609600" y="2949476"/>
+            <a:endParaRPr lang="en-US" sz="4200" dirty="0"/>
+          </a:p>
+        </p:txBody>
+      </p:sp>
+      <p:sp>
+        <p:nvSpPr>
+          <p:cNvPr id="6" name="Text 2"/>
+          <p:cNvSpPr/>
+          <p:nvPr/>
+        </p:nvSpPr>
+        <p:spPr>
+          <a:xfrm>
+            <a:off x="1015901" y="2747963"/>
             <a:ext cx="609600" cy="63401"/>
           </a:xfrm>
           <a:prstGeom prst="roundRect">
@@ -2310,14 +2200,14 @@
       </p:sp>
       <p:sp>
         <p:nvSpPr>
-          <p:cNvPr id="9" name="Text 6"/>
-          <p:cNvSpPr/>
-          <p:nvPr/>
-        </p:nvSpPr>
-        <p:spPr>
-          <a:xfrm>
-            <a:off x="609600" y="3241477"/>
-            <a:ext cx="5052060" cy="660499"/>
+          <p:cNvPr id="7" name="Text 3"/>
+          <p:cNvSpPr/>
+          <p:nvPr/>
+        </p:nvSpPr>
+        <p:spPr>
+          <a:xfrm>
+            <a:off x="1015901" y="3039963"/>
+            <a:ext cx="6088279" cy="660499"/>
           </a:xfrm>
           <a:prstGeom prst="rect">
             <a:avLst/>
@@ -2352,21 +2242,21 @@
       </p:sp>
       <p:pic>
         <p:nvPicPr>
-          <p:cNvPr id="10" name="Image 1" descr="/Users/danwahlin/.copilot/session-state/56a7a0da-def8-48d4-b5e8-0ac3878cb8dd/files/slides-build/icons/FaGithub-0969DA.png">    </p:cNvPr>
+          <p:cNvPr id="8" name="Image 2" descr="/Users/danwahlin/.copilot/session-state/56a7a0da-def8-48d4-b5e8-0ac3878cb8dd/files/slides-build/icons/FaGithub-0969DA.png">    </p:cNvPr>
           <p:cNvPicPr>
             <a:picLocks noChangeAspect="1"/>
           </p:cNvPicPr>
           <p:nvPr/>
         </p:nvPicPr>
         <p:blipFill>
-          <a:blip r:embed="rId3"/>
+          <a:blip r:embed="rId4"/>
           <a:stretch>
             <a:fillRect/>
           </a:stretch>
         </p:blipFill>
         <p:spPr>
           <a:xfrm>
-            <a:off x="609600" y="4354562"/>
+            <a:off x="1015901" y="3965525"/>
             <a:ext cx="177701" cy="177701"/>
           </a:xfrm>
           <a:prstGeom prst="rect">
@@ -2376,13 +2266,13 @@
       </p:pic>
       <p:sp>
         <p:nvSpPr>
-          <p:cNvPr id="11" name="Text 7"/>
-          <p:cNvSpPr/>
-          <p:nvPr/>
-        </p:nvSpPr>
-        <p:spPr>
-          <a:xfrm>
-            <a:off x="876151" y="4343400"/>
+          <p:cNvPr id="9" name="Text 4"/>
+          <p:cNvSpPr/>
+          <p:nvPr/>
+        </p:nvSpPr>
+        <p:spPr>
+          <a:xfrm>
+            <a:off x="1282452" y="3954363"/>
             <a:ext cx="3373252" cy="200025"/>
           </a:xfrm>
           <a:prstGeom prst="rect">
@@ -2406,7 +2296,7 @@
                 <a:latin typeface="Arial" pitchFamily="34" charset="0"/>
                 <a:ea typeface="Arial" pitchFamily="34" charset="-122"/>
                 <a:cs typeface="Arial" pitchFamily="34" charset="-120"/>
-                <a:hlinkClick r:id="rId4" invalidUrl="" action="" tgtFrame="" tooltip="https://github.com/github/copilot-app-for-beginners/tree/main/00-setup" history="1" highlightClick="0" endSnd="0">
+                <a:hlinkClick r:id="rId5" invalidUrl="" action="" tgtFrame="" tooltip="https://github.com/github/copilot-app-for-beginners/tree/main/00-setup" history="1" highlightClick="0" endSnd="0">
                   <a:extLst>
                     <a:ext uri="{A12FA001-AC4F-418D-AE19-62706E023703}">
                       <ahyp:hlinkClr xmlns:ahyp="http://schemas.microsoft.com/office/drawing/2018/hyperlinkcolor" val="tx"/>
@@ -2554,82 +2444,9 @@
           </a:p>
         </p:txBody>
       </p:sp>
-      <p:sp>
-        <p:nvSpPr>
-          <p:cNvPr id="5" name="Text 3"/>
-          <p:cNvSpPr/>
-          <p:nvPr/>
-        </p:nvSpPr>
-        <p:spPr>
-          <a:xfrm>
-            <a:off x="7340501" y="177701"/>
-            <a:ext cx="1168301" cy="279350"/>
-          </a:xfrm>
-          <a:prstGeom prst="roundRect">
-            <a:avLst>
-              <a:gd name="adj" fmla="val 22731"/>
-            </a:avLst>
-          </a:prstGeom>
-          <a:solidFill>
-            <a:srgbClr val="1A7F37"/>
-          </a:solidFill>
-          <a:ln/>
-        </p:spPr>
-        <p:txBody>
-          <a:bodyPr wrap="square" rtlCol="0" anchor="ctr"/>
-          <a:lstStyle/>
-          <a:p>
-            <a:pPr indent="0" marL="0">
-              <a:buNone/>
-            </a:pPr>
-            <a:endParaRPr lang="en-US" dirty="0"/>
-          </a:p>
-        </p:txBody>
-      </p:sp>
-      <p:sp>
-        <p:nvSpPr>
-          <p:cNvPr id="6" name="Text 4"/>
-          <p:cNvSpPr/>
-          <p:nvPr/>
-        </p:nvSpPr>
-        <p:spPr>
-          <a:xfrm>
-            <a:off x="7461041" y="231577"/>
-            <a:ext cx="927071" cy="171450"/>
-          </a:xfrm>
-          <a:prstGeom prst="rect">
-            <a:avLst/>
-          </a:prstGeom>
-          <a:noFill/>
-          <a:ln/>
-        </p:spPr>
-        <p:txBody>
-          <a:bodyPr wrap="square" lIns="0" tIns="0" rIns="0" bIns="0" rtlCol="0" anchor="t"/>
-          <a:lstStyle/>
-          <a:p>
-            <a:pPr algn="ctr" indent="0" marL="0">
-              <a:buNone/>
-            </a:pPr>
-            <a:r>
-              <a:rPr lang="en-US" sz="1150" b="1" dirty="0">
-                <a:solidFill>
-                  <a:srgbClr val="FFFFFF"/>
-                </a:solidFill>
-                <a:latin typeface="Arial" pitchFamily="34" charset="0"/>
-                <a:ea typeface="Arial" pitchFamily="34" charset="-122"/>
-                <a:cs typeface="Arial" pitchFamily="34" charset="-120"/>
-              </a:rPr>
-              <a:t>CHAPTER 00</a:t>
-            </a:r>
-            <a:endParaRPr lang="en-US" sz="1150" dirty="0"/>
-          </a:p>
-        </p:txBody>
-      </p:sp>
       <p:pic>
         <p:nvPicPr>
-          <p:cNvPr id="7" name="Image 0" descr="/Users/danwahlin/.copilot/session-state/56a7a0da-def8-48d4-b5e8-0ac3878cb8dd/files/slides-build/icons/FaGithub-1F2328.png">
-            <a:hlinkClick r:id="rId2" tooltip="https://github.com/github/copilot-app-for-beginners/tree/main/00-setup"/>
-          </p:cNvPr>
+          <p:cNvPr id="5" name="Image 0" descr="/Users/danwahlin/.copilot/session-state/56a7a0da-def8-48d4-b5e8-0ac3878cb8dd/files/slides-build/img/grad-corner.png">    </p:cNvPr>
           <p:cNvPicPr>
             <a:picLocks noChangeAspect="1"/>
           </p:cNvPicPr>
@@ -2643,6 +2460,103 @@
         </p:blipFill>
         <p:spPr>
           <a:xfrm>
+            <a:off x="6349901" y="0"/>
+            <a:ext cx="2793950" cy="1308050"/>
+          </a:xfrm>
+          <a:prstGeom prst="rect">
+            <a:avLst/>
+          </a:prstGeom>
+        </p:spPr>
+      </p:pic>
+      <p:sp>
+        <p:nvSpPr>
+          <p:cNvPr id="6" name="Text 3"/>
+          <p:cNvSpPr/>
+          <p:nvPr/>
+        </p:nvSpPr>
+        <p:spPr>
+          <a:xfrm>
+            <a:off x="7340501" y="177701"/>
+            <a:ext cx="1168301" cy="279350"/>
+          </a:xfrm>
+          <a:prstGeom prst="roundRect">
+            <a:avLst>
+              <a:gd name="adj" fmla="val 22731"/>
+            </a:avLst>
+          </a:prstGeom>
+          <a:solidFill>
+            <a:srgbClr val="1A7F37"/>
+          </a:solidFill>
+          <a:ln/>
+        </p:spPr>
+        <p:txBody>
+          <a:bodyPr wrap="square" rtlCol="0" anchor="ctr"/>
+          <a:lstStyle/>
+          <a:p>
+            <a:pPr indent="0" marL="0">
+              <a:buNone/>
+            </a:pPr>
+            <a:endParaRPr lang="en-US" dirty="0"/>
+          </a:p>
+        </p:txBody>
+      </p:sp>
+      <p:sp>
+        <p:nvSpPr>
+          <p:cNvPr id="7" name="Text 4"/>
+          <p:cNvSpPr/>
+          <p:nvPr/>
+        </p:nvSpPr>
+        <p:spPr>
+          <a:xfrm>
+            <a:off x="7461041" y="231577"/>
+            <a:ext cx="927071" cy="171450"/>
+          </a:xfrm>
+          <a:prstGeom prst="rect">
+            <a:avLst/>
+          </a:prstGeom>
+          <a:noFill/>
+          <a:ln/>
+        </p:spPr>
+        <p:txBody>
+          <a:bodyPr wrap="square" lIns="0" tIns="0" rIns="0" bIns="0" rtlCol="0" anchor="t"/>
+          <a:lstStyle/>
+          <a:p>
+            <a:pPr algn="ctr" indent="0" marL="0">
+              <a:buNone/>
+            </a:pPr>
+            <a:r>
+              <a:rPr lang="en-US" sz="1150" b="1" dirty="0">
+                <a:solidFill>
+                  <a:srgbClr val="FFFFFF"/>
+                </a:solidFill>
+                <a:latin typeface="Arial" pitchFamily="34" charset="0"/>
+                <a:ea typeface="Arial" pitchFamily="34" charset="-122"/>
+                <a:cs typeface="Arial" pitchFamily="34" charset="-120"/>
+              </a:rPr>
+              <a:t>CHAPTER 00</a:t>
+            </a:r>
+            <a:endParaRPr lang="en-US" sz="1150" dirty="0"/>
+          </a:p>
+        </p:txBody>
+      </p:sp>
+      <p:pic>
+        <p:nvPicPr>
+          <p:cNvPr id="8" name="Image 1" descr="/Users/danwahlin/.copilot/session-state/56a7a0da-def8-48d4-b5e8-0ac3878cb8dd/files/slides-build/icons/FaGithub-1F2328.png">
+            <a:hlinkClick r:id="rId3" tooltip="https://github.com/github/copilot-app-for-beginners/tree/main/00-setup"/>
+          </p:cNvPr>
+          <p:cNvPicPr>
+            <a:picLocks noChangeAspect="1"/>
+          </p:cNvPicPr>
+          <p:nvPr/>
+        </p:nvPicPr>
+        <p:blipFill>
+          <a:blip r:embed="rId2"/>
+          <a:stretch>
+            <a:fillRect/>
+          </a:stretch>
+        </p:blipFill>
+        <p:spPr>
+          <a:xfrm>
             <a:off x="8610600" y="165050"/>
             <a:ext cx="304800" cy="304800"/>
           </a:xfrm>
@@ -2653,7 +2567,7 @@
       </p:pic>
       <p:sp>
         <p:nvSpPr>
-          <p:cNvPr id="8" name="Text 5"/>
+          <p:cNvPr id="9" name="Text 5"/>
           <p:cNvSpPr/>
           <p:nvPr/>
         </p:nvSpPr>
@@ -2692,7 +2606,7 @@
       </p:sp>
       <p:sp>
         <p:nvSpPr>
-          <p:cNvPr id="9" name="Text 6"/>
+          <p:cNvPr id="10" name="Text 6"/>
           <p:cNvSpPr/>
           <p:nvPr/>
         </p:nvSpPr>
@@ -2737,7 +2651,7 @@
       </p:sp>
       <p:sp>
         <p:nvSpPr>
-          <p:cNvPr id="10" name="Text 7"/>
+          <p:cNvPr id="11" name="Text 7"/>
           <p:cNvSpPr/>
           <p:nvPr/>
         </p:nvSpPr>
@@ -2769,7 +2683,7 @@
       </p:sp>
       <p:sp>
         <p:nvSpPr>
-          <p:cNvPr id="11" name="Text 8"/>
+          <p:cNvPr id="12" name="Text 8"/>
           <p:cNvSpPr/>
           <p:nvPr/>
         </p:nvSpPr>
@@ -2841,112 +2755,9 @@
           <a:chExt cx="0" cy="0"/>
         </a:xfrm>
       </p:grpSpPr>
-      <p:sp>
-        <p:nvSpPr>
-          <p:cNvPr id="2" name="Text 0"/>
-          <p:cNvSpPr/>
-          <p:nvPr/>
-        </p:nvSpPr>
-        <p:spPr>
-          <a:xfrm>
-            <a:off x="0" y="0"/>
-            <a:ext cx="9144000" cy="76200"/>
-          </a:xfrm>
-          <a:prstGeom prst="rect">
-            <a:avLst/>
-          </a:prstGeom>
-          <a:solidFill>
-            <a:srgbClr val="1A7F37"/>
-          </a:solidFill>
-          <a:ln/>
-        </p:spPr>
-        <p:txBody>
-          <a:bodyPr wrap="square" rtlCol="0" anchor="ctr"/>
-          <a:lstStyle/>
-          <a:p>
-            <a:pPr indent="0" marL="0">
-              <a:buNone/>
-            </a:pPr>
-            <a:endParaRPr lang="en-US" dirty="0"/>
-          </a:p>
-        </p:txBody>
-      </p:sp>
-      <p:sp>
-        <p:nvSpPr>
-          <p:cNvPr id="3" name="Text 1"/>
-          <p:cNvSpPr/>
-          <p:nvPr/>
-        </p:nvSpPr>
-        <p:spPr>
-          <a:xfrm>
-            <a:off x="7340501" y="177701"/>
-            <a:ext cx="1168301" cy="279350"/>
-          </a:xfrm>
-          <a:prstGeom prst="roundRect">
-            <a:avLst>
-              <a:gd name="adj" fmla="val 22731"/>
-            </a:avLst>
-          </a:prstGeom>
-          <a:solidFill>
-            <a:srgbClr val="1A7F37"/>
-          </a:solidFill>
-          <a:ln/>
-        </p:spPr>
-        <p:txBody>
-          <a:bodyPr wrap="square" rtlCol="0" anchor="ctr"/>
-          <a:lstStyle/>
-          <a:p>
-            <a:pPr indent="0" marL="0">
-              <a:buNone/>
-            </a:pPr>
-            <a:endParaRPr lang="en-US" dirty="0"/>
-          </a:p>
-        </p:txBody>
-      </p:sp>
-      <p:sp>
-        <p:nvSpPr>
-          <p:cNvPr id="4" name="Text 2"/>
-          <p:cNvSpPr/>
-          <p:nvPr/>
-        </p:nvSpPr>
-        <p:spPr>
-          <a:xfrm>
-            <a:off x="7461041" y="231577"/>
-            <a:ext cx="927071" cy="171450"/>
-          </a:xfrm>
-          <a:prstGeom prst="rect">
-            <a:avLst/>
-          </a:prstGeom>
-          <a:noFill/>
-          <a:ln/>
-        </p:spPr>
-        <p:txBody>
-          <a:bodyPr wrap="square" lIns="0" tIns="0" rIns="0" bIns="0" rtlCol="0" anchor="t"/>
-          <a:lstStyle/>
-          <a:p>
-            <a:pPr algn="ctr" indent="0" marL="0">
-              <a:buNone/>
-            </a:pPr>
-            <a:r>
-              <a:rPr lang="en-US" sz="1150" b="1" dirty="0">
-                <a:solidFill>
-                  <a:srgbClr val="FFFFFF"/>
-                </a:solidFill>
-                <a:latin typeface="Arial" pitchFamily="34" charset="0"/>
-                <a:ea typeface="Arial" pitchFamily="34" charset="-122"/>
-                <a:cs typeface="Arial" pitchFamily="34" charset="-120"/>
-              </a:rPr>
-              <a:t>CHAPTER 00</a:t>
-            </a:r>
-            <a:endParaRPr lang="en-US" sz="1150" dirty="0"/>
-          </a:p>
-        </p:txBody>
-      </p:sp>
       <p:pic>
         <p:nvPicPr>
-          <p:cNvPr id="5" name="Image 0" descr="/Users/danwahlin/.copilot/session-state/56a7a0da-def8-48d4-b5e8-0ac3878cb8dd/files/slides-build/icons/FaGithub-1F2328.png">
-            <a:hlinkClick r:id="rId2" tooltip="https://github.com/github/copilot-app-for-beginners/tree/main/00-setup"/>
-          </p:cNvPr>
+          <p:cNvPr id="2" name="Image 0" descr="/Users/danwahlin/.copilot/session-state/56a7a0da-def8-48d4-b5e8-0ac3878cb8dd/files/slides-build/img/grad-corner.png">    </p:cNvPr>
           <p:cNvPicPr>
             <a:picLocks noChangeAspect="1"/>
           </p:cNvPicPr>
@@ -2960,6 +2771,103 @@
         </p:blipFill>
         <p:spPr>
           <a:xfrm>
+            <a:off x="6349901" y="0"/>
+            <a:ext cx="2793950" cy="1308050"/>
+          </a:xfrm>
+          <a:prstGeom prst="rect">
+            <a:avLst/>
+          </a:prstGeom>
+        </p:spPr>
+      </p:pic>
+      <p:sp>
+        <p:nvSpPr>
+          <p:cNvPr id="3" name="Text 0"/>
+          <p:cNvSpPr/>
+          <p:nvPr/>
+        </p:nvSpPr>
+        <p:spPr>
+          <a:xfrm>
+            <a:off x="7340501" y="177701"/>
+            <a:ext cx="1168301" cy="279350"/>
+          </a:xfrm>
+          <a:prstGeom prst="roundRect">
+            <a:avLst>
+              <a:gd name="adj" fmla="val 22731"/>
+            </a:avLst>
+          </a:prstGeom>
+          <a:solidFill>
+            <a:srgbClr val="1A7F37"/>
+          </a:solidFill>
+          <a:ln/>
+        </p:spPr>
+        <p:txBody>
+          <a:bodyPr wrap="square" rtlCol="0" anchor="ctr"/>
+          <a:lstStyle/>
+          <a:p>
+            <a:pPr indent="0" marL="0">
+              <a:buNone/>
+            </a:pPr>
+            <a:endParaRPr lang="en-US" dirty="0"/>
+          </a:p>
+        </p:txBody>
+      </p:sp>
+      <p:sp>
+        <p:nvSpPr>
+          <p:cNvPr id="4" name="Text 1"/>
+          <p:cNvSpPr/>
+          <p:nvPr/>
+        </p:nvSpPr>
+        <p:spPr>
+          <a:xfrm>
+            <a:off x="7461041" y="231577"/>
+            <a:ext cx="927071" cy="171450"/>
+          </a:xfrm>
+          <a:prstGeom prst="rect">
+            <a:avLst/>
+          </a:prstGeom>
+          <a:noFill/>
+          <a:ln/>
+        </p:spPr>
+        <p:txBody>
+          <a:bodyPr wrap="square" lIns="0" tIns="0" rIns="0" bIns="0" rtlCol="0" anchor="t"/>
+          <a:lstStyle/>
+          <a:p>
+            <a:pPr algn="ctr" indent="0" marL="0">
+              <a:buNone/>
+            </a:pPr>
+            <a:r>
+              <a:rPr lang="en-US" sz="1150" b="1" dirty="0">
+                <a:solidFill>
+                  <a:srgbClr val="FFFFFF"/>
+                </a:solidFill>
+                <a:latin typeface="Arial" pitchFamily="34" charset="0"/>
+                <a:ea typeface="Arial" pitchFamily="34" charset="-122"/>
+                <a:cs typeface="Arial" pitchFamily="34" charset="-120"/>
+              </a:rPr>
+              <a:t>CHAPTER 00</a:t>
+            </a:r>
+            <a:endParaRPr lang="en-US" sz="1150" dirty="0"/>
+          </a:p>
+        </p:txBody>
+      </p:sp>
+      <p:pic>
+        <p:nvPicPr>
+          <p:cNvPr id="5" name="Image 1" descr="/Users/danwahlin/.copilot/session-state/56a7a0da-def8-48d4-b5e8-0ac3878cb8dd/files/slides-build/icons/FaGithub-1F2328.png">
+            <a:hlinkClick r:id="rId3" tooltip="https://github.com/github/copilot-app-for-beginners/tree/main/00-setup"/>
+          </p:cNvPr>
+          <p:cNvPicPr>
+            <a:picLocks noChangeAspect="1"/>
+          </p:cNvPicPr>
+          <p:nvPr/>
+        </p:nvPicPr>
+        <p:blipFill>
+          <a:blip r:embed="rId2"/>
+          <a:stretch>
+            <a:fillRect/>
+          </a:stretch>
+        </p:blipFill>
+        <p:spPr>
+          <a:xfrm>
             <a:off x="8610600" y="165050"/>
             <a:ext cx="304800" cy="304800"/>
           </a:xfrm>
@@ -2970,7 +2878,7 @@
       </p:pic>
       <p:sp>
         <p:nvSpPr>
-          <p:cNvPr id="6" name="Text 3"/>
+          <p:cNvPr id="6" name="Text 2"/>
           <p:cNvSpPr/>
           <p:nvPr/>
         </p:nvSpPr>
@@ -3009,7 +2917,7 @@
       </p:sp>
       <p:sp>
         <p:nvSpPr>
-          <p:cNvPr id="7" name="Text 4"/>
+          <p:cNvPr id="7" name="Text 3"/>
           <p:cNvSpPr/>
           <p:nvPr/>
         </p:nvSpPr>
@@ -3054,7 +2962,7 @@
       </p:sp>
       <p:sp>
         <p:nvSpPr>
-          <p:cNvPr id="8" name="Text 5"/>
+          <p:cNvPr id="8" name="Text 4"/>
           <p:cNvSpPr/>
           <p:nvPr/>
         </p:nvSpPr>
@@ -3219,7 +3127,7 @@
       </p:sp>
       <p:sp>
         <p:nvSpPr>
-          <p:cNvPr id="9" name="Text 6"/>
+          <p:cNvPr id="9" name="Text 5"/>
           <p:cNvSpPr/>
           <p:nvPr/>
         </p:nvSpPr>
@@ -3255,7 +3163,7 @@
       </p:sp>
       <p:sp>
         <p:nvSpPr>
-          <p:cNvPr id="10" name="Text 7"/>
+          <p:cNvPr id="10" name="Text 6"/>
           <p:cNvSpPr/>
           <p:nvPr/>
         </p:nvSpPr>
@@ -3285,7 +3193,7 @@
       </p:sp>
       <p:sp>
         <p:nvSpPr>
-          <p:cNvPr id="11" name="Shape 8"/>
+          <p:cNvPr id="11" name="Shape 7"/>
           <p:cNvSpPr/>
           <p:nvPr/>
         </p:nvSpPr>
@@ -3308,7 +3216,7 @@
       </p:sp>
       <p:sp>
         <p:nvSpPr>
-          <p:cNvPr id="12" name="Text 9"/>
+          <p:cNvPr id="12" name="Text 8"/>
           <p:cNvSpPr/>
           <p:nvPr/>
         </p:nvSpPr>
@@ -3340,7 +3248,7 @@
       </p:sp>
       <p:sp>
         <p:nvSpPr>
-          <p:cNvPr id="13" name="Text 10"/>
+          <p:cNvPr id="13" name="Text 9"/>
           <p:cNvSpPr/>
           <p:nvPr/>
         </p:nvSpPr>
@@ -3372,7 +3280,7 @@
       </p:sp>
       <p:sp>
         <p:nvSpPr>
-          <p:cNvPr id="14" name="Text 11"/>
+          <p:cNvPr id="14" name="Text 10"/>
           <p:cNvSpPr/>
           <p:nvPr/>
         </p:nvSpPr>
@@ -3404,7 +3312,7 @@
       </p:sp>
       <p:sp>
         <p:nvSpPr>
-          <p:cNvPr id="15" name="Text 12"/>
+          <p:cNvPr id="15" name="Text 11"/>
           <p:cNvSpPr/>
           <p:nvPr/>
         </p:nvSpPr>
@@ -3443,7 +3351,7 @@
       </p:sp>
       <p:sp>
         <p:nvSpPr>
-          <p:cNvPr id="16" name="Text 13"/>
+          <p:cNvPr id="16" name="Text 12"/>
           <p:cNvSpPr/>
           <p:nvPr/>
         </p:nvSpPr>
@@ -3502,7 +3410,7 @@
       </p:sp>
       <p:sp>
         <p:nvSpPr>
-          <p:cNvPr id="17" name="Text 14"/>
+          <p:cNvPr id="17" name="Text 13"/>
           <p:cNvSpPr/>
           <p:nvPr/>
         </p:nvSpPr>
@@ -3561,7 +3469,7 @@
       </p:sp>
       <p:sp>
         <p:nvSpPr>
-          <p:cNvPr id="18" name="Text 15"/>
+          <p:cNvPr id="18" name="Text 14"/>
           <p:cNvSpPr/>
           <p:nvPr/>
         </p:nvSpPr>
@@ -3620,7 +3528,7 @@
       </p:sp>
       <p:sp>
         <p:nvSpPr>
-          <p:cNvPr id="19" name="Text 16"/>
+          <p:cNvPr id="19" name="Text 15"/>
           <p:cNvSpPr/>
           <p:nvPr/>
         </p:nvSpPr>
@@ -3679,7 +3587,7 @@
       </p:sp>
       <p:sp>
         <p:nvSpPr>
-          <p:cNvPr id="20" name="Text 17"/>
+          <p:cNvPr id="20" name="Text 16"/>
           <p:cNvSpPr/>
           <p:nvPr/>
         </p:nvSpPr>
@@ -3721,7 +3629,7 @@
       </p:sp>
       <p:sp>
         <p:nvSpPr>
-          <p:cNvPr id="21" name="Text 18"/>
+          <p:cNvPr id="21" name="Text 17"/>
           <p:cNvSpPr/>
           <p:nvPr/>
         </p:nvSpPr>
@@ -3780,7 +3688,7 @@
       </p:sp>
       <p:sp>
         <p:nvSpPr>
-          <p:cNvPr id="22" name="Text 19"/>
+          <p:cNvPr id="22" name="Text 18"/>
           <p:cNvSpPr/>
           <p:nvPr/>
         </p:nvSpPr>
@@ -3816,7 +3724,7 @@
       </p:sp>
       <p:sp>
         <p:nvSpPr>
-          <p:cNvPr id="23" name="Text 20"/>
+          <p:cNvPr id="23" name="Text 19"/>
           <p:cNvSpPr/>
           <p:nvPr/>
         </p:nvSpPr>
@@ -3848,14 +3756,14 @@
       </p:sp>
       <p:pic>
         <p:nvPicPr>
-          <p:cNvPr id="24" name="Image 1" descr="/Users/danwahlin/.copilot/session-state/56a7a0da-def8-48d4-b5e8-0ac3878cb8dd/files/slides-build/icons/GoCheckCircle-1A7F37.png">    </p:cNvPr>
+          <p:cNvPr id="24" name="Image 2" descr="/Users/danwahlin/.copilot/session-state/56a7a0da-def8-48d4-b5e8-0ac3878cb8dd/files/slides-build/icons/GoCheckCircle-1A7F37.png">    </p:cNvPr>
           <p:cNvPicPr>
             <a:picLocks noChangeAspect="1"/>
           </p:cNvPicPr>
           <p:nvPr/>
         </p:nvPicPr>
         <p:blipFill>
-          <a:blip r:embed="rId3"/>
+          <a:blip r:embed="rId4"/>
           <a:stretch>
             <a:fillRect/>
           </a:stretch>
@@ -3872,7 +3780,7 @@
       </p:pic>
       <p:sp>
         <p:nvSpPr>
-          <p:cNvPr id="25" name="Text 21"/>
+          <p:cNvPr id="25" name="Text 20"/>
           <p:cNvSpPr/>
           <p:nvPr/>
         </p:nvSpPr>
@@ -3914,7 +3822,7 @@
       </p:sp>
       <p:sp>
         <p:nvSpPr>
-          <p:cNvPr id="26" name="Text 22"/>
+          <p:cNvPr id="26" name="Text 21"/>
           <p:cNvSpPr/>
           <p:nvPr/>
         </p:nvSpPr>
@@ -3956,7 +3864,7 @@
       </p:sp>
       <p:sp>
         <p:nvSpPr>
-          <p:cNvPr id="27" name="Text 23"/>
+          <p:cNvPr id="27" name="Text 22"/>
           <p:cNvSpPr/>
           <p:nvPr/>
         </p:nvSpPr>
@@ -3992,7 +3900,7 @@
       </p:sp>
       <p:sp>
         <p:nvSpPr>
-          <p:cNvPr id="28" name="Text 24"/>
+          <p:cNvPr id="28" name="Text 23"/>
           <p:cNvSpPr/>
           <p:nvPr/>
         </p:nvSpPr>
@@ -4024,14 +3932,14 @@
       </p:sp>
       <p:pic>
         <p:nvPicPr>
-          <p:cNvPr id="29" name="Image 2" descr="/Users/danwahlin/.copilot/session-state/56a7a0da-def8-48d4-b5e8-0ac3878cb8dd/files/slides-build/icons/GoPerson-0969DA.png">    </p:cNvPr>
+          <p:cNvPr id="29" name="Image 3" descr="/Users/danwahlin/.copilot/session-state/56a7a0da-def8-48d4-b5e8-0ac3878cb8dd/files/slides-build/icons/GoPerson-0969DA.png">    </p:cNvPr>
           <p:cNvPicPr>
             <a:picLocks noChangeAspect="1"/>
           </p:cNvPicPr>
           <p:nvPr/>
         </p:nvPicPr>
         <p:blipFill>
-          <a:blip r:embed="rId4"/>
+          <a:blip r:embed="rId5"/>
           <a:stretch>
             <a:fillRect/>
           </a:stretch>
@@ -4048,7 +3956,7 @@
       </p:pic>
       <p:sp>
         <p:nvSpPr>
-          <p:cNvPr id="30" name="Text 25"/>
+          <p:cNvPr id="30" name="Text 24"/>
           <p:cNvSpPr/>
           <p:nvPr/>
         </p:nvSpPr>
@@ -4090,7 +3998,7 @@
       </p:sp>
       <p:sp>
         <p:nvSpPr>
-          <p:cNvPr id="31" name="Text 26"/>
+          <p:cNvPr id="31" name="Text 25"/>
           <p:cNvSpPr/>
           <p:nvPr/>
         </p:nvSpPr>
@@ -4196,112 +4104,9 @@
           <a:chExt cx="0" cy="0"/>
         </a:xfrm>
       </p:grpSpPr>
-      <p:sp>
-        <p:nvSpPr>
-          <p:cNvPr id="2" name="Text 0"/>
-          <p:cNvSpPr/>
-          <p:nvPr/>
-        </p:nvSpPr>
-        <p:spPr>
-          <a:xfrm>
-            <a:off x="0" y="0"/>
-            <a:ext cx="9144000" cy="76200"/>
-          </a:xfrm>
-          <a:prstGeom prst="rect">
-            <a:avLst/>
-          </a:prstGeom>
-          <a:solidFill>
-            <a:srgbClr val="1A7F37"/>
-          </a:solidFill>
-          <a:ln/>
-        </p:spPr>
-        <p:txBody>
-          <a:bodyPr wrap="square" rtlCol="0" anchor="ctr"/>
-          <a:lstStyle/>
-          <a:p>
-            <a:pPr indent="0" marL="0">
-              <a:buNone/>
-            </a:pPr>
-            <a:endParaRPr lang="en-US" dirty="0"/>
-          </a:p>
-        </p:txBody>
-      </p:sp>
-      <p:sp>
-        <p:nvSpPr>
-          <p:cNvPr id="3" name="Text 1"/>
-          <p:cNvSpPr/>
-          <p:nvPr/>
-        </p:nvSpPr>
-        <p:spPr>
-          <a:xfrm>
-            <a:off x="7340501" y="177701"/>
-            <a:ext cx="1168301" cy="279350"/>
-          </a:xfrm>
-          <a:prstGeom prst="roundRect">
-            <a:avLst>
-              <a:gd name="adj" fmla="val 22731"/>
-            </a:avLst>
-          </a:prstGeom>
-          <a:solidFill>
-            <a:srgbClr val="1A7F37"/>
-          </a:solidFill>
-          <a:ln/>
-        </p:spPr>
-        <p:txBody>
-          <a:bodyPr wrap="square" rtlCol="0" anchor="ctr"/>
-          <a:lstStyle/>
-          <a:p>
-            <a:pPr indent="0" marL="0">
-              <a:buNone/>
-            </a:pPr>
-            <a:endParaRPr lang="en-US" dirty="0"/>
-          </a:p>
-        </p:txBody>
-      </p:sp>
-      <p:sp>
-        <p:nvSpPr>
-          <p:cNvPr id="4" name="Text 2"/>
-          <p:cNvSpPr/>
-          <p:nvPr/>
-        </p:nvSpPr>
-        <p:spPr>
-          <a:xfrm>
-            <a:off x="7461041" y="231577"/>
-            <a:ext cx="927071" cy="171450"/>
-          </a:xfrm>
-          <a:prstGeom prst="rect">
-            <a:avLst/>
-          </a:prstGeom>
-          <a:noFill/>
-          <a:ln/>
-        </p:spPr>
-        <p:txBody>
-          <a:bodyPr wrap="square" lIns="0" tIns="0" rIns="0" bIns="0" rtlCol="0" anchor="t"/>
-          <a:lstStyle/>
-          <a:p>
-            <a:pPr algn="ctr" indent="0" marL="0">
-              <a:buNone/>
-            </a:pPr>
-            <a:r>
-              <a:rPr lang="en-US" sz="1150" b="1" dirty="0">
-                <a:solidFill>
-                  <a:srgbClr val="FFFFFF"/>
-                </a:solidFill>
-                <a:latin typeface="Arial" pitchFamily="34" charset="0"/>
-                <a:ea typeface="Arial" pitchFamily="34" charset="-122"/>
-                <a:cs typeface="Arial" pitchFamily="34" charset="-120"/>
-              </a:rPr>
-              <a:t>CHAPTER 00</a:t>
-            </a:r>
-            <a:endParaRPr lang="en-US" sz="1150" dirty="0"/>
-          </a:p>
-        </p:txBody>
-      </p:sp>
       <p:pic>
         <p:nvPicPr>
-          <p:cNvPr id="5" name="Image 0" descr="/Users/danwahlin/.copilot/session-state/56a7a0da-def8-48d4-b5e8-0ac3878cb8dd/files/slides-build/icons/FaGithub-1F2328.png">
-            <a:hlinkClick r:id="rId2" tooltip="https://github.com/github/copilot-app-for-beginners/tree/main/00-setup"/>
-          </p:cNvPr>
+          <p:cNvPr id="2" name="Image 0" descr="/Users/danwahlin/.copilot/session-state/56a7a0da-def8-48d4-b5e8-0ac3878cb8dd/files/slides-build/img/grad-corner.png">    </p:cNvPr>
           <p:cNvPicPr>
             <a:picLocks noChangeAspect="1"/>
           </p:cNvPicPr>
@@ -4315,6 +4120,103 @@
         </p:blipFill>
         <p:spPr>
           <a:xfrm>
+            <a:off x="6349901" y="0"/>
+            <a:ext cx="2793950" cy="1308050"/>
+          </a:xfrm>
+          <a:prstGeom prst="rect">
+            <a:avLst/>
+          </a:prstGeom>
+        </p:spPr>
+      </p:pic>
+      <p:sp>
+        <p:nvSpPr>
+          <p:cNvPr id="3" name="Text 0"/>
+          <p:cNvSpPr/>
+          <p:nvPr/>
+        </p:nvSpPr>
+        <p:spPr>
+          <a:xfrm>
+            <a:off x="7340501" y="177701"/>
+            <a:ext cx="1168301" cy="279350"/>
+          </a:xfrm>
+          <a:prstGeom prst="roundRect">
+            <a:avLst>
+              <a:gd name="adj" fmla="val 22731"/>
+            </a:avLst>
+          </a:prstGeom>
+          <a:solidFill>
+            <a:srgbClr val="1A7F37"/>
+          </a:solidFill>
+          <a:ln/>
+        </p:spPr>
+        <p:txBody>
+          <a:bodyPr wrap="square" rtlCol="0" anchor="ctr"/>
+          <a:lstStyle/>
+          <a:p>
+            <a:pPr indent="0" marL="0">
+              <a:buNone/>
+            </a:pPr>
+            <a:endParaRPr lang="en-US" dirty="0"/>
+          </a:p>
+        </p:txBody>
+      </p:sp>
+      <p:sp>
+        <p:nvSpPr>
+          <p:cNvPr id="4" name="Text 1"/>
+          <p:cNvSpPr/>
+          <p:nvPr/>
+        </p:nvSpPr>
+        <p:spPr>
+          <a:xfrm>
+            <a:off x="7461041" y="231577"/>
+            <a:ext cx="927071" cy="171450"/>
+          </a:xfrm>
+          <a:prstGeom prst="rect">
+            <a:avLst/>
+          </a:prstGeom>
+          <a:noFill/>
+          <a:ln/>
+        </p:spPr>
+        <p:txBody>
+          <a:bodyPr wrap="square" lIns="0" tIns="0" rIns="0" bIns="0" rtlCol="0" anchor="t"/>
+          <a:lstStyle/>
+          <a:p>
+            <a:pPr algn="ctr" indent="0" marL="0">
+              <a:buNone/>
+            </a:pPr>
+            <a:r>
+              <a:rPr lang="en-US" sz="1150" b="1" dirty="0">
+                <a:solidFill>
+                  <a:srgbClr val="FFFFFF"/>
+                </a:solidFill>
+                <a:latin typeface="Arial" pitchFamily="34" charset="0"/>
+                <a:ea typeface="Arial" pitchFamily="34" charset="-122"/>
+                <a:cs typeface="Arial" pitchFamily="34" charset="-120"/>
+              </a:rPr>
+              <a:t>CHAPTER 00</a:t>
+            </a:r>
+            <a:endParaRPr lang="en-US" sz="1150" dirty="0"/>
+          </a:p>
+        </p:txBody>
+      </p:sp>
+      <p:pic>
+        <p:nvPicPr>
+          <p:cNvPr id="5" name="Image 1" descr="/Users/danwahlin/.copilot/session-state/56a7a0da-def8-48d4-b5e8-0ac3878cb8dd/files/slides-build/icons/FaGithub-1F2328.png">
+            <a:hlinkClick r:id="rId3" tooltip="https://github.com/github/copilot-app-for-beginners/tree/main/00-setup"/>
+          </p:cNvPr>
+          <p:cNvPicPr>
+            <a:picLocks noChangeAspect="1"/>
+          </p:cNvPicPr>
+          <p:nvPr/>
+        </p:nvPicPr>
+        <p:blipFill>
+          <a:blip r:embed="rId2"/>
+          <a:stretch>
+            <a:fillRect/>
+          </a:stretch>
+        </p:blipFill>
+        <p:spPr>
+          <a:xfrm>
             <a:off x="8610600" y="165050"/>
             <a:ext cx="304800" cy="304800"/>
           </a:xfrm>
@@ -4325,7 +4227,7 @@
       </p:pic>
       <p:sp>
         <p:nvSpPr>
-          <p:cNvPr id="6" name="Text 3"/>
+          <p:cNvPr id="6" name="Text 2"/>
           <p:cNvSpPr/>
           <p:nvPr/>
         </p:nvSpPr>
@@ -4364,7 +4266,7 @@
       </p:sp>
       <p:sp>
         <p:nvSpPr>
-          <p:cNvPr id="7" name="Text 4"/>
+          <p:cNvPr id="7" name="Text 3"/>
           <p:cNvSpPr/>
           <p:nvPr/>
         </p:nvSpPr>
@@ -4409,7 +4311,7 @@
       </p:sp>
       <p:sp>
         <p:nvSpPr>
-          <p:cNvPr id="8" name="Text 5"/>
+          <p:cNvPr id="8" name="Text 4"/>
           <p:cNvSpPr/>
           <p:nvPr/>
         </p:nvSpPr>
@@ -4454,7 +4356,7 @@
       </p:sp>
       <p:sp>
         <p:nvSpPr>
-          <p:cNvPr id="9" name="Text 6"/>
+          <p:cNvPr id="9" name="Text 5"/>
           <p:cNvSpPr/>
           <p:nvPr/>
         </p:nvSpPr>
@@ -4486,7 +4388,7 @@
       </p:sp>
       <p:sp>
         <p:nvSpPr>
-          <p:cNvPr id="10" name="Text 7"/>
+          <p:cNvPr id="10" name="Text 6"/>
           <p:cNvSpPr/>
           <p:nvPr/>
         </p:nvSpPr>
@@ -4525,7 +4427,7 @@
       </p:sp>
       <p:sp>
         <p:nvSpPr>
-          <p:cNvPr id="11" name="Text 8"/>
+          <p:cNvPr id="11" name="Text 7"/>
           <p:cNvSpPr/>
           <p:nvPr/>
         </p:nvSpPr>
@@ -4567,7 +4469,7 @@
       </p:sp>
       <p:sp>
         <p:nvSpPr>
-          <p:cNvPr id="12" name="Text 9"/>
+          <p:cNvPr id="12" name="Text 8"/>
           <p:cNvSpPr/>
           <p:nvPr/>
         </p:nvSpPr>
@@ -4609,7 +4511,7 @@
       </p:sp>
       <p:sp>
         <p:nvSpPr>
-          <p:cNvPr id="13" name="Text 10"/>
+          <p:cNvPr id="13" name="Text 9"/>
           <p:cNvSpPr/>
           <p:nvPr/>
         </p:nvSpPr>
@@ -4641,7 +4543,7 @@
       </p:sp>
       <p:sp>
         <p:nvSpPr>
-          <p:cNvPr id="14" name="Text 11"/>
+          <p:cNvPr id="14" name="Text 10"/>
           <p:cNvSpPr/>
           <p:nvPr/>
         </p:nvSpPr>
@@ -4680,7 +4582,7 @@
       </p:sp>
       <p:sp>
         <p:nvSpPr>
-          <p:cNvPr id="15" name="Text 12"/>
+          <p:cNvPr id="15" name="Text 11"/>
           <p:cNvSpPr/>
           <p:nvPr/>
         </p:nvSpPr>
@@ -4722,7 +4624,7 @@
       </p:sp>
       <p:sp>
         <p:nvSpPr>
-          <p:cNvPr id="16" name="Text 13"/>
+          <p:cNvPr id="16" name="Text 12"/>
           <p:cNvSpPr/>
           <p:nvPr/>
         </p:nvSpPr>
@@ -4798,7 +4700,7 @@
       </p:sp>
       <p:sp>
         <p:nvSpPr>
-          <p:cNvPr id="17" name="Text 14"/>
+          <p:cNvPr id="17" name="Text 13"/>
           <p:cNvSpPr/>
           <p:nvPr/>
         </p:nvSpPr>
@@ -4834,7 +4736,7 @@
       </p:sp>
       <p:sp>
         <p:nvSpPr>
-          <p:cNvPr id="18" name="Text 15"/>
+          <p:cNvPr id="18" name="Text 14"/>
           <p:cNvSpPr/>
           <p:nvPr/>
         </p:nvSpPr>
@@ -4876,7 +4778,7 @@
       </p:sp>
       <p:sp>
         <p:nvSpPr>
-          <p:cNvPr id="19" name="Text 16"/>
+          <p:cNvPr id="19" name="Text 15"/>
           <p:cNvSpPr/>
           <p:nvPr/>
         </p:nvSpPr>
@@ -4908,7 +4810,7 @@
       </p:sp>
       <p:sp>
         <p:nvSpPr>
-          <p:cNvPr id="20" name="Text 17"/>
+          <p:cNvPr id="20" name="Text 16"/>
           <p:cNvSpPr/>
           <p:nvPr/>
         </p:nvSpPr>
@@ -4947,7 +4849,7 @@
       </p:sp>
       <p:sp>
         <p:nvSpPr>
-          <p:cNvPr id="21" name="Text 18"/>
+          <p:cNvPr id="21" name="Text 17"/>
           <p:cNvSpPr/>
           <p:nvPr/>
         </p:nvSpPr>
@@ -4989,7 +4891,7 @@
       </p:sp>
       <p:sp>
         <p:nvSpPr>
-          <p:cNvPr id="22" name="Text 19"/>
+          <p:cNvPr id="22" name="Text 18"/>
           <p:cNvSpPr/>
           <p:nvPr/>
         </p:nvSpPr>
@@ -5048,7 +4950,7 @@
       </p:sp>
       <p:sp>
         <p:nvSpPr>
-          <p:cNvPr id="23" name="Text 20"/>
+          <p:cNvPr id="23" name="Text 19"/>
           <p:cNvSpPr/>
           <p:nvPr/>
         </p:nvSpPr>
@@ -5084,7 +4986,7 @@
       </p:sp>
       <p:sp>
         <p:nvSpPr>
-          <p:cNvPr id="24" name="Text 21"/>
+          <p:cNvPr id="24" name="Text 20"/>
           <p:cNvSpPr/>
           <p:nvPr/>
         </p:nvSpPr>
@@ -5126,7 +5028,7 @@
       </p:sp>
       <p:sp>
         <p:nvSpPr>
-          <p:cNvPr id="25" name="Text 22"/>
+          <p:cNvPr id="25" name="Text 21"/>
           <p:cNvSpPr/>
           <p:nvPr/>
         </p:nvSpPr>
@@ -5162,7 +5064,7 @@
       </p:sp>
       <p:sp>
         <p:nvSpPr>
-          <p:cNvPr id="26" name="Text 23"/>
+          <p:cNvPr id="26" name="Text 22"/>
           <p:cNvSpPr/>
           <p:nvPr/>
         </p:nvSpPr>
@@ -5194,14 +5096,14 @@
       </p:sp>
       <p:pic>
         <p:nvPicPr>
-          <p:cNvPr id="27" name="Image 1" descr="/Users/danwahlin/.copilot/session-state/56a7a0da-def8-48d4-b5e8-0ac3878cb8dd/files/slides-build/icons/GoTasklist-1A7F37.png">    </p:cNvPr>
+          <p:cNvPr id="27" name="Image 2" descr="/Users/danwahlin/.copilot/session-state/56a7a0da-def8-48d4-b5e8-0ac3878cb8dd/files/slides-build/icons/GoTasklist-1A7F37.png">    </p:cNvPr>
           <p:cNvPicPr>
             <a:picLocks noChangeAspect="1"/>
           </p:cNvPicPr>
           <p:nvPr/>
         </p:nvPicPr>
         <p:blipFill>
-          <a:blip r:embed="rId3"/>
+          <a:blip r:embed="rId4"/>
           <a:stretch>
             <a:fillRect/>
           </a:stretch>
@@ -5218,7 +5120,7 @@
       </p:pic>
       <p:sp>
         <p:nvSpPr>
-          <p:cNvPr id="28" name="Text 24"/>
+          <p:cNvPr id="28" name="Text 23"/>
           <p:cNvSpPr/>
           <p:nvPr/>
         </p:nvSpPr>
@@ -5260,7 +5162,7 @@
       </p:sp>
       <p:sp>
         <p:nvSpPr>
-          <p:cNvPr id="29" name="Text 25"/>
+          <p:cNvPr id="29" name="Text 24"/>
           <p:cNvSpPr/>
           <p:nvPr/>
         </p:nvSpPr>
@@ -5292,7 +5194,7 @@
       </p:sp>
       <p:sp>
         <p:nvSpPr>
-          <p:cNvPr id="30" name="Text 26"/>
+          <p:cNvPr id="30" name="Text 25"/>
           <p:cNvSpPr/>
           <p:nvPr/>
         </p:nvSpPr>
@@ -5334,7 +5236,7 @@
       </p:sp>
       <p:sp>
         <p:nvSpPr>
-          <p:cNvPr id="31" name="Text 27"/>
+          <p:cNvPr id="31" name="Text 26"/>
           <p:cNvSpPr/>
           <p:nvPr/>
         </p:nvSpPr>
@@ -5366,7 +5268,7 @@
       </p:sp>
       <p:sp>
         <p:nvSpPr>
-          <p:cNvPr id="32" name="Text 28"/>
+          <p:cNvPr id="32" name="Text 27"/>
           <p:cNvSpPr/>
           <p:nvPr/>
         </p:nvSpPr>
@@ -5408,7 +5310,7 @@
       </p:sp>
       <p:sp>
         <p:nvSpPr>
-          <p:cNvPr id="33" name="Text 29"/>
+          <p:cNvPr id="33" name="Text 28"/>
           <p:cNvSpPr/>
           <p:nvPr/>
         </p:nvSpPr>
@@ -5440,7 +5342,7 @@
       </p:sp>
       <p:sp>
         <p:nvSpPr>
-          <p:cNvPr id="34" name="Text 30"/>
+          <p:cNvPr id="34" name="Text 29"/>
           <p:cNvSpPr/>
           <p:nvPr/>
         </p:nvSpPr>
@@ -5482,7 +5384,7 @@
       </p:sp>
       <p:sp>
         <p:nvSpPr>
-          <p:cNvPr id="35" name="Text 31"/>
+          <p:cNvPr id="35" name="Text 30"/>
           <p:cNvSpPr/>
           <p:nvPr/>
         </p:nvSpPr>
@@ -5514,7 +5416,7 @@
       </p:sp>
       <p:sp>
         <p:nvSpPr>
-          <p:cNvPr id="36" name="Text 32"/>
+          <p:cNvPr id="36" name="Text 31"/>
           <p:cNvSpPr/>
           <p:nvPr/>
         </p:nvSpPr>
@@ -5556,7 +5458,7 @@
       </p:sp>
       <p:sp>
         <p:nvSpPr>
-          <p:cNvPr id="37" name="Text 33"/>
+          <p:cNvPr id="37" name="Text 32"/>
           <p:cNvSpPr/>
           <p:nvPr/>
         </p:nvSpPr>
@@ -5592,14 +5494,14 @@
       </p:sp>
       <p:pic>
         <p:nvPicPr>
-          <p:cNvPr id="38" name="Image 2" descr="/Users/danwahlin/.copilot/session-state/56a7a0da-def8-48d4-b5e8-0ac3878cb8dd/files/slides-build/icons/GoAlert-9A6700.png">    </p:cNvPr>
+          <p:cNvPr id="38" name="Image 3" descr="/Users/danwahlin/.copilot/session-state/56a7a0da-def8-48d4-b5e8-0ac3878cb8dd/files/slides-build/icons/GoAlert-9A6700.png">    </p:cNvPr>
           <p:cNvPicPr>
             <a:picLocks noChangeAspect="1"/>
           </p:cNvPicPr>
           <p:nvPr/>
         </p:nvPicPr>
         <p:blipFill>
-          <a:blip r:embed="rId4"/>
+          <a:blip r:embed="rId5"/>
           <a:stretch>
             <a:fillRect/>
           </a:stretch>
@@ -5616,7 +5518,7 @@
       </p:pic>
       <p:sp>
         <p:nvSpPr>
-          <p:cNvPr id="39" name="Text 34"/>
+          <p:cNvPr id="39" name="Text 33"/>
           <p:cNvSpPr/>
           <p:nvPr/>
         </p:nvSpPr>
@@ -5722,112 +5624,9 @@
           <a:chExt cx="0" cy="0"/>
         </a:xfrm>
       </p:grpSpPr>
-      <p:sp>
-        <p:nvSpPr>
-          <p:cNvPr id="2" name="Text 0"/>
-          <p:cNvSpPr/>
-          <p:nvPr/>
-        </p:nvSpPr>
-        <p:spPr>
-          <a:xfrm>
-            <a:off x="0" y="0"/>
-            <a:ext cx="9144000" cy="76200"/>
-          </a:xfrm>
-          <a:prstGeom prst="rect">
-            <a:avLst/>
-          </a:prstGeom>
-          <a:solidFill>
-            <a:srgbClr val="1A7F37"/>
-          </a:solidFill>
-          <a:ln/>
-        </p:spPr>
-        <p:txBody>
-          <a:bodyPr wrap="square" rtlCol="0" anchor="ctr"/>
-          <a:lstStyle/>
-          <a:p>
-            <a:pPr indent="0" marL="0">
-              <a:buNone/>
-            </a:pPr>
-            <a:endParaRPr lang="en-US" dirty="0"/>
-          </a:p>
-        </p:txBody>
-      </p:sp>
-      <p:sp>
-        <p:nvSpPr>
-          <p:cNvPr id="3" name="Text 1"/>
-          <p:cNvSpPr/>
-          <p:nvPr/>
-        </p:nvSpPr>
-        <p:spPr>
-          <a:xfrm>
-            <a:off x="7340501" y="177701"/>
-            <a:ext cx="1168301" cy="279350"/>
-          </a:xfrm>
-          <a:prstGeom prst="roundRect">
-            <a:avLst>
-              <a:gd name="adj" fmla="val 22731"/>
-            </a:avLst>
-          </a:prstGeom>
-          <a:solidFill>
-            <a:srgbClr val="1A7F37"/>
-          </a:solidFill>
-          <a:ln/>
-        </p:spPr>
-        <p:txBody>
-          <a:bodyPr wrap="square" rtlCol="0" anchor="ctr"/>
-          <a:lstStyle/>
-          <a:p>
-            <a:pPr indent="0" marL="0">
-              <a:buNone/>
-            </a:pPr>
-            <a:endParaRPr lang="en-US" dirty="0"/>
-          </a:p>
-        </p:txBody>
-      </p:sp>
-      <p:sp>
-        <p:nvSpPr>
-          <p:cNvPr id="4" name="Text 2"/>
-          <p:cNvSpPr/>
-          <p:nvPr/>
-        </p:nvSpPr>
-        <p:spPr>
-          <a:xfrm>
-            <a:off x="7461041" y="231577"/>
-            <a:ext cx="927071" cy="171450"/>
-          </a:xfrm>
-          <a:prstGeom prst="rect">
-            <a:avLst/>
-          </a:prstGeom>
-          <a:noFill/>
-          <a:ln/>
-        </p:spPr>
-        <p:txBody>
-          <a:bodyPr wrap="square" lIns="0" tIns="0" rIns="0" bIns="0" rtlCol="0" anchor="t"/>
-          <a:lstStyle/>
-          <a:p>
-            <a:pPr algn="ctr" indent="0" marL="0">
-              <a:buNone/>
-            </a:pPr>
-            <a:r>
-              <a:rPr lang="en-US" sz="1150" b="1" dirty="0">
-                <a:solidFill>
-                  <a:srgbClr val="FFFFFF"/>
-                </a:solidFill>
-                <a:latin typeface="Arial" pitchFamily="34" charset="0"/>
-                <a:ea typeface="Arial" pitchFamily="34" charset="-122"/>
-                <a:cs typeface="Arial" pitchFamily="34" charset="-120"/>
-              </a:rPr>
-              <a:t>CHAPTER 00</a:t>
-            </a:r>
-            <a:endParaRPr lang="en-US" sz="1150" dirty="0"/>
-          </a:p>
-        </p:txBody>
-      </p:sp>
       <p:pic>
         <p:nvPicPr>
-          <p:cNvPr id="5" name="Image 0" descr="/Users/danwahlin/.copilot/session-state/56a7a0da-def8-48d4-b5e8-0ac3878cb8dd/files/slides-build/icons/FaGithub-1F2328.png">
-            <a:hlinkClick r:id="rId2" tooltip="https://github.com/github/copilot-app-for-beginners/tree/main/00-setup"/>
-          </p:cNvPr>
+          <p:cNvPr id="2" name="Image 0" descr="/Users/danwahlin/.copilot/session-state/56a7a0da-def8-48d4-b5e8-0ac3878cb8dd/files/slides-build/img/grad-corner.png">    </p:cNvPr>
           <p:cNvPicPr>
             <a:picLocks noChangeAspect="1"/>
           </p:cNvPicPr>
@@ -5841,6 +5640,103 @@
         </p:blipFill>
         <p:spPr>
           <a:xfrm>
+            <a:off x="6349901" y="0"/>
+            <a:ext cx="2793950" cy="1308050"/>
+          </a:xfrm>
+          <a:prstGeom prst="rect">
+            <a:avLst/>
+          </a:prstGeom>
+        </p:spPr>
+      </p:pic>
+      <p:sp>
+        <p:nvSpPr>
+          <p:cNvPr id="3" name="Text 0"/>
+          <p:cNvSpPr/>
+          <p:nvPr/>
+        </p:nvSpPr>
+        <p:spPr>
+          <a:xfrm>
+            <a:off x="7340501" y="177701"/>
+            <a:ext cx="1168301" cy="279350"/>
+          </a:xfrm>
+          <a:prstGeom prst="roundRect">
+            <a:avLst>
+              <a:gd name="adj" fmla="val 22731"/>
+            </a:avLst>
+          </a:prstGeom>
+          <a:solidFill>
+            <a:srgbClr val="1A7F37"/>
+          </a:solidFill>
+          <a:ln/>
+        </p:spPr>
+        <p:txBody>
+          <a:bodyPr wrap="square" rtlCol="0" anchor="ctr"/>
+          <a:lstStyle/>
+          <a:p>
+            <a:pPr indent="0" marL="0">
+              <a:buNone/>
+            </a:pPr>
+            <a:endParaRPr lang="en-US" dirty="0"/>
+          </a:p>
+        </p:txBody>
+      </p:sp>
+      <p:sp>
+        <p:nvSpPr>
+          <p:cNvPr id="4" name="Text 1"/>
+          <p:cNvSpPr/>
+          <p:nvPr/>
+        </p:nvSpPr>
+        <p:spPr>
+          <a:xfrm>
+            <a:off x="7461041" y="231577"/>
+            <a:ext cx="927071" cy="171450"/>
+          </a:xfrm>
+          <a:prstGeom prst="rect">
+            <a:avLst/>
+          </a:prstGeom>
+          <a:noFill/>
+          <a:ln/>
+        </p:spPr>
+        <p:txBody>
+          <a:bodyPr wrap="square" lIns="0" tIns="0" rIns="0" bIns="0" rtlCol="0" anchor="t"/>
+          <a:lstStyle/>
+          <a:p>
+            <a:pPr algn="ctr" indent="0" marL="0">
+              <a:buNone/>
+            </a:pPr>
+            <a:r>
+              <a:rPr lang="en-US" sz="1150" b="1" dirty="0">
+                <a:solidFill>
+                  <a:srgbClr val="FFFFFF"/>
+                </a:solidFill>
+                <a:latin typeface="Arial" pitchFamily="34" charset="0"/>
+                <a:ea typeface="Arial" pitchFamily="34" charset="-122"/>
+                <a:cs typeface="Arial" pitchFamily="34" charset="-120"/>
+              </a:rPr>
+              <a:t>CHAPTER 00</a:t>
+            </a:r>
+            <a:endParaRPr lang="en-US" sz="1150" dirty="0"/>
+          </a:p>
+        </p:txBody>
+      </p:sp>
+      <p:pic>
+        <p:nvPicPr>
+          <p:cNvPr id="5" name="Image 1" descr="/Users/danwahlin/.copilot/session-state/56a7a0da-def8-48d4-b5e8-0ac3878cb8dd/files/slides-build/icons/FaGithub-1F2328.png">
+            <a:hlinkClick r:id="rId3" tooltip="https://github.com/github/copilot-app-for-beginners/tree/main/00-setup"/>
+          </p:cNvPr>
+          <p:cNvPicPr>
+            <a:picLocks noChangeAspect="1"/>
+          </p:cNvPicPr>
+          <p:nvPr/>
+        </p:nvPicPr>
+        <p:blipFill>
+          <a:blip r:embed="rId2"/>
+          <a:stretch>
+            <a:fillRect/>
+          </a:stretch>
+        </p:blipFill>
+        <p:spPr>
+          <a:xfrm>
             <a:off x="8610600" y="165050"/>
             <a:ext cx="304800" cy="304800"/>
           </a:xfrm>
@@ -5851,7 +5747,7 @@
       </p:pic>
       <p:sp>
         <p:nvSpPr>
-          <p:cNvPr id="6" name="Text 3"/>
+          <p:cNvPr id="6" name="Text 2"/>
           <p:cNvSpPr/>
           <p:nvPr/>
         </p:nvSpPr>
@@ -5890,7 +5786,7 @@
       </p:sp>
       <p:sp>
         <p:nvSpPr>
-          <p:cNvPr id="7" name="Text 4"/>
+          <p:cNvPr id="7" name="Text 3"/>
           <p:cNvSpPr/>
           <p:nvPr/>
         </p:nvSpPr>
@@ -5935,7 +5831,7 @@
       </p:sp>
       <p:sp>
         <p:nvSpPr>
-          <p:cNvPr id="8" name="Text 5"/>
+          <p:cNvPr id="8" name="Text 4"/>
           <p:cNvSpPr/>
           <p:nvPr/>
         </p:nvSpPr>
@@ -5980,7 +5876,7 @@
       </p:sp>
       <p:sp>
         <p:nvSpPr>
-          <p:cNvPr id="9" name="Text 6"/>
+          <p:cNvPr id="9" name="Text 5"/>
           <p:cNvSpPr/>
           <p:nvPr/>
         </p:nvSpPr>
@@ -6012,7 +5908,7 @@
       </p:sp>
       <p:sp>
         <p:nvSpPr>
-          <p:cNvPr id="10" name="Shape 7"/>
+          <p:cNvPr id="10" name="Shape 6"/>
           <p:cNvSpPr/>
           <p:nvPr/>
         </p:nvSpPr>
@@ -6035,7 +5931,7 @@
       </p:sp>
       <p:sp>
         <p:nvSpPr>
-          <p:cNvPr id="11" name="Shape 8"/>
+          <p:cNvPr id="11" name="Shape 7"/>
           <p:cNvSpPr/>
           <p:nvPr/>
         </p:nvSpPr>
@@ -6058,7 +5954,7 @@
       </p:sp>
       <p:sp>
         <p:nvSpPr>
-          <p:cNvPr id="12" name="Shape 9"/>
+          <p:cNvPr id="12" name="Shape 8"/>
           <p:cNvSpPr/>
           <p:nvPr/>
         </p:nvSpPr>
@@ -6081,7 +5977,7 @@
       </p:sp>
       <p:sp>
         <p:nvSpPr>
-          <p:cNvPr id="13" name="Shape 10"/>
+          <p:cNvPr id="13" name="Shape 9"/>
           <p:cNvSpPr/>
           <p:nvPr/>
         </p:nvSpPr>
@@ -6104,14 +6000,14 @@
       </p:sp>
       <p:pic>
         <p:nvPicPr>
-          <p:cNvPr id="14" name="Image 1" descr="/Users/danwahlin/.copilot/session-state/56a7a0da-def8-48d4-b5e8-0ac3878cb8dd/files/slides-build/icons/GoCopilot-8250DF.png">    </p:cNvPr>
+          <p:cNvPr id="14" name="Image 2" descr="/Users/danwahlin/.copilot/session-state/56a7a0da-def8-48d4-b5e8-0ac3878cb8dd/files/slides-build/icons/GoCopilot-8250DF.png">    </p:cNvPr>
           <p:cNvPicPr>
             <a:picLocks noChangeAspect="1"/>
           </p:cNvPicPr>
           <p:nvPr/>
         </p:nvPicPr>
         <p:blipFill>
-          <a:blip r:embed="rId3"/>
+          <a:blip r:embed="rId4"/>
           <a:stretch>
             <a:fillRect/>
           </a:stretch>
@@ -6128,7 +6024,7 @@
       </p:pic>
       <p:sp>
         <p:nvSpPr>
-          <p:cNvPr id="15" name="Text 11"/>
+          <p:cNvPr id="15" name="Text 10"/>
           <p:cNvSpPr/>
           <p:nvPr/>
         </p:nvSpPr>
@@ -6167,7 +6063,7 @@
       </p:sp>
       <p:sp>
         <p:nvSpPr>
-          <p:cNvPr id="16" name="Text 12"/>
+          <p:cNvPr id="16" name="Text 11"/>
           <p:cNvSpPr/>
           <p:nvPr/>
         </p:nvSpPr>
@@ -6209,7 +6105,7 @@
       </p:sp>
       <p:sp>
         <p:nvSpPr>
-          <p:cNvPr id="17" name="Text 13"/>
+          <p:cNvPr id="17" name="Text 12"/>
           <p:cNvSpPr/>
           <p:nvPr/>
         </p:nvSpPr>
@@ -6245,14 +6141,14 @@
       </p:sp>
       <p:pic>
         <p:nvPicPr>
-          <p:cNvPr id="18" name="Image 2" descr="/Users/danwahlin/.copilot/session-state/56a7a0da-def8-48d4-b5e8-0ac3878cb8dd/files/slides-build/icons/GoCheckCircle-1A7F37.png">    </p:cNvPr>
+          <p:cNvPr id="18" name="Image 3" descr="/Users/danwahlin/.copilot/session-state/56a7a0da-def8-48d4-b5e8-0ac3878cb8dd/files/slides-build/icons/GoCheckCircle-1A7F37.png">    </p:cNvPr>
           <p:cNvPicPr>
             <a:picLocks noChangeAspect="1"/>
           </p:cNvPicPr>
           <p:nvPr/>
         </p:nvPicPr>
         <p:blipFill>
-          <a:blip r:embed="rId4"/>
+          <a:blip r:embed="rId5"/>
           <a:stretch>
             <a:fillRect/>
           </a:stretch>
@@ -6269,7 +6165,7 @@
       </p:pic>
       <p:sp>
         <p:nvSpPr>
-          <p:cNvPr id="19" name="Text 14"/>
+          <p:cNvPr id="19" name="Text 13"/>
           <p:cNvSpPr/>
           <p:nvPr/>
         </p:nvSpPr>
@@ -6392,112 +6288,9 @@
           <a:chExt cx="0" cy="0"/>
         </a:xfrm>
       </p:grpSpPr>
-      <p:sp>
-        <p:nvSpPr>
-          <p:cNvPr id="2" name="Text 0"/>
-          <p:cNvSpPr/>
-          <p:nvPr/>
-        </p:nvSpPr>
-        <p:spPr>
-          <a:xfrm>
-            <a:off x="0" y="0"/>
-            <a:ext cx="9144000" cy="76200"/>
-          </a:xfrm>
-          <a:prstGeom prst="rect">
-            <a:avLst/>
-          </a:prstGeom>
-          <a:solidFill>
-            <a:srgbClr val="1A7F37"/>
-          </a:solidFill>
-          <a:ln/>
-        </p:spPr>
-        <p:txBody>
-          <a:bodyPr wrap="square" rtlCol="0" anchor="ctr"/>
-          <a:lstStyle/>
-          <a:p>
-            <a:pPr indent="0" marL="0">
-              <a:buNone/>
-            </a:pPr>
-            <a:endParaRPr lang="en-US" dirty="0"/>
-          </a:p>
-        </p:txBody>
-      </p:sp>
-      <p:sp>
-        <p:nvSpPr>
-          <p:cNvPr id="3" name="Text 1"/>
-          <p:cNvSpPr/>
-          <p:nvPr/>
-        </p:nvSpPr>
-        <p:spPr>
-          <a:xfrm>
-            <a:off x="7340501" y="177701"/>
-            <a:ext cx="1168301" cy="279350"/>
-          </a:xfrm>
-          <a:prstGeom prst="roundRect">
-            <a:avLst>
-              <a:gd name="adj" fmla="val 22731"/>
-            </a:avLst>
-          </a:prstGeom>
-          <a:solidFill>
-            <a:srgbClr val="1A7F37"/>
-          </a:solidFill>
-          <a:ln/>
-        </p:spPr>
-        <p:txBody>
-          <a:bodyPr wrap="square" rtlCol="0" anchor="ctr"/>
-          <a:lstStyle/>
-          <a:p>
-            <a:pPr indent="0" marL="0">
-              <a:buNone/>
-            </a:pPr>
-            <a:endParaRPr lang="en-US" dirty="0"/>
-          </a:p>
-        </p:txBody>
-      </p:sp>
-      <p:sp>
-        <p:nvSpPr>
-          <p:cNvPr id="4" name="Text 2"/>
-          <p:cNvSpPr/>
-          <p:nvPr/>
-        </p:nvSpPr>
-        <p:spPr>
-          <a:xfrm>
-            <a:off x="7461041" y="231577"/>
-            <a:ext cx="927071" cy="171450"/>
-          </a:xfrm>
-          <a:prstGeom prst="rect">
-            <a:avLst/>
-          </a:prstGeom>
-          <a:noFill/>
-          <a:ln/>
-        </p:spPr>
-        <p:txBody>
-          <a:bodyPr wrap="square" lIns="0" tIns="0" rIns="0" bIns="0" rtlCol="0" anchor="t"/>
-          <a:lstStyle/>
-          <a:p>
-            <a:pPr algn="ctr" indent="0" marL="0">
-              <a:buNone/>
-            </a:pPr>
-            <a:r>
-              <a:rPr lang="en-US" sz="1150" b="1" dirty="0">
-                <a:solidFill>
-                  <a:srgbClr val="FFFFFF"/>
-                </a:solidFill>
-                <a:latin typeface="Arial" pitchFamily="34" charset="0"/>
-                <a:ea typeface="Arial" pitchFamily="34" charset="-122"/>
-                <a:cs typeface="Arial" pitchFamily="34" charset="-120"/>
-              </a:rPr>
-              <a:t>CHAPTER 00</a:t>
-            </a:r>
-            <a:endParaRPr lang="en-US" sz="1150" dirty="0"/>
-          </a:p>
-        </p:txBody>
-      </p:sp>
       <p:pic>
         <p:nvPicPr>
-          <p:cNvPr id="5" name="Image 0" descr="/Users/danwahlin/.copilot/session-state/56a7a0da-def8-48d4-b5e8-0ac3878cb8dd/files/slides-build/icons/FaGithub-1F2328.png">
-            <a:hlinkClick r:id="rId2" tooltip="https://github.com/github/copilot-app-for-beginners/tree/main/00-setup"/>
-          </p:cNvPr>
+          <p:cNvPr id="2" name="Image 0" descr="/Users/danwahlin/.copilot/session-state/56a7a0da-def8-48d4-b5e8-0ac3878cb8dd/files/slides-build/img/grad-corner.png">    </p:cNvPr>
           <p:cNvPicPr>
             <a:picLocks noChangeAspect="1"/>
           </p:cNvPicPr>
@@ -6511,6 +6304,103 @@
         </p:blipFill>
         <p:spPr>
           <a:xfrm>
+            <a:off x="6349901" y="0"/>
+            <a:ext cx="2793950" cy="1308050"/>
+          </a:xfrm>
+          <a:prstGeom prst="rect">
+            <a:avLst/>
+          </a:prstGeom>
+        </p:spPr>
+      </p:pic>
+      <p:sp>
+        <p:nvSpPr>
+          <p:cNvPr id="3" name="Text 0"/>
+          <p:cNvSpPr/>
+          <p:nvPr/>
+        </p:nvSpPr>
+        <p:spPr>
+          <a:xfrm>
+            <a:off x="7340501" y="177701"/>
+            <a:ext cx="1168301" cy="279350"/>
+          </a:xfrm>
+          <a:prstGeom prst="roundRect">
+            <a:avLst>
+              <a:gd name="adj" fmla="val 22731"/>
+            </a:avLst>
+          </a:prstGeom>
+          <a:solidFill>
+            <a:srgbClr val="1A7F37"/>
+          </a:solidFill>
+          <a:ln/>
+        </p:spPr>
+        <p:txBody>
+          <a:bodyPr wrap="square" rtlCol="0" anchor="ctr"/>
+          <a:lstStyle/>
+          <a:p>
+            <a:pPr indent="0" marL="0">
+              <a:buNone/>
+            </a:pPr>
+            <a:endParaRPr lang="en-US" dirty="0"/>
+          </a:p>
+        </p:txBody>
+      </p:sp>
+      <p:sp>
+        <p:nvSpPr>
+          <p:cNvPr id="4" name="Text 1"/>
+          <p:cNvSpPr/>
+          <p:nvPr/>
+        </p:nvSpPr>
+        <p:spPr>
+          <a:xfrm>
+            <a:off x="7461041" y="231577"/>
+            <a:ext cx="927071" cy="171450"/>
+          </a:xfrm>
+          <a:prstGeom prst="rect">
+            <a:avLst/>
+          </a:prstGeom>
+          <a:noFill/>
+          <a:ln/>
+        </p:spPr>
+        <p:txBody>
+          <a:bodyPr wrap="square" lIns="0" tIns="0" rIns="0" bIns="0" rtlCol="0" anchor="t"/>
+          <a:lstStyle/>
+          <a:p>
+            <a:pPr algn="ctr" indent="0" marL="0">
+              <a:buNone/>
+            </a:pPr>
+            <a:r>
+              <a:rPr lang="en-US" sz="1150" b="1" dirty="0">
+                <a:solidFill>
+                  <a:srgbClr val="FFFFFF"/>
+                </a:solidFill>
+                <a:latin typeface="Arial" pitchFamily="34" charset="0"/>
+                <a:ea typeface="Arial" pitchFamily="34" charset="-122"/>
+                <a:cs typeface="Arial" pitchFamily="34" charset="-120"/>
+              </a:rPr>
+              <a:t>CHAPTER 00</a:t>
+            </a:r>
+            <a:endParaRPr lang="en-US" sz="1150" dirty="0"/>
+          </a:p>
+        </p:txBody>
+      </p:sp>
+      <p:pic>
+        <p:nvPicPr>
+          <p:cNvPr id="5" name="Image 1" descr="/Users/danwahlin/.copilot/session-state/56a7a0da-def8-48d4-b5e8-0ac3878cb8dd/files/slides-build/icons/FaGithub-1F2328.png">
+            <a:hlinkClick r:id="rId3" tooltip="https://github.com/github/copilot-app-for-beginners/tree/main/00-setup"/>
+          </p:cNvPr>
+          <p:cNvPicPr>
+            <a:picLocks noChangeAspect="1"/>
+          </p:cNvPicPr>
+          <p:nvPr/>
+        </p:nvPicPr>
+        <p:blipFill>
+          <a:blip r:embed="rId2"/>
+          <a:stretch>
+            <a:fillRect/>
+          </a:stretch>
+        </p:blipFill>
+        <p:spPr>
+          <a:xfrm>
             <a:off x="8610600" y="165050"/>
             <a:ext cx="304800" cy="304800"/>
           </a:xfrm>
@@ -6521,7 +6411,7 @@
       </p:pic>
       <p:sp>
         <p:nvSpPr>
-          <p:cNvPr id="6" name="Text 3"/>
+          <p:cNvPr id="6" name="Text 2"/>
           <p:cNvSpPr/>
           <p:nvPr/>
         </p:nvSpPr>
@@ -6560,7 +6450,7 @@
       </p:sp>
       <p:sp>
         <p:nvSpPr>
-          <p:cNvPr id="7" name="Text 4"/>
+          <p:cNvPr id="7" name="Text 3"/>
           <p:cNvSpPr/>
           <p:nvPr/>
         </p:nvSpPr>
@@ -6605,7 +6495,7 @@
       </p:sp>
       <p:sp>
         <p:nvSpPr>
-          <p:cNvPr id="8" name="Text 5"/>
+          <p:cNvPr id="8" name="Text 4"/>
           <p:cNvSpPr/>
           <p:nvPr/>
         </p:nvSpPr>
@@ -6641,7 +6531,7 @@
       </p:sp>
       <p:sp>
         <p:nvSpPr>
-          <p:cNvPr id="9" name="Text 6"/>
+          <p:cNvPr id="9" name="Text 5"/>
           <p:cNvSpPr/>
           <p:nvPr/>
         </p:nvSpPr>
@@ -6673,7 +6563,7 @@
       </p:sp>
       <p:sp>
         <p:nvSpPr>
-          <p:cNvPr id="10" name="Text 7"/>
+          <p:cNvPr id="10" name="Text 6"/>
           <p:cNvSpPr/>
           <p:nvPr/>
         </p:nvSpPr>
@@ -6712,7 +6602,7 @@
       </p:sp>
       <p:sp>
         <p:nvSpPr>
-          <p:cNvPr id="11" name="Text 8"/>
+          <p:cNvPr id="11" name="Text 7"/>
           <p:cNvSpPr/>
           <p:nvPr/>
         </p:nvSpPr>
@@ -6754,7 +6644,7 @@
       </p:sp>
       <p:sp>
         <p:nvSpPr>
-          <p:cNvPr id="12" name="Text 9"/>
+          <p:cNvPr id="12" name="Text 8"/>
           <p:cNvSpPr/>
           <p:nvPr/>
         </p:nvSpPr>
@@ -6790,7 +6680,7 @@
       </p:sp>
       <p:sp>
         <p:nvSpPr>
-          <p:cNvPr id="13" name="Text 10"/>
+          <p:cNvPr id="13" name="Text 9"/>
           <p:cNvSpPr/>
           <p:nvPr/>
         </p:nvSpPr>
@@ -6822,7 +6712,7 @@
       </p:sp>
       <p:sp>
         <p:nvSpPr>
-          <p:cNvPr id="14" name="Text 11"/>
+          <p:cNvPr id="14" name="Text 10"/>
           <p:cNvSpPr/>
           <p:nvPr/>
         </p:nvSpPr>
@@ -6861,7 +6751,7 @@
       </p:sp>
       <p:sp>
         <p:nvSpPr>
-          <p:cNvPr id="15" name="Text 12"/>
+          <p:cNvPr id="15" name="Text 11"/>
           <p:cNvSpPr/>
           <p:nvPr/>
         </p:nvSpPr>
@@ -6937,7 +6827,7 @@
       </p:sp>
       <p:sp>
         <p:nvSpPr>
-          <p:cNvPr id="16" name="Text 13"/>
+          <p:cNvPr id="16" name="Text 12"/>
           <p:cNvSpPr/>
           <p:nvPr/>
         </p:nvSpPr>
@@ -6973,7 +6863,7 @@
       </p:sp>
       <p:sp>
         <p:nvSpPr>
-          <p:cNvPr id="17" name="Text 14"/>
+          <p:cNvPr id="17" name="Text 13"/>
           <p:cNvSpPr/>
           <p:nvPr/>
         </p:nvSpPr>
@@ -7005,7 +6895,7 @@
       </p:sp>
       <p:sp>
         <p:nvSpPr>
-          <p:cNvPr id="18" name="Text 15"/>
+          <p:cNvPr id="18" name="Text 14"/>
           <p:cNvSpPr/>
           <p:nvPr/>
         </p:nvSpPr>
@@ -7044,7 +6934,7 @@
       </p:sp>
       <p:sp>
         <p:nvSpPr>
-          <p:cNvPr id="19" name="Text 16"/>
+          <p:cNvPr id="19" name="Text 15"/>
           <p:cNvSpPr/>
           <p:nvPr/>
         </p:nvSpPr>
@@ -7086,7 +6976,7 @@
       </p:sp>
       <p:sp>
         <p:nvSpPr>
-          <p:cNvPr id="20" name="Text 17"/>
+          <p:cNvPr id="20" name="Text 16"/>
           <p:cNvSpPr/>
           <p:nvPr/>
         </p:nvSpPr>
@@ -7122,7 +7012,7 @@
       </p:sp>
       <p:sp>
         <p:nvSpPr>
-          <p:cNvPr id="21" name="Text 18"/>
+          <p:cNvPr id="21" name="Text 17"/>
           <p:cNvSpPr/>
           <p:nvPr/>
         </p:nvSpPr>
@@ -7154,7 +7044,7 @@
       </p:sp>
       <p:sp>
         <p:nvSpPr>
-          <p:cNvPr id="22" name="Text 19"/>
+          <p:cNvPr id="22" name="Text 18"/>
           <p:cNvSpPr/>
           <p:nvPr/>
         </p:nvSpPr>
@@ -7193,7 +7083,7 @@
       </p:sp>
       <p:sp>
         <p:nvSpPr>
-          <p:cNvPr id="23" name="Text 20"/>
+          <p:cNvPr id="23" name="Text 19"/>
           <p:cNvSpPr/>
           <p:nvPr/>
         </p:nvSpPr>
@@ -7235,7 +7125,7 @@
       </p:sp>
       <p:sp>
         <p:nvSpPr>
-          <p:cNvPr id="24" name="Text 21"/>
+          <p:cNvPr id="24" name="Text 20"/>
           <p:cNvSpPr/>
           <p:nvPr/>
         </p:nvSpPr>
@@ -7271,7 +7161,7 @@
       </p:sp>
       <p:sp>
         <p:nvSpPr>
-          <p:cNvPr id="25" name="Text 22"/>
+          <p:cNvPr id="25" name="Text 21"/>
           <p:cNvSpPr/>
           <p:nvPr/>
         </p:nvSpPr>
@@ -7303,14 +7193,14 @@
       </p:sp>
       <p:pic>
         <p:nvPicPr>
-          <p:cNvPr id="26" name="Image 1" descr="/Users/danwahlin/.copilot/session-state/56a7a0da-def8-48d4-b5e8-0ac3878cb8dd/files/slides-build/icons/FaGithub-0969DA.png">    </p:cNvPr>
+          <p:cNvPr id="26" name="Image 2" descr="/Users/danwahlin/.copilot/session-state/56a7a0da-def8-48d4-b5e8-0ac3878cb8dd/files/slides-build/icons/FaGithub-0969DA.png">    </p:cNvPr>
           <p:cNvPicPr>
             <a:picLocks noChangeAspect="1"/>
           </p:cNvPicPr>
           <p:nvPr/>
         </p:nvPicPr>
         <p:blipFill>
-          <a:blip r:embed="rId3"/>
+          <a:blip r:embed="rId4"/>
           <a:stretch>
             <a:fillRect/>
           </a:stretch>
@@ -7327,7 +7217,7 @@
       </p:pic>
       <p:sp>
         <p:nvSpPr>
-          <p:cNvPr id="27" name="Text 23"/>
+          <p:cNvPr id="27" name="Text 22"/>
           <p:cNvSpPr/>
           <p:nvPr/>
         </p:nvSpPr>
@@ -7366,7 +7256,7 @@
       </p:sp>
       <p:sp>
         <p:nvSpPr>
-          <p:cNvPr id="28" name="Text 24"/>
+          <p:cNvPr id="28" name="Text 23"/>
           <p:cNvSpPr/>
           <p:nvPr/>
         </p:nvSpPr>
@@ -7396,7 +7286,7 @@
                 <a:latin typeface="Arial" pitchFamily="34" charset="0"/>
                 <a:ea typeface="Arial" pitchFamily="34" charset="-122"/>
                 <a:cs typeface="Arial" pitchFamily="34" charset="-120"/>
-                <a:hlinkClick r:id="rId4" invalidUrl="" action="" tgtFrame="" tooltip="https://github.com/github/copilot-app-for-beginners/tree/main/00-setup" history="1" highlightClick="0" endSnd="0">
+                <a:hlinkClick r:id="rId5" invalidUrl="" action="" tgtFrame="" tooltip="https://github.com/github/copilot-app-for-beginners/tree/main/00-setup" history="1" highlightClick="0" endSnd="0">
                   <a:extLst>
                     <a:ext uri="{A12FA001-AC4F-418D-AE19-62706E023703}">
                       <ahyp:hlinkClr xmlns:ahyp="http://schemas.microsoft.com/office/drawing/2018/hyperlinkcolor" val="tx"/>
@@ -7412,7 +7302,7 @@
       </p:sp>
       <p:sp>
         <p:nvSpPr>
-          <p:cNvPr id="29" name="Text 25"/>
+          <p:cNvPr id="29" name="Text 24"/>
           <p:cNvSpPr/>
           <p:nvPr/>
         </p:nvSpPr>
@@ -7451,7 +7341,7 @@
       </p:sp>
       <p:sp>
         <p:nvSpPr>
-          <p:cNvPr id="30" name="Text 26"/>
+          <p:cNvPr id="30" name="Text 25"/>
           <p:cNvSpPr/>
           <p:nvPr/>
         </p:nvSpPr>
@@ -7481,7 +7371,7 @@
                 <a:latin typeface="Arial" pitchFamily="34" charset="0"/>
                 <a:ea typeface="Arial" pitchFamily="34" charset="-122"/>
                 <a:cs typeface="Arial" pitchFamily="34" charset="-120"/>
-                <a:hlinkClick r:id="rId5" invalidUrl="" action="" tgtFrame="" tooltip="https://github.com/github/copilot-app-for-beginners/tree/main/01-tour-the-app" history="1" highlightClick="0" endSnd="0">
+                <a:hlinkClick r:id="rId6" invalidUrl="" action="" tgtFrame="" tooltip="https://github.com/github/copilot-app-for-beginners/tree/main/01-tour-the-app" history="1" highlightClick="0" endSnd="0">
                   <a:extLst>
                     <a:ext uri="{A12FA001-AC4F-418D-AE19-62706E023703}">
                       <ahyp:hlinkClr xmlns:ahyp="http://schemas.microsoft.com/office/drawing/2018/hyperlinkcolor" val="tx"/>
@@ -7527,112 +7417,9 @@
           <a:chExt cx="0" cy="0"/>
         </a:xfrm>
       </p:grpSpPr>
-      <p:sp>
-        <p:nvSpPr>
-          <p:cNvPr id="2" name="Text 0"/>
-          <p:cNvSpPr/>
-          <p:nvPr/>
-        </p:nvSpPr>
-        <p:spPr>
-          <a:xfrm>
-            <a:off x="0" y="0"/>
-            <a:ext cx="9144000" cy="76200"/>
-          </a:xfrm>
-          <a:prstGeom prst="rect">
-            <a:avLst/>
-          </a:prstGeom>
-          <a:solidFill>
-            <a:srgbClr val="1A7F37"/>
-          </a:solidFill>
-          <a:ln/>
-        </p:spPr>
-        <p:txBody>
-          <a:bodyPr wrap="square" rtlCol="0" anchor="ctr"/>
-          <a:lstStyle/>
-          <a:p>
-            <a:pPr indent="0" marL="0">
-              <a:buNone/>
-            </a:pPr>
-            <a:endParaRPr lang="en-US" dirty="0"/>
-          </a:p>
-        </p:txBody>
-      </p:sp>
-      <p:sp>
-        <p:nvSpPr>
-          <p:cNvPr id="3" name="Text 1"/>
-          <p:cNvSpPr/>
-          <p:nvPr/>
-        </p:nvSpPr>
-        <p:spPr>
-          <a:xfrm>
-            <a:off x="7340501" y="177701"/>
-            <a:ext cx="1168301" cy="279350"/>
-          </a:xfrm>
-          <a:prstGeom prst="roundRect">
-            <a:avLst>
-              <a:gd name="adj" fmla="val 22731"/>
-            </a:avLst>
-          </a:prstGeom>
-          <a:solidFill>
-            <a:srgbClr val="1A7F37"/>
-          </a:solidFill>
-          <a:ln/>
-        </p:spPr>
-        <p:txBody>
-          <a:bodyPr wrap="square" rtlCol="0" anchor="ctr"/>
-          <a:lstStyle/>
-          <a:p>
-            <a:pPr indent="0" marL="0">
-              <a:buNone/>
-            </a:pPr>
-            <a:endParaRPr lang="en-US" dirty="0"/>
-          </a:p>
-        </p:txBody>
-      </p:sp>
-      <p:sp>
-        <p:nvSpPr>
-          <p:cNvPr id="4" name="Text 2"/>
-          <p:cNvSpPr/>
-          <p:nvPr/>
-        </p:nvSpPr>
-        <p:spPr>
-          <a:xfrm>
-            <a:off x="7461041" y="231577"/>
-            <a:ext cx="927071" cy="171450"/>
-          </a:xfrm>
-          <a:prstGeom prst="rect">
-            <a:avLst/>
-          </a:prstGeom>
-          <a:noFill/>
-          <a:ln/>
-        </p:spPr>
-        <p:txBody>
-          <a:bodyPr wrap="square" lIns="0" tIns="0" rIns="0" bIns="0" rtlCol="0" anchor="t"/>
-          <a:lstStyle/>
-          <a:p>
-            <a:pPr algn="ctr" indent="0" marL="0">
-              <a:buNone/>
-            </a:pPr>
-            <a:r>
-              <a:rPr lang="en-US" sz="1150" b="1" dirty="0">
-                <a:solidFill>
-                  <a:srgbClr val="FFFFFF"/>
-                </a:solidFill>
-                <a:latin typeface="Arial" pitchFamily="34" charset="0"/>
-                <a:ea typeface="Arial" pitchFamily="34" charset="-122"/>
-                <a:cs typeface="Arial" pitchFamily="34" charset="-120"/>
-              </a:rPr>
-              <a:t>CHAPTER 00</a:t>
-            </a:r>
-            <a:endParaRPr lang="en-US" sz="1150" dirty="0"/>
-          </a:p>
-        </p:txBody>
-      </p:sp>
       <p:pic>
         <p:nvPicPr>
-          <p:cNvPr id="5" name="Image 0" descr="/Users/danwahlin/.copilot/session-state/56a7a0da-def8-48d4-b5e8-0ac3878cb8dd/files/slides-build/icons/FaGithub-1F2328.png">
-            <a:hlinkClick r:id="rId2" tooltip="https://github.com/github/copilot-app-for-beginners/tree/main/00-setup"/>
-          </p:cNvPr>
+          <p:cNvPr id="2" name="Image 0" descr="/Users/danwahlin/.copilot/session-state/56a7a0da-def8-48d4-b5e8-0ac3878cb8dd/files/slides-build/img/grad-corner.png">    </p:cNvPr>
           <p:cNvPicPr>
             <a:picLocks noChangeAspect="1"/>
           </p:cNvPicPr>
@@ -7646,6 +7433,103 @@
         </p:blipFill>
         <p:spPr>
           <a:xfrm>
+            <a:off x="6349901" y="0"/>
+            <a:ext cx="2793950" cy="1308050"/>
+          </a:xfrm>
+          <a:prstGeom prst="rect">
+            <a:avLst/>
+          </a:prstGeom>
+        </p:spPr>
+      </p:pic>
+      <p:sp>
+        <p:nvSpPr>
+          <p:cNvPr id="3" name="Text 0"/>
+          <p:cNvSpPr/>
+          <p:nvPr/>
+        </p:nvSpPr>
+        <p:spPr>
+          <a:xfrm>
+            <a:off x="7340501" y="177701"/>
+            <a:ext cx="1168301" cy="279350"/>
+          </a:xfrm>
+          <a:prstGeom prst="roundRect">
+            <a:avLst>
+              <a:gd name="adj" fmla="val 22731"/>
+            </a:avLst>
+          </a:prstGeom>
+          <a:solidFill>
+            <a:srgbClr val="1A7F37"/>
+          </a:solidFill>
+          <a:ln/>
+        </p:spPr>
+        <p:txBody>
+          <a:bodyPr wrap="square" rtlCol="0" anchor="ctr"/>
+          <a:lstStyle/>
+          <a:p>
+            <a:pPr indent="0" marL="0">
+              <a:buNone/>
+            </a:pPr>
+            <a:endParaRPr lang="en-US" dirty="0"/>
+          </a:p>
+        </p:txBody>
+      </p:sp>
+      <p:sp>
+        <p:nvSpPr>
+          <p:cNvPr id="4" name="Text 1"/>
+          <p:cNvSpPr/>
+          <p:nvPr/>
+        </p:nvSpPr>
+        <p:spPr>
+          <a:xfrm>
+            <a:off x="7461041" y="231577"/>
+            <a:ext cx="927071" cy="171450"/>
+          </a:xfrm>
+          <a:prstGeom prst="rect">
+            <a:avLst/>
+          </a:prstGeom>
+          <a:noFill/>
+          <a:ln/>
+        </p:spPr>
+        <p:txBody>
+          <a:bodyPr wrap="square" lIns="0" tIns="0" rIns="0" bIns="0" rtlCol="0" anchor="t"/>
+          <a:lstStyle/>
+          <a:p>
+            <a:pPr algn="ctr" indent="0" marL="0">
+              <a:buNone/>
+            </a:pPr>
+            <a:r>
+              <a:rPr lang="en-US" sz="1150" b="1" dirty="0">
+                <a:solidFill>
+                  <a:srgbClr val="FFFFFF"/>
+                </a:solidFill>
+                <a:latin typeface="Arial" pitchFamily="34" charset="0"/>
+                <a:ea typeface="Arial" pitchFamily="34" charset="-122"/>
+                <a:cs typeface="Arial" pitchFamily="34" charset="-120"/>
+              </a:rPr>
+              <a:t>CHAPTER 00</a:t>
+            </a:r>
+            <a:endParaRPr lang="en-US" sz="1150" dirty="0"/>
+          </a:p>
+        </p:txBody>
+      </p:sp>
+      <p:pic>
+        <p:nvPicPr>
+          <p:cNvPr id="5" name="Image 1" descr="/Users/danwahlin/.copilot/session-state/56a7a0da-def8-48d4-b5e8-0ac3878cb8dd/files/slides-build/icons/FaGithub-1F2328.png">
+            <a:hlinkClick r:id="rId3" tooltip="https://github.com/github/copilot-app-for-beginners/tree/main/00-setup"/>
+          </p:cNvPr>
+          <p:cNvPicPr>
+            <a:picLocks noChangeAspect="1"/>
+          </p:cNvPicPr>
+          <p:nvPr/>
+        </p:nvPicPr>
+        <p:blipFill>
+          <a:blip r:embed="rId2"/>
+          <a:stretch>
+            <a:fillRect/>
+          </a:stretch>
+        </p:blipFill>
+        <p:spPr>
+          <a:xfrm>
             <a:off x="8610600" y="165050"/>
             <a:ext cx="304800" cy="304800"/>
           </a:xfrm>
@@ -7656,7 +7540,7 @@
       </p:pic>
       <p:sp>
         <p:nvSpPr>
-          <p:cNvPr id="6" name="Text 3"/>
+          <p:cNvPr id="6" name="Text 2"/>
           <p:cNvSpPr/>
           <p:nvPr/>
         </p:nvSpPr>
@@ -7695,7 +7579,7 @@
       </p:sp>
       <p:sp>
         <p:nvSpPr>
-          <p:cNvPr id="7" name="Text 4"/>
+          <p:cNvPr id="7" name="Text 3"/>
           <p:cNvSpPr/>
           <p:nvPr/>
         </p:nvSpPr>
@@ -7740,7 +7624,7 @@
       </p:sp>
       <p:sp>
         <p:nvSpPr>
-          <p:cNvPr id="8" name="Text 5"/>
+          <p:cNvPr id="8" name="Text 4"/>
           <p:cNvSpPr/>
           <p:nvPr/>
         </p:nvSpPr>
@@ -7772,7 +7656,7 @@
       </p:sp>
       <p:sp>
         <p:nvSpPr>
-          <p:cNvPr id="9" name="Shape 6"/>
+          <p:cNvPr id="9" name="Shape 5"/>
           <p:cNvSpPr/>
           <p:nvPr/>
         </p:nvSpPr>
@@ -7795,7 +7679,7 @@
       </p:sp>
       <p:sp>
         <p:nvSpPr>
-          <p:cNvPr id="10" name="Shape 7"/>
+          <p:cNvPr id="10" name="Shape 6"/>
           <p:cNvSpPr/>
           <p:nvPr/>
         </p:nvSpPr>
@@ -7818,7 +7702,7 @@
       </p:sp>
       <p:sp>
         <p:nvSpPr>
-          <p:cNvPr id="11" name="Shape 8"/>
+          <p:cNvPr id="11" name="Shape 7"/>
           <p:cNvSpPr/>
           <p:nvPr/>
         </p:nvSpPr>
@@ -7841,7 +7725,7 @@
       </p:sp>
       <p:sp>
         <p:nvSpPr>
-          <p:cNvPr id="12" name="Shape 9"/>
+          <p:cNvPr id="12" name="Shape 8"/>
           <p:cNvSpPr/>
           <p:nvPr/>
         </p:nvSpPr>
@@ -7864,7 +7748,7 @@
       </p:sp>
       <p:sp>
         <p:nvSpPr>
-          <p:cNvPr id="13" name="Text 10"/>
+          <p:cNvPr id="13" name="Text 9"/>
           <p:cNvSpPr/>
           <p:nvPr/>
         </p:nvSpPr>
@@ -7903,7 +7787,7 @@
       </p:sp>
       <p:sp>
         <p:nvSpPr>
-          <p:cNvPr id="14" name="Text 11"/>
+          <p:cNvPr id="14" name="Text 10"/>
           <p:cNvSpPr/>
           <p:nvPr/>
         </p:nvSpPr>
@@ -7942,7 +7826,7 @@
       </p:sp>
       <p:sp>
         <p:nvSpPr>
-          <p:cNvPr id="15" name="Text 12"/>
+          <p:cNvPr id="15" name="Text 11"/>
           <p:cNvSpPr/>
           <p:nvPr/>
         </p:nvSpPr>
@@ -7984,7 +7868,7 @@
       </p:sp>
       <p:sp>
         <p:nvSpPr>
-          <p:cNvPr id="16" name="Text 13"/>
+          <p:cNvPr id="16" name="Text 12"/>
           <p:cNvSpPr/>
           <p:nvPr/>
         </p:nvSpPr>
@@ -8016,7 +7900,7 @@
       </p:sp>
       <p:sp>
         <p:nvSpPr>
-          <p:cNvPr id="17" name="Shape 14"/>
+          <p:cNvPr id="17" name="Shape 13"/>
           <p:cNvSpPr/>
           <p:nvPr/>
         </p:nvSpPr>
@@ -8039,7 +7923,7 @@
       </p:sp>
       <p:sp>
         <p:nvSpPr>
-          <p:cNvPr id="18" name="Shape 15"/>
+          <p:cNvPr id="18" name="Shape 14"/>
           <p:cNvSpPr/>
           <p:nvPr/>
         </p:nvSpPr>
@@ -8062,7 +7946,7 @@
       </p:sp>
       <p:sp>
         <p:nvSpPr>
-          <p:cNvPr id="19" name="Shape 16"/>
+          <p:cNvPr id="19" name="Shape 15"/>
           <p:cNvSpPr/>
           <p:nvPr/>
         </p:nvSpPr>
@@ -8085,7 +7969,7 @@
       </p:sp>
       <p:sp>
         <p:nvSpPr>
-          <p:cNvPr id="20" name="Shape 17"/>
+          <p:cNvPr id="20" name="Shape 16"/>
           <p:cNvSpPr/>
           <p:nvPr/>
         </p:nvSpPr>
@@ -8108,7 +7992,7 @@
       </p:sp>
       <p:sp>
         <p:nvSpPr>
-          <p:cNvPr id="21" name="Text 18"/>
+          <p:cNvPr id="21" name="Text 17"/>
           <p:cNvSpPr/>
           <p:nvPr/>
         </p:nvSpPr>
@@ -8147,7 +8031,7 @@
       </p:sp>
       <p:sp>
         <p:nvSpPr>
-          <p:cNvPr id="22" name="Text 19"/>
+          <p:cNvPr id="22" name="Text 18"/>
           <p:cNvSpPr/>
           <p:nvPr/>
         </p:nvSpPr>
@@ -8186,7 +8070,7 @@
       </p:sp>
       <p:sp>
         <p:nvSpPr>
-          <p:cNvPr id="23" name="Text 20"/>
+          <p:cNvPr id="23" name="Text 19"/>
           <p:cNvSpPr/>
           <p:nvPr/>
         </p:nvSpPr>
@@ -8228,7 +8112,7 @@
       </p:sp>
       <p:sp>
         <p:nvSpPr>
-          <p:cNvPr id="24" name="Text 21"/>
+          <p:cNvPr id="24" name="Text 20"/>
           <p:cNvSpPr/>
           <p:nvPr/>
         </p:nvSpPr>
@@ -8260,7 +8144,7 @@
       </p:sp>
       <p:sp>
         <p:nvSpPr>
-          <p:cNvPr id="25" name="Shape 22"/>
+          <p:cNvPr id="25" name="Shape 21"/>
           <p:cNvSpPr/>
           <p:nvPr/>
         </p:nvSpPr>
@@ -8283,7 +8167,7 @@
       </p:sp>
       <p:sp>
         <p:nvSpPr>
-          <p:cNvPr id="26" name="Shape 23"/>
+          <p:cNvPr id="26" name="Shape 22"/>
           <p:cNvSpPr/>
           <p:nvPr/>
         </p:nvSpPr>
@@ -8306,7 +8190,7 @@
       </p:sp>
       <p:sp>
         <p:nvSpPr>
-          <p:cNvPr id="27" name="Shape 24"/>
+          <p:cNvPr id="27" name="Shape 23"/>
           <p:cNvSpPr/>
           <p:nvPr/>
         </p:nvSpPr>
@@ -8329,7 +8213,7 @@
       </p:sp>
       <p:sp>
         <p:nvSpPr>
-          <p:cNvPr id="28" name="Shape 25"/>
+          <p:cNvPr id="28" name="Shape 24"/>
           <p:cNvSpPr/>
           <p:nvPr/>
         </p:nvSpPr>
@@ -8352,7 +8236,7 @@
       </p:sp>
       <p:sp>
         <p:nvSpPr>
-          <p:cNvPr id="29" name="Text 26"/>
+          <p:cNvPr id="29" name="Text 25"/>
           <p:cNvSpPr/>
           <p:nvPr/>
         </p:nvSpPr>
@@ -8391,7 +8275,7 @@
       </p:sp>
       <p:sp>
         <p:nvSpPr>
-          <p:cNvPr id="30" name="Text 27"/>
+          <p:cNvPr id="30" name="Text 26"/>
           <p:cNvSpPr/>
           <p:nvPr/>
         </p:nvSpPr>
@@ -8430,7 +8314,7 @@
       </p:sp>
       <p:sp>
         <p:nvSpPr>
-          <p:cNvPr id="31" name="Text 28"/>
+          <p:cNvPr id="31" name="Text 27"/>
           <p:cNvSpPr/>
           <p:nvPr/>
         </p:nvSpPr>
@@ -8502,112 +8386,9 @@
           <a:chExt cx="0" cy="0"/>
         </a:xfrm>
       </p:grpSpPr>
-      <p:sp>
-        <p:nvSpPr>
-          <p:cNvPr id="2" name="Text 0"/>
-          <p:cNvSpPr/>
-          <p:nvPr/>
-        </p:nvSpPr>
-        <p:spPr>
-          <a:xfrm>
-            <a:off x="0" y="0"/>
-            <a:ext cx="9144000" cy="76200"/>
-          </a:xfrm>
-          <a:prstGeom prst="rect">
-            <a:avLst/>
-          </a:prstGeom>
-          <a:solidFill>
-            <a:srgbClr val="9A6700"/>
-          </a:solidFill>
-          <a:ln/>
-        </p:spPr>
-        <p:txBody>
-          <a:bodyPr wrap="square" rtlCol="0" anchor="ctr"/>
-          <a:lstStyle/>
-          <a:p>
-            <a:pPr indent="0" marL="0">
-              <a:buNone/>
-            </a:pPr>
-            <a:endParaRPr lang="en-US" dirty="0"/>
-          </a:p>
-        </p:txBody>
-      </p:sp>
-      <p:sp>
-        <p:nvSpPr>
-          <p:cNvPr id="3" name="Text 1"/>
-          <p:cNvSpPr/>
-          <p:nvPr/>
-        </p:nvSpPr>
-        <p:spPr>
-          <a:xfrm>
-            <a:off x="7340501" y="177701"/>
-            <a:ext cx="1168301" cy="279350"/>
-          </a:xfrm>
-          <a:prstGeom prst="roundRect">
-            <a:avLst>
-              <a:gd name="adj" fmla="val 22731"/>
-            </a:avLst>
-          </a:prstGeom>
-          <a:solidFill>
-            <a:srgbClr val="1A7F37"/>
-          </a:solidFill>
-          <a:ln/>
-        </p:spPr>
-        <p:txBody>
-          <a:bodyPr wrap="square" rtlCol="0" anchor="ctr"/>
-          <a:lstStyle/>
-          <a:p>
-            <a:pPr indent="0" marL="0">
-              <a:buNone/>
-            </a:pPr>
-            <a:endParaRPr lang="en-US" dirty="0"/>
-          </a:p>
-        </p:txBody>
-      </p:sp>
-      <p:sp>
-        <p:nvSpPr>
-          <p:cNvPr id="4" name="Text 2"/>
-          <p:cNvSpPr/>
-          <p:nvPr/>
-        </p:nvSpPr>
-        <p:spPr>
-          <a:xfrm>
-            <a:off x="7461041" y="231577"/>
-            <a:ext cx="927071" cy="171450"/>
-          </a:xfrm>
-          <a:prstGeom prst="rect">
-            <a:avLst/>
-          </a:prstGeom>
-          <a:noFill/>
-          <a:ln/>
-        </p:spPr>
-        <p:txBody>
-          <a:bodyPr wrap="square" lIns="0" tIns="0" rIns="0" bIns="0" rtlCol="0" anchor="t"/>
-          <a:lstStyle/>
-          <a:p>
-            <a:pPr algn="ctr" indent="0" marL="0">
-              <a:buNone/>
-            </a:pPr>
-            <a:r>
-              <a:rPr lang="en-US" sz="1150" b="1" dirty="0">
-                <a:solidFill>
-                  <a:srgbClr val="FFFFFF"/>
-                </a:solidFill>
-                <a:latin typeface="Arial" pitchFamily="34" charset="0"/>
-                <a:ea typeface="Arial" pitchFamily="34" charset="-122"/>
-                <a:cs typeface="Arial" pitchFamily="34" charset="-120"/>
-              </a:rPr>
-              <a:t>CHAPTER 00</a:t>
-            </a:r>
-            <a:endParaRPr lang="en-US" sz="1150" dirty="0"/>
-          </a:p>
-        </p:txBody>
-      </p:sp>
       <p:pic>
         <p:nvPicPr>
-          <p:cNvPr id="5" name="Image 0" descr="/Users/danwahlin/.copilot/session-state/56a7a0da-def8-48d4-b5e8-0ac3878cb8dd/files/slides-build/icons/FaGithub-1F2328.png">
-            <a:hlinkClick r:id="rId2" tooltip="https://github.com/github/copilot-app-for-beginners/tree/main/00-setup"/>
-          </p:cNvPr>
+          <p:cNvPr id="2" name="Image 0" descr="/Users/danwahlin/.copilot/session-state/56a7a0da-def8-48d4-b5e8-0ac3878cb8dd/files/slides-build/img/grad-corner.png">    </p:cNvPr>
           <p:cNvPicPr>
             <a:picLocks noChangeAspect="1"/>
           </p:cNvPicPr>
@@ -8621,6 +8402,103 @@
         </p:blipFill>
         <p:spPr>
           <a:xfrm>
+            <a:off x="6349901" y="0"/>
+            <a:ext cx="2793950" cy="1308050"/>
+          </a:xfrm>
+          <a:prstGeom prst="rect">
+            <a:avLst/>
+          </a:prstGeom>
+        </p:spPr>
+      </p:pic>
+      <p:sp>
+        <p:nvSpPr>
+          <p:cNvPr id="3" name="Text 0"/>
+          <p:cNvSpPr/>
+          <p:nvPr/>
+        </p:nvSpPr>
+        <p:spPr>
+          <a:xfrm>
+            <a:off x="7340501" y="177701"/>
+            <a:ext cx="1168301" cy="279350"/>
+          </a:xfrm>
+          <a:prstGeom prst="roundRect">
+            <a:avLst>
+              <a:gd name="adj" fmla="val 22731"/>
+            </a:avLst>
+          </a:prstGeom>
+          <a:solidFill>
+            <a:srgbClr val="1A7F37"/>
+          </a:solidFill>
+          <a:ln/>
+        </p:spPr>
+        <p:txBody>
+          <a:bodyPr wrap="square" rtlCol="0" anchor="ctr"/>
+          <a:lstStyle/>
+          <a:p>
+            <a:pPr indent="0" marL="0">
+              <a:buNone/>
+            </a:pPr>
+            <a:endParaRPr lang="en-US" dirty="0"/>
+          </a:p>
+        </p:txBody>
+      </p:sp>
+      <p:sp>
+        <p:nvSpPr>
+          <p:cNvPr id="4" name="Text 1"/>
+          <p:cNvSpPr/>
+          <p:nvPr/>
+        </p:nvSpPr>
+        <p:spPr>
+          <a:xfrm>
+            <a:off x="7461041" y="231577"/>
+            <a:ext cx="927071" cy="171450"/>
+          </a:xfrm>
+          <a:prstGeom prst="rect">
+            <a:avLst/>
+          </a:prstGeom>
+          <a:noFill/>
+          <a:ln/>
+        </p:spPr>
+        <p:txBody>
+          <a:bodyPr wrap="square" lIns="0" tIns="0" rIns="0" bIns="0" rtlCol="0" anchor="t"/>
+          <a:lstStyle/>
+          <a:p>
+            <a:pPr algn="ctr" indent="0" marL="0">
+              <a:buNone/>
+            </a:pPr>
+            <a:r>
+              <a:rPr lang="en-US" sz="1150" b="1" dirty="0">
+                <a:solidFill>
+                  <a:srgbClr val="FFFFFF"/>
+                </a:solidFill>
+                <a:latin typeface="Arial" pitchFamily="34" charset="0"/>
+                <a:ea typeface="Arial" pitchFamily="34" charset="-122"/>
+                <a:cs typeface="Arial" pitchFamily="34" charset="-120"/>
+              </a:rPr>
+              <a:t>CHAPTER 00</a:t>
+            </a:r>
+            <a:endParaRPr lang="en-US" sz="1150" dirty="0"/>
+          </a:p>
+        </p:txBody>
+      </p:sp>
+      <p:pic>
+        <p:nvPicPr>
+          <p:cNvPr id="5" name="Image 1" descr="/Users/danwahlin/.copilot/session-state/56a7a0da-def8-48d4-b5e8-0ac3878cb8dd/files/slides-build/icons/FaGithub-1F2328.png">
+            <a:hlinkClick r:id="rId3" tooltip="https://github.com/github/copilot-app-for-beginners/tree/main/00-setup"/>
+          </p:cNvPr>
+          <p:cNvPicPr>
+            <a:picLocks noChangeAspect="1"/>
+          </p:cNvPicPr>
+          <p:nvPr/>
+        </p:nvPicPr>
+        <p:blipFill>
+          <a:blip r:embed="rId2"/>
+          <a:stretch>
+            <a:fillRect/>
+          </a:stretch>
+        </p:blipFill>
+        <p:spPr>
+          <a:xfrm>
             <a:off x="8610600" y="165050"/>
             <a:ext cx="304800" cy="304800"/>
           </a:xfrm>
@@ -8631,7 +8509,7 @@
       </p:pic>
       <p:sp>
         <p:nvSpPr>
-          <p:cNvPr id="6" name="Text 3"/>
+          <p:cNvPr id="6" name="Text 2"/>
           <p:cNvSpPr/>
           <p:nvPr/>
         </p:nvSpPr>
@@ -8670,7 +8548,7 @@
       </p:sp>
       <p:sp>
         <p:nvSpPr>
-          <p:cNvPr id="7" name="Text 4"/>
+          <p:cNvPr id="7" name="Text 3"/>
           <p:cNvSpPr/>
           <p:nvPr/>
         </p:nvSpPr>
@@ -8715,7 +8593,7 @@
       </p:sp>
       <p:sp>
         <p:nvSpPr>
-          <p:cNvPr id="8" name="Text 5"/>
+          <p:cNvPr id="8" name="Text 4"/>
           <p:cNvSpPr/>
           <p:nvPr/>
         </p:nvSpPr>
@@ -8760,7 +8638,7 @@
       </p:sp>
       <p:sp>
         <p:nvSpPr>
-          <p:cNvPr id="9" name="Text 6"/>
+          <p:cNvPr id="9" name="Text 5"/>
           <p:cNvSpPr/>
           <p:nvPr/>
         </p:nvSpPr>
@@ -8803,63 +8681,7 @@
       </p:sp>
       <p:pic>
         <p:nvPicPr>
-          <p:cNvPr id="10" name="Image 1" descr="/Users/danwahlin/.copilot/session-state/56a7a0da-def8-48d4-b5e8-0ac3878cb8dd/files/slides-build/img/00-studio-setup-soundcheck.jpg">    </p:cNvPr>
-          <p:cNvPicPr>
-            <a:picLocks noChangeAspect="1"/>
-          </p:cNvPicPr>
-          <p:nvPr/>
-        </p:nvPicPr>
-        <p:blipFill>
-          <a:blip r:embed="rId3"/>
-          <a:stretch>
-            <a:fillRect/>
-          </a:stretch>
-        </p:blipFill>
-        <p:spPr>
-          <a:xfrm>
-            <a:off x="558701" y="1747986"/>
-            <a:ext cx="4089350" cy="2726680"/>
-          </a:xfrm>
-          <a:prstGeom prst="rect">
-            <a:avLst/>
-          </a:prstGeom>
-        </p:spPr>
-      </p:pic>
-      <p:sp>
-        <p:nvSpPr>
-          <p:cNvPr id="11" name="Text 7"/>
-          <p:cNvSpPr/>
-          <p:nvPr/>
-        </p:nvSpPr>
-        <p:spPr>
-          <a:xfrm>
-            <a:off x="5003750" y="1633389"/>
-            <a:ext cx="381000" cy="381000"/>
-          </a:xfrm>
-          <a:prstGeom prst="roundRect">
-            <a:avLst>
-              <a:gd name="adj" fmla="val 23333"/>
-            </a:avLst>
-          </a:prstGeom>
-          <a:solidFill>
-            <a:srgbClr val="DDF4FF"/>
-          </a:solidFill>
-          <a:ln/>
-        </p:spPr>
-        <p:txBody>
-          <a:bodyPr wrap="square" rtlCol="0" anchor="ctr"/>
-          <a:lstStyle/>
-          <a:p>
-            <a:pPr indent="0" marL="0">
-              <a:buNone/>
-            </a:pPr>
-            <a:endParaRPr lang="en-US" dirty="0"/>
-          </a:p>
-        </p:txBody>
-      </p:sp>
-      <p:pic>
-        <p:nvPicPr>
-          <p:cNvPr id="12" name="Image 2" descr="/Users/danwahlin/.copilot/session-state/56a7a0da-def8-48d4-b5e8-0ac3878cb8dd/files/slides-build/icons/FaGithub-0969DA.png">    </p:cNvPr>
+          <p:cNvPr id="10" name="Image 2" descr="/Users/danwahlin/.copilot/session-state/56a7a0da-def8-48d4-b5e8-0ac3878cb8dd/files/slides-build/img/00-studio-setup-soundcheck.jpg">    </p:cNvPr>
           <p:cNvPicPr>
             <a:picLocks noChangeAspect="1"/>
           </p:cNvPicPr>
@@ -8873,8 +8695,8 @@
         </p:blipFill>
         <p:spPr>
           <a:xfrm>
-            <a:off x="5086350" y="1715988"/>
-            <a:ext cx="215801" cy="215801"/>
+            <a:off x="558701" y="1747986"/>
+            <a:ext cx="4089350" cy="2726680"/>
           </a:xfrm>
           <a:prstGeom prst="rect">
             <a:avLst/>
@@ -8883,94 +8705,13 @@
       </p:pic>
       <p:sp>
         <p:nvSpPr>
-          <p:cNvPr id="13" name="Text 8"/>
-          <p:cNvSpPr/>
-          <p:nvPr/>
-        </p:nvSpPr>
-        <p:spPr>
-          <a:xfrm>
-            <a:off x="5537150" y="1597968"/>
-            <a:ext cx="1717974" cy="228600"/>
-          </a:xfrm>
-          <a:prstGeom prst="rect">
-            <a:avLst/>
-          </a:prstGeom>
-          <a:noFill/>
-          <a:ln/>
-        </p:spPr>
-        <p:txBody>
-          <a:bodyPr wrap="square" lIns="0" tIns="0" rIns="0" bIns="0" rtlCol="0" anchor="t"/>
-          <a:lstStyle/>
-          <a:p>
-            <a:pPr algn="l" indent="0" marL="0">
-              <a:buNone/>
-            </a:pPr>
-            <a:r>
-              <a:rPr lang="en-US" sz="1550" b="1" dirty="0">
-                <a:solidFill>
-                  <a:srgbClr val="1F2328"/>
-                </a:solidFill>
-                <a:latin typeface="Arial" pitchFamily="34" charset="0"/>
-                <a:ea typeface="Arial" pitchFamily="34" charset="-122"/>
-                <a:cs typeface="Arial" pitchFamily="34" charset="-120"/>
-              </a:rPr>
-              <a:t>Sign in for access</a:t>
-            </a:r>
-            <a:endParaRPr lang="en-US" sz="1550" dirty="0"/>
-          </a:p>
-        </p:txBody>
-      </p:sp>
-      <p:sp>
-        <p:nvSpPr>
-          <p:cNvPr id="14" name="Text 9"/>
-          <p:cNvSpPr/>
-          <p:nvPr/>
-        </p:nvSpPr>
-        <p:spPr>
-          <a:xfrm>
-            <a:off x="5537150" y="1851868"/>
-            <a:ext cx="1717974" cy="198090"/>
-          </a:xfrm>
-          <a:prstGeom prst="rect">
-            <a:avLst/>
-          </a:prstGeom>
-          <a:noFill/>
-          <a:ln/>
-        </p:spPr>
-        <p:txBody>
-          <a:bodyPr wrap="square" lIns="0" tIns="0" rIns="0" bIns="0" rtlCol="0" anchor="t"/>
-          <a:lstStyle/>
-          <a:p>
-            <a:pPr algn="l" indent="0" marL="0">
-              <a:lnSpc>
-                <a:spcPts val="1560"/>
-              </a:lnSpc>
-              <a:buNone/>
-            </a:pPr>
-            <a:r>
-              <a:rPr lang="en-US" sz="1350" dirty="0">
-                <a:solidFill>
-                  <a:srgbClr val="59636E"/>
-                </a:solidFill>
-                <a:latin typeface="Arial" pitchFamily="34" charset="0"/>
-                <a:ea typeface="Arial" pitchFamily="34" charset="-122"/>
-                <a:cs typeface="Arial" pitchFamily="34" charset="-120"/>
-              </a:rPr>
-              <a:t>Sign in with GitHub.</a:t>
-            </a:r>
-            <a:endParaRPr lang="en-US" sz="1350" dirty="0"/>
-          </a:p>
-        </p:txBody>
-      </p:sp>
-      <p:sp>
-        <p:nvSpPr>
-          <p:cNvPr id="15" name="Text 10"/>
-          <p:cNvSpPr/>
-          <p:nvPr/>
-        </p:nvSpPr>
-        <p:spPr>
-          <a:xfrm>
-            <a:off x="5003750" y="2491680"/>
+          <p:cNvPr id="11" name="Text 6"/>
+          <p:cNvSpPr/>
+          <p:nvPr/>
+        </p:nvSpPr>
+        <p:spPr>
+          <a:xfrm>
+            <a:off x="5003750" y="1633389"/>
             <a:ext cx="381000" cy="381000"/>
           </a:xfrm>
           <a:prstGeom prst="roundRect">
@@ -8979,7 +8720,7 @@
             </a:avLst>
           </a:prstGeom>
           <a:solidFill>
-            <a:srgbClr val="FBEFFF"/>
+            <a:srgbClr val="DDF4FF"/>
           </a:solidFill>
           <a:ln/>
         </p:spPr>
@@ -8996,7 +8737,7 @@
       </p:sp>
       <p:pic>
         <p:nvPicPr>
-          <p:cNvPr id="16" name="Image 3" descr="/Users/danwahlin/.copilot/session-state/56a7a0da-def8-48d4-b5e8-0ac3878cb8dd/files/slides-build/icons/GoPlug-8250DF.png">    </p:cNvPr>
+          <p:cNvPr id="12" name="Image 3" descr="/Users/danwahlin/.copilot/session-state/56a7a0da-def8-48d4-b5e8-0ac3878cb8dd/files/slides-build/icons/FaGithub-0969DA.png">    </p:cNvPr>
           <p:cNvPicPr>
             <a:picLocks noChangeAspect="1"/>
           </p:cNvPicPr>
@@ -9010,7 +8751,7 @@
         </p:blipFill>
         <p:spPr>
           <a:xfrm>
-            <a:off x="5086350" y="2574280"/>
+            <a:off x="5086350" y="1715988"/>
             <a:ext cx="215801" cy="215801"/>
           </a:xfrm>
           <a:prstGeom prst="rect">
@@ -9020,14 +8761,14 @@
       </p:pic>
       <p:sp>
         <p:nvSpPr>
-          <p:cNvPr id="17" name="Text 11"/>
-          <p:cNvSpPr/>
-          <p:nvPr/>
-        </p:nvSpPr>
-        <p:spPr>
-          <a:xfrm>
-            <a:off x="5537150" y="2456259"/>
-            <a:ext cx="1639642" cy="228600"/>
+          <p:cNvPr id="13" name="Text 7"/>
+          <p:cNvSpPr/>
+          <p:nvPr/>
+        </p:nvSpPr>
+        <p:spPr>
+          <a:xfrm>
+            <a:off x="5537150" y="1597968"/>
+            <a:ext cx="1717974" cy="228600"/>
           </a:xfrm>
           <a:prstGeom prst="rect">
             <a:avLst/>
@@ -9051,7 +8792,7 @@
                 <a:ea typeface="Arial" pitchFamily="34" charset="-122"/>
                 <a:cs typeface="Arial" pitchFamily="34" charset="-120"/>
               </a:rPr>
-              <a:t>Plug in your gear</a:t>
+              <a:t>Sign in for access</a:t>
             </a:r>
             <a:endParaRPr lang="en-US" sz="1550" dirty="0"/>
           </a:p>
@@ -9059,14 +8800,14 @@
       </p:sp>
       <p:sp>
         <p:nvSpPr>
-          <p:cNvPr id="18" name="Text 12"/>
-          <p:cNvSpPr/>
-          <p:nvPr/>
-        </p:nvSpPr>
-        <p:spPr>
-          <a:xfrm>
-            <a:off x="5537150" y="2710160"/>
-            <a:ext cx="1639642" cy="198090"/>
+          <p:cNvPr id="14" name="Text 8"/>
+          <p:cNvSpPr/>
+          <p:nvPr/>
+        </p:nvSpPr>
+        <p:spPr>
+          <a:xfrm>
+            <a:off x="5537150" y="1851868"/>
+            <a:ext cx="1717974" cy="198090"/>
           </a:xfrm>
           <a:prstGeom prst="rect">
             <a:avLst/>
@@ -9093,7 +8834,7 @@
                 <a:ea typeface="Arial" pitchFamily="34" charset="-122"/>
                 <a:cs typeface="Arial" pitchFamily="34" charset="-120"/>
               </a:rPr>
-              <a:t>Connect your fork.</a:t>
+              <a:t>Sign in with GitHub.</a:t>
             </a:r>
             <a:endParaRPr lang="en-US" sz="1350" dirty="0"/>
           </a:p>
@@ -9101,13 +8842,13 @@
       </p:sp>
       <p:sp>
         <p:nvSpPr>
-          <p:cNvPr id="19" name="Text 13"/>
-          <p:cNvSpPr/>
-          <p:nvPr/>
-        </p:nvSpPr>
-        <p:spPr>
-          <a:xfrm>
-            <a:off x="5003750" y="3349972"/>
+          <p:cNvPr id="15" name="Text 9"/>
+          <p:cNvSpPr/>
+          <p:nvPr/>
+        </p:nvSpPr>
+        <p:spPr>
+          <a:xfrm>
+            <a:off x="5003750" y="2491680"/>
             <a:ext cx="381000" cy="381000"/>
           </a:xfrm>
           <a:prstGeom prst="roundRect">
@@ -9116,7 +8857,7 @@
             </a:avLst>
           </a:prstGeom>
           <a:solidFill>
-            <a:srgbClr val="DAFBE1"/>
+            <a:srgbClr val="FBEFFF"/>
           </a:solidFill>
           <a:ln/>
         </p:spPr>
@@ -9133,7 +8874,7 @@
       </p:sp>
       <p:pic>
         <p:nvPicPr>
-          <p:cNvPr id="20" name="Image 4" descr="/Users/danwahlin/.copilot/session-state/56a7a0da-def8-48d4-b5e8-0ac3878cb8dd/files/slides-build/icons/GoTasklist-1A7F37.png">    </p:cNvPr>
+          <p:cNvPr id="16" name="Image 4" descr="/Users/danwahlin/.copilot/session-state/56a7a0da-def8-48d4-b5e8-0ac3878cb8dd/files/slides-build/icons/GoPlug-8250DF.png">    </p:cNvPr>
           <p:cNvPicPr>
             <a:picLocks noChangeAspect="1"/>
           </p:cNvPicPr>
@@ -9147,7 +8888,7 @@
         </p:blipFill>
         <p:spPr>
           <a:xfrm>
-            <a:off x="5086350" y="3432572"/>
+            <a:off x="5086350" y="2574280"/>
             <a:ext cx="215801" cy="215801"/>
           </a:xfrm>
           <a:prstGeom prst="rect">
@@ -9157,14 +8898,14 @@
       </p:pic>
       <p:sp>
         <p:nvSpPr>
-          <p:cNvPr id="21" name="Text 14"/>
-          <p:cNvSpPr/>
-          <p:nvPr/>
-        </p:nvSpPr>
-        <p:spPr>
-          <a:xfrm>
-            <a:off x="5537150" y="3314551"/>
-            <a:ext cx="1730270" cy="228600"/>
+          <p:cNvPr id="17" name="Text 10"/>
+          <p:cNvSpPr/>
+          <p:nvPr/>
+        </p:nvSpPr>
+        <p:spPr>
+          <a:xfrm>
+            <a:off x="5537150" y="2456259"/>
+            <a:ext cx="1639642" cy="228600"/>
           </a:xfrm>
           <a:prstGeom prst="rect">
             <a:avLst/>
@@ -9188,7 +8929,7 @@
                 <a:ea typeface="Arial" pitchFamily="34" charset="-122"/>
                 <a:cs typeface="Arial" pitchFamily="34" charset="-120"/>
               </a:rPr>
-              <a:t>Load the song</a:t>
+              <a:t>Plug in your gear</a:t>
             </a:r>
             <a:endParaRPr lang="en-US" sz="1550" dirty="0"/>
           </a:p>
@@ -9196,14 +8937,14 @@
       </p:sp>
       <p:sp>
         <p:nvSpPr>
-          <p:cNvPr id="22" name="Text 15"/>
-          <p:cNvSpPr/>
-          <p:nvPr/>
-        </p:nvSpPr>
-        <p:spPr>
-          <a:xfrm>
-            <a:off x="5537150" y="3568452"/>
-            <a:ext cx="1730270" cy="198090"/>
+          <p:cNvPr id="18" name="Text 11"/>
+          <p:cNvSpPr/>
+          <p:nvPr/>
+        </p:nvSpPr>
+        <p:spPr>
+          <a:xfrm>
+            <a:off x="5537150" y="2710160"/>
+            <a:ext cx="1639642" cy="198090"/>
           </a:xfrm>
           <a:prstGeom prst="rect">
             <a:avLst/>
@@ -9230,7 +8971,7 @@
                 <a:ea typeface="Arial" pitchFamily="34" charset="-122"/>
                 <a:cs typeface="Arial" pitchFamily="34" charset="-120"/>
               </a:rPr>
-              <a:t>Add the practice work.</a:t>
+              <a:t>Connect your fork.</a:t>
             </a:r>
             <a:endParaRPr lang="en-US" sz="1350" dirty="0"/>
           </a:p>
@@ -9238,13 +8979,13 @@
       </p:sp>
       <p:sp>
         <p:nvSpPr>
-          <p:cNvPr id="23" name="Text 16"/>
-          <p:cNvSpPr/>
-          <p:nvPr/>
-        </p:nvSpPr>
-        <p:spPr>
-          <a:xfrm>
-            <a:off x="5003750" y="4208264"/>
+          <p:cNvPr id="19" name="Text 12"/>
+          <p:cNvSpPr/>
+          <p:nvPr/>
+        </p:nvSpPr>
+        <p:spPr>
+          <a:xfrm>
+            <a:off x="5003750" y="3349972"/>
             <a:ext cx="381000" cy="381000"/>
           </a:xfrm>
           <a:prstGeom prst="roundRect">
@@ -9253,7 +8994,7 @@
             </a:avLst>
           </a:prstGeom>
           <a:solidFill>
-            <a:srgbClr val="FFF1E5"/>
+            <a:srgbClr val="DAFBE1"/>
           </a:solidFill>
           <a:ln/>
         </p:spPr>
@@ -9270,7 +9011,7 @@
       </p:sp>
       <p:pic>
         <p:nvPicPr>
-          <p:cNvPr id="24" name="Image 5" descr="/Users/danwahlin/.copilot/session-state/56a7a0da-def8-48d4-b5e8-0ac3878cb8dd/files/slides-build/icons/GoCopilot-BC4C00.png">    </p:cNvPr>
+          <p:cNvPr id="20" name="Image 5" descr="/Users/danwahlin/.copilot/session-state/56a7a0da-def8-48d4-b5e8-0ac3878cb8dd/files/slides-build/icons/GoTasklist-1A7F37.png">    </p:cNvPr>
           <p:cNvPicPr>
             <a:picLocks noChangeAspect="1"/>
           </p:cNvPicPr>
@@ -9284,6 +9025,143 @@
         </p:blipFill>
         <p:spPr>
           <a:xfrm>
+            <a:off x="5086350" y="3432572"/>
+            <a:ext cx="215801" cy="215801"/>
+          </a:xfrm>
+          <a:prstGeom prst="rect">
+            <a:avLst/>
+          </a:prstGeom>
+        </p:spPr>
+      </p:pic>
+      <p:sp>
+        <p:nvSpPr>
+          <p:cNvPr id="21" name="Text 13"/>
+          <p:cNvSpPr/>
+          <p:nvPr/>
+        </p:nvSpPr>
+        <p:spPr>
+          <a:xfrm>
+            <a:off x="5537150" y="3314551"/>
+            <a:ext cx="1730270" cy="228600"/>
+          </a:xfrm>
+          <a:prstGeom prst="rect">
+            <a:avLst/>
+          </a:prstGeom>
+          <a:noFill/>
+          <a:ln/>
+        </p:spPr>
+        <p:txBody>
+          <a:bodyPr wrap="square" lIns="0" tIns="0" rIns="0" bIns="0" rtlCol="0" anchor="t"/>
+          <a:lstStyle/>
+          <a:p>
+            <a:pPr algn="l" indent="0" marL="0">
+              <a:buNone/>
+            </a:pPr>
+            <a:r>
+              <a:rPr lang="en-US" sz="1550" b="1" dirty="0">
+                <a:solidFill>
+                  <a:srgbClr val="1F2328"/>
+                </a:solidFill>
+                <a:latin typeface="Arial" pitchFamily="34" charset="0"/>
+                <a:ea typeface="Arial" pitchFamily="34" charset="-122"/>
+                <a:cs typeface="Arial" pitchFamily="34" charset="-120"/>
+              </a:rPr>
+              <a:t>Load the song</a:t>
+            </a:r>
+            <a:endParaRPr lang="en-US" sz="1550" dirty="0"/>
+          </a:p>
+        </p:txBody>
+      </p:sp>
+      <p:sp>
+        <p:nvSpPr>
+          <p:cNvPr id="22" name="Text 14"/>
+          <p:cNvSpPr/>
+          <p:nvPr/>
+        </p:nvSpPr>
+        <p:spPr>
+          <a:xfrm>
+            <a:off x="5537150" y="3568452"/>
+            <a:ext cx="1730270" cy="198090"/>
+          </a:xfrm>
+          <a:prstGeom prst="rect">
+            <a:avLst/>
+          </a:prstGeom>
+          <a:noFill/>
+          <a:ln/>
+        </p:spPr>
+        <p:txBody>
+          <a:bodyPr wrap="square" lIns="0" tIns="0" rIns="0" bIns="0" rtlCol="0" anchor="t"/>
+          <a:lstStyle/>
+          <a:p>
+            <a:pPr algn="l" indent="0" marL="0">
+              <a:lnSpc>
+                <a:spcPts val="1560"/>
+              </a:lnSpc>
+              <a:buNone/>
+            </a:pPr>
+            <a:r>
+              <a:rPr lang="en-US" sz="1350" dirty="0">
+                <a:solidFill>
+                  <a:srgbClr val="59636E"/>
+                </a:solidFill>
+                <a:latin typeface="Arial" pitchFamily="34" charset="0"/>
+                <a:ea typeface="Arial" pitchFamily="34" charset="-122"/>
+                <a:cs typeface="Arial" pitchFamily="34" charset="-120"/>
+              </a:rPr>
+              <a:t>Add the practice work.</a:t>
+            </a:r>
+            <a:endParaRPr lang="en-US" sz="1350" dirty="0"/>
+          </a:p>
+        </p:txBody>
+      </p:sp>
+      <p:sp>
+        <p:nvSpPr>
+          <p:cNvPr id="23" name="Text 15"/>
+          <p:cNvSpPr/>
+          <p:nvPr/>
+        </p:nvSpPr>
+        <p:spPr>
+          <a:xfrm>
+            <a:off x="5003750" y="4208264"/>
+            <a:ext cx="381000" cy="381000"/>
+          </a:xfrm>
+          <a:prstGeom prst="roundRect">
+            <a:avLst>
+              <a:gd name="adj" fmla="val 23333"/>
+            </a:avLst>
+          </a:prstGeom>
+          <a:solidFill>
+            <a:srgbClr val="FFF1E5"/>
+          </a:solidFill>
+          <a:ln/>
+        </p:spPr>
+        <p:txBody>
+          <a:bodyPr wrap="square" rtlCol="0" anchor="ctr"/>
+          <a:lstStyle/>
+          <a:p>
+            <a:pPr indent="0" marL="0">
+              <a:buNone/>
+            </a:pPr>
+            <a:endParaRPr lang="en-US" dirty="0"/>
+          </a:p>
+        </p:txBody>
+      </p:sp>
+      <p:pic>
+        <p:nvPicPr>
+          <p:cNvPr id="24" name="Image 6" descr="/Users/danwahlin/.copilot/session-state/56a7a0da-def8-48d4-b5e8-0ac3878cb8dd/files/slides-build/icons/GoCopilot-BC4C00.png">    </p:cNvPr>
+          <p:cNvPicPr>
+            <a:picLocks noChangeAspect="1"/>
+          </p:cNvPicPr>
+          <p:nvPr/>
+        </p:nvPicPr>
+        <p:blipFill>
+          <a:blip r:embed="rId8"/>
+          <a:stretch>
+            <a:fillRect/>
+          </a:stretch>
+        </p:blipFill>
+        <p:spPr>
+          <a:xfrm>
             <a:off x="5086350" y="4290864"/>
             <a:ext cx="215801" cy="215801"/>
           </a:xfrm>
@@ -9294,7 +9172,7 @@
       </p:pic>
       <p:sp>
         <p:nvSpPr>
-          <p:cNvPr id="25" name="Text 17"/>
+          <p:cNvPr id="25" name="Text 16"/>
           <p:cNvSpPr/>
           <p:nvPr/>
         </p:nvSpPr>
@@ -9333,7 +9211,7 @@
       </p:sp>
       <p:sp>
         <p:nvSpPr>
-          <p:cNvPr id="26" name="Text 18"/>
+          <p:cNvPr id="26" name="Text 17"/>
           <p:cNvSpPr/>
           <p:nvPr/>
         </p:nvSpPr>
@@ -9405,112 +9283,9 @@
           <a:chExt cx="0" cy="0"/>
         </a:xfrm>
       </p:grpSpPr>
-      <p:sp>
-        <p:nvSpPr>
-          <p:cNvPr id="2" name="Text 0"/>
-          <p:cNvSpPr/>
-          <p:nvPr/>
-        </p:nvSpPr>
-        <p:spPr>
-          <a:xfrm>
-            <a:off x="0" y="0"/>
-            <a:ext cx="9144000" cy="76200"/>
-          </a:xfrm>
-          <a:prstGeom prst="rect">
-            <a:avLst/>
-          </a:prstGeom>
-          <a:solidFill>
-            <a:srgbClr val="1A7F37"/>
-          </a:solidFill>
-          <a:ln/>
-        </p:spPr>
-        <p:txBody>
-          <a:bodyPr wrap="square" rtlCol="0" anchor="ctr"/>
-          <a:lstStyle/>
-          <a:p>
-            <a:pPr indent="0" marL="0">
-              <a:buNone/>
-            </a:pPr>
-            <a:endParaRPr lang="en-US" dirty="0"/>
-          </a:p>
-        </p:txBody>
-      </p:sp>
-      <p:sp>
-        <p:nvSpPr>
-          <p:cNvPr id="3" name="Text 1"/>
-          <p:cNvSpPr/>
-          <p:nvPr/>
-        </p:nvSpPr>
-        <p:spPr>
-          <a:xfrm>
-            <a:off x="7340501" y="177701"/>
-            <a:ext cx="1168301" cy="279350"/>
-          </a:xfrm>
-          <a:prstGeom prst="roundRect">
-            <a:avLst>
-              <a:gd name="adj" fmla="val 22731"/>
-            </a:avLst>
-          </a:prstGeom>
-          <a:solidFill>
-            <a:srgbClr val="1A7F37"/>
-          </a:solidFill>
-          <a:ln/>
-        </p:spPr>
-        <p:txBody>
-          <a:bodyPr wrap="square" rtlCol="0" anchor="ctr"/>
-          <a:lstStyle/>
-          <a:p>
-            <a:pPr indent="0" marL="0">
-              <a:buNone/>
-            </a:pPr>
-            <a:endParaRPr lang="en-US" dirty="0"/>
-          </a:p>
-        </p:txBody>
-      </p:sp>
-      <p:sp>
-        <p:nvSpPr>
-          <p:cNvPr id="4" name="Text 2"/>
-          <p:cNvSpPr/>
-          <p:nvPr/>
-        </p:nvSpPr>
-        <p:spPr>
-          <a:xfrm>
-            <a:off x="7461041" y="231577"/>
-            <a:ext cx="927071" cy="171450"/>
-          </a:xfrm>
-          <a:prstGeom prst="rect">
-            <a:avLst/>
-          </a:prstGeom>
-          <a:noFill/>
-          <a:ln/>
-        </p:spPr>
-        <p:txBody>
-          <a:bodyPr wrap="square" lIns="0" tIns="0" rIns="0" bIns="0" rtlCol="0" anchor="t"/>
-          <a:lstStyle/>
-          <a:p>
-            <a:pPr algn="ctr" indent="0" marL="0">
-              <a:buNone/>
-            </a:pPr>
-            <a:r>
-              <a:rPr lang="en-US" sz="1150" b="1" dirty="0">
-                <a:solidFill>
-                  <a:srgbClr val="FFFFFF"/>
-                </a:solidFill>
-                <a:latin typeface="Arial" pitchFamily="34" charset="0"/>
-                <a:ea typeface="Arial" pitchFamily="34" charset="-122"/>
-                <a:cs typeface="Arial" pitchFamily="34" charset="-120"/>
-              </a:rPr>
-              <a:t>CHAPTER 00</a:t>
-            </a:r>
-            <a:endParaRPr lang="en-US" sz="1150" dirty="0"/>
-          </a:p>
-        </p:txBody>
-      </p:sp>
       <p:pic>
         <p:nvPicPr>
-          <p:cNvPr id="5" name="Image 0" descr="/Users/danwahlin/.copilot/session-state/56a7a0da-def8-48d4-b5e8-0ac3878cb8dd/files/slides-build/icons/FaGithub-1F2328.png">
-            <a:hlinkClick r:id="rId2" tooltip="https://github.com/github/copilot-app-for-beginners/tree/main/00-setup"/>
-          </p:cNvPr>
+          <p:cNvPr id="2" name="Image 0" descr="/Users/danwahlin/.copilot/session-state/56a7a0da-def8-48d4-b5e8-0ac3878cb8dd/files/slides-build/img/grad-corner.png">    </p:cNvPr>
           <p:cNvPicPr>
             <a:picLocks noChangeAspect="1"/>
           </p:cNvPicPr>
@@ -9524,6 +9299,103 @@
         </p:blipFill>
         <p:spPr>
           <a:xfrm>
+            <a:off x="6349901" y="0"/>
+            <a:ext cx="2793950" cy="1308050"/>
+          </a:xfrm>
+          <a:prstGeom prst="rect">
+            <a:avLst/>
+          </a:prstGeom>
+        </p:spPr>
+      </p:pic>
+      <p:sp>
+        <p:nvSpPr>
+          <p:cNvPr id="3" name="Text 0"/>
+          <p:cNvSpPr/>
+          <p:nvPr/>
+        </p:nvSpPr>
+        <p:spPr>
+          <a:xfrm>
+            <a:off x="7340501" y="177701"/>
+            <a:ext cx="1168301" cy="279350"/>
+          </a:xfrm>
+          <a:prstGeom prst="roundRect">
+            <a:avLst>
+              <a:gd name="adj" fmla="val 22731"/>
+            </a:avLst>
+          </a:prstGeom>
+          <a:solidFill>
+            <a:srgbClr val="1A7F37"/>
+          </a:solidFill>
+          <a:ln/>
+        </p:spPr>
+        <p:txBody>
+          <a:bodyPr wrap="square" rtlCol="0" anchor="ctr"/>
+          <a:lstStyle/>
+          <a:p>
+            <a:pPr indent="0" marL="0">
+              <a:buNone/>
+            </a:pPr>
+            <a:endParaRPr lang="en-US" dirty="0"/>
+          </a:p>
+        </p:txBody>
+      </p:sp>
+      <p:sp>
+        <p:nvSpPr>
+          <p:cNvPr id="4" name="Text 1"/>
+          <p:cNvSpPr/>
+          <p:nvPr/>
+        </p:nvSpPr>
+        <p:spPr>
+          <a:xfrm>
+            <a:off x="7461041" y="231577"/>
+            <a:ext cx="927071" cy="171450"/>
+          </a:xfrm>
+          <a:prstGeom prst="rect">
+            <a:avLst/>
+          </a:prstGeom>
+          <a:noFill/>
+          <a:ln/>
+        </p:spPr>
+        <p:txBody>
+          <a:bodyPr wrap="square" lIns="0" tIns="0" rIns="0" bIns="0" rtlCol="0" anchor="t"/>
+          <a:lstStyle/>
+          <a:p>
+            <a:pPr algn="ctr" indent="0" marL="0">
+              <a:buNone/>
+            </a:pPr>
+            <a:r>
+              <a:rPr lang="en-US" sz="1150" b="1" dirty="0">
+                <a:solidFill>
+                  <a:srgbClr val="FFFFFF"/>
+                </a:solidFill>
+                <a:latin typeface="Arial" pitchFamily="34" charset="0"/>
+                <a:ea typeface="Arial" pitchFamily="34" charset="-122"/>
+                <a:cs typeface="Arial" pitchFamily="34" charset="-120"/>
+              </a:rPr>
+              <a:t>CHAPTER 00</a:t>
+            </a:r>
+            <a:endParaRPr lang="en-US" sz="1150" dirty="0"/>
+          </a:p>
+        </p:txBody>
+      </p:sp>
+      <p:pic>
+        <p:nvPicPr>
+          <p:cNvPr id="5" name="Image 1" descr="/Users/danwahlin/.copilot/session-state/56a7a0da-def8-48d4-b5e8-0ac3878cb8dd/files/slides-build/icons/FaGithub-1F2328.png">
+            <a:hlinkClick r:id="rId3" tooltip="https://github.com/github/copilot-app-for-beginners/tree/main/00-setup"/>
+          </p:cNvPr>
+          <p:cNvPicPr>
+            <a:picLocks noChangeAspect="1"/>
+          </p:cNvPicPr>
+          <p:nvPr/>
+        </p:nvPicPr>
+        <p:blipFill>
+          <a:blip r:embed="rId2"/>
+          <a:stretch>
+            <a:fillRect/>
+          </a:stretch>
+        </p:blipFill>
+        <p:spPr>
+          <a:xfrm>
             <a:off x="8610600" y="165050"/>
             <a:ext cx="304800" cy="304800"/>
           </a:xfrm>
@@ -9534,7 +9406,7 @@
       </p:pic>
       <p:sp>
         <p:nvSpPr>
-          <p:cNvPr id="6" name="Text 3"/>
+          <p:cNvPr id="6" name="Text 2"/>
           <p:cNvSpPr/>
           <p:nvPr/>
         </p:nvSpPr>
@@ -9573,7 +9445,7 @@
       </p:sp>
       <p:sp>
         <p:nvSpPr>
-          <p:cNvPr id="7" name="Text 4"/>
+          <p:cNvPr id="7" name="Text 3"/>
           <p:cNvSpPr/>
           <p:nvPr/>
         </p:nvSpPr>
@@ -9618,7 +9490,7 @@
       </p:sp>
       <p:sp>
         <p:nvSpPr>
-          <p:cNvPr id="8" name="Text 5"/>
+          <p:cNvPr id="8" name="Text 4"/>
           <p:cNvSpPr/>
           <p:nvPr/>
         </p:nvSpPr>
@@ -9663,7 +9535,7 @@
       </p:sp>
       <p:sp>
         <p:nvSpPr>
-          <p:cNvPr id="9" name="Text 6"/>
+          <p:cNvPr id="9" name="Text 5"/>
           <p:cNvSpPr/>
           <p:nvPr/>
         </p:nvSpPr>
@@ -9699,7 +9571,7 @@
       </p:sp>
       <p:sp>
         <p:nvSpPr>
-          <p:cNvPr id="10" name="Shape 7"/>
+          <p:cNvPr id="10" name="Shape 6"/>
           <p:cNvSpPr/>
           <p:nvPr/>
         </p:nvSpPr>
@@ -9722,7 +9594,7 @@
       </p:sp>
       <p:sp>
         <p:nvSpPr>
-          <p:cNvPr id="11" name="Text 8"/>
+          <p:cNvPr id="11" name="Text 7"/>
           <p:cNvSpPr/>
           <p:nvPr/>
         </p:nvSpPr>
@@ -9764,7 +9636,7 @@
       </p:sp>
       <p:sp>
         <p:nvSpPr>
-          <p:cNvPr id="12" name="Text 9"/>
+          <p:cNvPr id="12" name="Text 8"/>
           <p:cNvSpPr/>
           <p:nvPr/>
         </p:nvSpPr>
@@ -9806,7 +9678,7 @@
       </p:sp>
       <p:sp>
         <p:nvSpPr>
-          <p:cNvPr id="13" name="Shape 10"/>
+          <p:cNvPr id="13" name="Shape 9"/>
           <p:cNvSpPr/>
           <p:nvPr/>
         </p:nvSpPr>
@@ -9829,7 +9701,7 @@
       </p:sp>
       <p:sp>
         <p:nvSpPr>
-          <p:cNvPr id="14" name="Text 11"/>
+          <p:cNvPr id="14" name="Text 10"/>
           <p:cNvSpPr/>
           <p:nvPr/>
         </p:nvSpPr>
@@ -9871,7 +9743,7 @@
       </p:sp>
       <p:sp>
         <p:nvSpPr>
-          <p:cNvPr id="15" name="Text 12"/>
+          <p:cNvPr id="15" name="Text 11"/>
           <p:cNvSpPr/>
           <p:nvPr/>
         </p:nvSpPr>
@@ -9947,7 +9819,7 @@
       </p:sp>
       <p:sp>
         <p:nvSpPr>
-          <p:cNvPr id="16" name="Shape 13"/>
+          <p:cNvPr id="16" name="Shape 12"/>
           <p:cNvSpPr/>
           <p:nvPr/>
         </p:nvSpPr>
@@ -9970,7 +9842,7 @@
       </p:sp>
       <p:sp>
         <p:nvSpPr>
-          <p:cNvPr id="17" name="Text 14"/>
+          <p:cNvPr id="17" name="Text 13"/>
           <p:cNvSpPr/>
           <p:nvPr/>
         </p:nvSpPr>
@@ -10012,7 +9884,7 @@
       </p:sp>
       <p:sp>
         <p:nvSpPr>
-          <p:cNvPr id="18" name="Text 15"/>
+          <p:cNvPr id="18" name="Text 14"/>
           <p:cNvSpPr/>
           <p:nvPr/>
         </p:nvSpPr>
@@ -10054,7 +9926,7 @@
       </p:sp>
       <p:sp>
         <p:nvSpPr>
-          <p:cNvPr id="19" name="Shape 16"/>
+          <p:cNvPr id="19" name="Shape 15"/>
           <p:cNvSpPr/>
           <p:nvPr/>
         </p:nvSpPr>
@@ -10077,7 +9949,7 @@
       </p:sp>
       <p:sp>
         <p:nvSpPr>
-          <p:cNvPr id="20" name="Text 17"/>
+          <p:cNvPr id="20" name="Text 16"/>
           <p:cNvSpPr/>
           <p:nvPr/>
         </p:nvSpPr>
@@ -10119,7 +9991,7 @@
       </p:sp>
       <p:sp>
         <p:nvSpPr>
-          <p:cNvPr id="21" name="Text 18"/>
+          <p:cNvPr id="21" name="Text 17"/>
           <p:cNvSpPr/>
           <p:nvPr/>
         </p:nvSpPr>
@@ -10195,7 +10067,7 @@
       </p:sp>
       <p:sp>
         <p:nvSpPr>
-          <p:cNvPr id="22" name="Text 19"/>
+          <p:cNvPr id="22" name="Text 18"/>
           <p:cNvSpPr/>
           <p:nvPr/>
         </p:nvSpPr>
@@ -10271,7 +10143,7 @@
       </p:sp>
       <p:sp>
         <p:nvSpPr>
-          <p:cNvPr id="23" name="Text 20"/>
+          <p:cNvPr id="23" name="Text 19"/>
           <p:cNvSpPr/>
           <p:nvPr/>
         </p:nvSpPr>
@@ -10313,7 +10185,7 @@
       </p:sp>
       <p:sp>
         <p:nvSpPr>
-          <p:cNvPr id="24" name="Text 21"/>
+          <p:cNvPr id="24" name="Text 20"/>
           <p:cNvSpPr/>
           <p:nvPr/>
         </p:nvSpPr>
@@ -10349,14 +10221,14 @@
       </p:sp>
       <p:pic>
         <p:nvPicPr>
-          <p:cNvPr id="25" name="Image 1" descr="/Users/danwahlin/.copilot/session-state/56a7a0da-def8-48d4-b5e8-0ac3878cb8dd/files/slides-build/icons/GoInfo-0969DA.png">    </p:cNvPr>
+          <p:cNvPr id="25" name="Image 2" descr="/Users/danwahlin/.copilot/session-state/56a7a0da-def8-48d4-b5e8-0ac3878cb8dd/files/slides-build/icons/GoInfo-0969DA.png">    </p:cNvPr>
           <p:cNvPicPr>
             <a:picLocks noChangeAspect="1"/>
           </p:cNvPicPr>
           <p:nvPr/>
         </p:nvPicPr>
         <p:blipFill>
-          <a:blip r:embed="rId3"/>
+          <a:blip r:embed="rId4"/>
           <a:stretch>
             <a:fillRect/>
           </a:stretch>
@@ -10373,7 +10245,7 @@
       </p:pic>
       <p:sp>
         <p:nvSpPr>
-          <p:cNvPr id="26" name="Text 22"/>
+          <p:cNvPr id="26" name="Text 21"/>
           <p:cNvSpPr/>
           <p:nvPr/>
         </p:nvSpPr>
@@ -10564,82 +10436,9 @@
           </a:p>
         </p:txBody>
       </p:sp>
-      <p:sp>
-        <p:nvSpPr>
-          <p:cNvPr id="5" name="Text 3"/>
-          <p:cNvSpPr/>
-          <p:nvPr/>
-        </p:nvSpPr>
-        <p:spPr>
-          <a:xfrm>
-            <a:off x="7340501" y="177701"/>
-            <a:ext cx="1168301" cy="279350"/>
-          </a:xfrm>
-          <a:prstGeom prst="roundRect">
-            <a:avLst>
-              <a:gd name="adj" fmla="val 22731"/>
-            </a:avLst>
-          </a:prstGeom>
-          <a:solidFill>
-            <a:srgbClr val="1A7F37"/>
-          </a:solidFill>
-          <a:ln/>
-        </p:spPr>
-        <p:txBody>
-          <a:bodyPr wrap="square" rtlCol="0" anchor="ctr"/>
-          <a:lstStyle/>
-          <a:p>
-            <a:pPr indent="0" marL="0">
-              <a:buNone/>
-            </a:pPr>
-            <a:endParaRPr lang="en-US" dirty="0"/>
-          </a:p>
-        </p:txBody>
-      </p:sp>
-      <p:sp>
-        <p:nvSpPr>
-          <p:cNvPr id="6" name="Text 4"/>
-          <p:cNvSpPr/>
-          <p:nvPr/>
-        </p:nvSpPr>
-        <p:spPr>
-          <a:xfrm>
-            <a:off x="7461041" y="231577"/>
-            <a:ext cx="927071" cy="171450"/>
-          </a:xfrm>
-          <a:prstGeom prst="rect">
-            <a:avLst/>
-          </a:prstGeom>
-          <a:noFill/>
-          <a:ln/>
-        </p:spPr>
-        <p:txBody>
-          <a:bodyPr wrap="square" lIns="0" tIns="0" rIns="0" bIns="0" rtlCol="0" anchor="t"/>
-          <a:lstStyle/>
-          <a:p>
-            <a:pPr algn="ctr" indent="0" marL="0">
-              <a:buNone/>
-            </a:pPr>
-            <a:r>
-              <a:rPr lang="en-US" sz="1150" b="1" dirty="0">
-                <a:solidFill>
-                  <a:srgbClr val="FFFFFF"/>
-                </a:solidFill>
-                <a:latin typeface="Arial" pitchFamily="34" charset="0"/>
-                <a:ea typeface="Arial" pitchFamily="34" charset="-122"/>
-                <a:cs typeface="Arial" pitchFamily="34" charset="-120"/>
-              </a:rPr>
-              <a:t>CHAPTER 00</a:t>
-            </a:r>
-            <a:endParaRPr lang="en-US" sz="1150" dirty="0"/>
-          </a:p>
-        </p:txBody>
-      </p:sp>
       <p:pic>
         <p:nvPicPr>
-          <p:cNvPr id="7" name="Image 0" descr="/Users/danwahlin/.copilot/session-state/56a7a0da-def8-48d4-b5e8-0ac3878cb8dd/files/slides-build/icons/FaGithub-1F2328.png">
-            <a:hlinkClick r:id="rId2" tooltip="https://github.com/github/copilot-app-for-beginners/tree/main/00-setup"/>
-          </p:cNvPr>
+          <p:cNvPr id="5" name="Image 0" descr="/Users/danwahlin/.copilot/session-state/56a7a0da-def8-48d4-b5e8-0ac3878cb8dd/files/slides-build/img/grad-corner.png">    </p:cNvPr>
           <p:cNvPicPr>
             <a:picLocks noChangeAspect="1"/>
           </p:cNvPicPr>
@@ -10653,6 +10452,103 @@
         </p:blipFill>
         <p:spPr>
           <a:xfrm>
+            <a:off x="6349901" y="0"/>
+            <a:ext cx="2793950" cy="1308050"/>
+          </a:xfrm>
+          <a:prstGeom prst="rect">
+            <a:avLst/>
+          </a:prstGeom>
+        </p:spPr>
+      </p:pic>
+      <p:sp>
+        <p:nvSpPr>
+          <p:cNvPr id="6" name="Text 3"/>
+          <p:cNvSpPr/>
+          <p:nvPr/>
+        </p:nvSpPr>
+        <p:spPr>
+          <a:xfrm>
+            <a:off x="7340501" y="177701"/>
+            <a:ext cx="1168301" cy="279350"/>
+          </a:xfrm>
+          <a:prstGeom prst="roundRect">
+            <a:avLst>
+              <a:gd name="adj" fmla="val 22731"/>
+            </a:avLst>
+          </a:prstGeom>
+          <a:solidFill>
+            <a:srgbClr val="1A7F37"/>
+          </a:solidFill>
+          <a:ln/>
+        </p:spPr>
+        <p:txBody>
+          <a:bodyPr wrap="square" rtlCol="0" anchor="ctr"/>
+          <a:lstStyle/>
+          <a:p>
+            <a:pPr indent="0" marL="0">
+              <a:buNone/>
+            </a:pPr>
+            <a:endParaRPr lang="en-US" dirty="0"/>
+          </a:p>
+        </p:txBody>
+      </p:sp>
+      <p:sp>
+        <p:nvSpPr>
+          <p:cNvPr id="7" name="Text 4"/>
+          <p:cNvSpPr/>
+          <p:nvPr/>
+        </p:nvSpPr>
+        <p:spPr>
+          <a:xfrm>
+            <a:off x="7461041" y="231577"/>
+            <a:ext cx="927071" cy="171450"/>
+          </a:xfrm>
+          <a:prstGeom prst="rect">
+            <a:avLst/>
+          </a:prstGeom>
+          <a:noFill/>
+          <a:ln/>
+        </p:spPr>
+        <p:txBody>
+          <a:bodyPr wrap="square" lIns="0" tIns="0" rIns="0" bIns="0" rtlCol="0" anchor="t"/>
+          <a:lstStyle/>
+          <a:p>
+            <a:pPr algn="ctr" indent="0" marL="0">
+              <a:buNone/>
+            </a:pPr>
+            <a:r>
+              <a:rPr lang="en-US" sz="1150" b="1" dirty="0">
+                <a:solidFill>
+                  <a:srgbClr val="FFFFFF"/>
+                </a:solidFill>
+                <a:latin typeface="Arial" pitchFamily="34" charset="0"/>
+                <a:ea typeface="Arial" pitchFamily="34" charset="-122"/>
+                <a:cs typeface="Arial" pitchFamily="34" charset="-120"/>
+              </a:rPr>
+              <a:t>CHAPTER 00</a:t>
+            </a:r>
+            <a:endParaRPr lang="en-US" sz="1150" dirty="0"/>
+          </a:p>
+        </p:txBody>
+      </p:sp>
+      <p:pic>
+        <p:nvPicPr>
+          <p:cNvPr id="8" name="Image 1" descr="/Users/danwahlin/.copilot/session-state/56a7a0da-def8-48d4-b5e8-0ac3878cb8dd/files/slides-build/icons/FaGithub-1F2328.png">
+            <a:hlinkClick r:id="rId3" tooltip="https://github.com/github/copilot-app-for-beginners/tree/main/00-setup"/>
+          </p:cNvPr>
+          <p:cNvPicPr>
+            <a:picLocks noChangeAspect="1"/>
+          </p:cNvPicPr>
+          <p:nvPr/>
+        </p:nvPicPr>
+        <p:blipFill>
+          <a:blip r:embed="rId2"/>
+          <a:stretch>
+            <a:fillRect/>
+          </a:stretch>
+        </p:blipFill>
+        <p:spPr>
+          <a:xfrm>
             <a:off x="8610600" y="165050"/>
             <a:ext cx="304800" cy="304800"/>
           </a:xfrm>
@@ -10663,7 +10559,7 @@
       </p:pic>
       <p:sp>
         <p:nvSpPr>
-          <p:cNvPr id="8" name="Text 5"/>
+          <p:cNvPr id="9" name="Text 5"/>
           <p:cNvSpPr/>
           <p:nvPr/>
         </p:nvSpPr>
@@ -10702,7 +10598,7 @@
       </p:sp>
       <p:sp>
         <p:nvSpPr>
-          <p:cNvPr id="9" name="Text 6"/>
+          <p:cNvPr id="10" name="Text 6"/>
           <p:cNvSpPr/>
           <p:nvPr/>
         </p:nvSpPr>
@@ -10747,7 +10643,7 @@
       </p:sp>
       <p:sp>
         <p:nvSpPr>
-          <p:cNvPr id="10" name="Text 7"/>
+          <p:cNvPr id="11" name="Text 7"/>
           <p:cNvSpPr/>
           <p:nvPr/>
         </p:nvSpPr>
@@ -10779,7 +10675,7 @@
       </p:sp>
       <p:sp>
         <p:nvSpPr>
-          <p:cNvPr id="11" name="Text 8"/>
+          <p:cNvPr id="12" name="Text 8"/>
           <p:cNvSpPr/>
           <p:nvPr/>
         </p:nvSpPr>
@@ -10851,112 +10747,9 @@
           <a:chExt cx="0" cy="0"/>
         </a:xfrm>
       </p:grpSpPr>
-      <p:sp>
-        <p:nvSpPr>
-          <p:cNvPr id="2" name="Text 0"/>
-          <p:cNvSpPr/>
-          <p:nvPr/>
-        </p:nvSpPr>
-        <p:spPr>
-          <a:xfrm>
-            <a:off x="0" y="0"/>
-            <a:ext cx="9144000" cy="76200"/>
-          </a:xfrm>
-          <a:prstGeom prst="rect">
-            <a:avLst/>
-          </a:prstGeom>
-          <a:solidFill>
-            <a:srgbClr val="0969DA"/>
-          </a:solidFill>
-          <a:ln/>
-        </p:spPr>
-        <p:txBody>
-          <a:bodyPr wrap="square" rtlCol="0" anchor="ctr"/>
-          <a:lstStyle/>
-          <a:p>
-            <a:pPr indent="0" marL="0">
-              <a:buNone/>
-            </a:pPr>
-            <a:endParaRPr lang="en-US" dirty="0"/>
-          </a:p>
-        </p:txBody>
-      </p:sp>
-      <p:sp>
-        <p:nvSpPr>
-          <p:cNvPr id="3" name="Text 1"/>
-          <p:cNvSpPr/>
-          <p:nvPr/>
-        </p:nvSpPr>
-        <p:spPr>
-          <a:xfrm>
-            <a:off x="7340501" y="177701"/>
-            <a:ext cx="1168301" cy="279350"/>
-          </a:xfrm>
-          <a:prstGeom prst="roundRect">
-            <a:avLst>
-              <a:gd name="adj" fmla="val 22731"/>
-            </a:avLst>
-          </a:prstGeom>
-          <a:solidFill>
-            <a:srgbClr val="1A7F37"/>
-          </a:solidFill>
-          <a:ln/>
-        </p:spPr>
-        <p:txBody>
-          <a:bodyPr wrap="square" rtlCol="0" anchor="ctr"/>
-          <a:lstStyle/>
-          <a:p>
-            <a:pPr indent="0" marL="0">
-              <a:buNone/>
-            </a:pPr>
-            <a:endParaRPr lang="en-US" dirty="0"/>
-          </a:p>
-        </p:txBody>
-      </p:sp>
-      <p:sp>
-        <p:nvSpPr>
-          <p:cNvPr id="4" name="Text 2"/>
-          <p:cNvSpPr/>
-          <p:nvPr/>
-        </p:nvSpPr>
-        <p:spPr>
-          <a:xfrm>
-            <a:off x="7461041" y="231577"/>
-            <a:ext cx="927071" cy="171450"/>
-          </a:xfrm>
-          <a:prstGeom prst="rect">
-            <a:avLst/>
-          </a:prstGeom>
-          <a:noFill/>
-          <a:ln/>
-        </p:spPr>
-        <p:txBody>
-          <a:bodyPr wrap="square" lIns="0" tIns="0" rIns="0" bIns="0" rtlCol="0" anchor="t"/>
-          <a:lstStyle/>
-          <a:p>
-            <a:pPr algn="ctr" indent="0" marL="0">
-              <a:buNone/>
-            </a:pPr>
-            <a:r>
-              <a:rPr lang="en-US" sz="1150" b="1" dirty="0">
-                <a:solidFill>
-                  <a:srgbClr val="FFFFFF"/>
-                </a:solidFill>
-                <a:latin typeface="Arial" pitchFamily="34" charset="0"/>
-                <a:ea typeface="Arial" pitchFamily="34" charset="-122"/>
-                <a:cs typeface="Arial" pitchFamily="34" charset="-120"/>
-              </a:rPr>
-              <a:t>CHAPTER 00</a:t>
-            </a:r>
-            <a:endParaRPr lang="en-US" sz="1150" dirty="0"/>
-          </a:p>
-        </p:txBody>
-      </p:sp>
       <p:pic>
         <p:nvPicPr>
-          <p:cNvPr id="5" name="Image 0" descr="/Users/danwahlin/.copilot/session-state/56a7a0da-def8-48d4-b5e8-0ac3878cb8dd/files/slides-build/icons/FaGithub-1F2328.png">
-            <a:hlinkClick r:id="rId2" tooltip="https://github.com/github/copilot-app-for-beginners/tree/main/00-setup"/>
-          </p:cNvPr>
+          <p:cNvPr id="2" name="Image 0" descr="/Users/danwahlin/.copilot/session-state/56a7a0da-def8-48d4-b5e8-0ac3878cb8dd/files/slides-build/img/grad-corner.png">    </p:cNvPr>
           <p:cNvPicPr>
             <a:picLocks noChangeAspect="1"/>
           </p:cNvPicPr>
@@ -10970,6 +10763,103 @@
         </p:blipFill>
         <p:spPr>
           <a:xfrm>
+            <a:off x="6349901" y="0"/>
+            <a:ext cx="2793950" cy="1308050"/>
+          </a:xfrm>
+          <a:prstGeom prst="rect">
+            <a:avLst/>
+          </a:prstGeom>
+        </p:spPr>
+      </p:pic>
+      <p:sp>
+        <p:nvSpPr>
+          <p:cNvPr id="3" name="Text 0"/>
+          <p:cNvSpPr/>
+          <p:nvPr/>
+        </p:nvSpPr>
+        <p:spPr>
+          <a:xfrm>
+            <a:off x="7340501" y="177701"/>
+            <a:ext cx="1168301" cy="279350"/>
+          </a:xfrm>
+          <a:prstGeom prst="roundRect">
+            <a:avLst>
+              <a:gd name="adj" fmla="val 22731"/>
+            </a:avLst>
+          </a:prstGeom>
+          <a:solidFill>
+            <a:srgbClr val="1A7F37"/>
+          </a:solidFill>
+          <a:ln/>
+        </p:spPr>
+        <p:txBody>
+          <a:bodyPr wrap="square" rtlCol="0" anchor="ctr"/>
+          <a:lstStyle/>
+          <a:p>
+            <a:pPr indent="0" marL="0">
+              <a:buNone/>
+            </a:pPr>
+            <a:endParaRPr lang="en-US" dirty="0"/>
+          </a:p>
+        </p:txBody>
+      </p:sp>
+      <p:sp>
+        <p:nvSpPr>
+          <p:cNvPr id="4" name="Text 1"/>
+          <p:cNvSpPr/>
+          <p:nvPr/>
+        </p:nvSpPr>
+        <p:spPr>
+          <a:xfrm>
+            <a:off x="7461041" y="231577"/>
+            <a:ext cx="927071" cy="171450"/>
+          </a:xfrm>
+          <a:prstGeom prst="rect">
+            <a:avLst/>
+          </a:prstGeom>
+          <a:noFill/>
+          <a:ln/>
+        </p:spPr>
+        <p:txBody>
+          <a:bodyPr wrap="square" lIns="0" tIns="0" rIns="0" bIns="0" rtlCol="0" anchor="t"/>
+          <a:lstStyle/>
+          <a:p>
+            <a:pPr algn="ctr" indent="0" marL="0">
+              <a:buNone/>
+            </a:pPr>
+            <a:r>
+              <a:rPr lang="en-US" sz="1150" b="1" dirty="0">
+                <a:solidFill>
+                  <a:srgbClr val="FFFFFF"/>
+                </a:solidFill>
+                <a:latin typeface="Arial" pitchFamily="34" charset="0"/>
+                <a:ea typeface="Arial" pitchFamily="34" charset="-122"/>
+                <a:cs typeface="Arial" pitchFamily="34" charset="-120"/>
+              </a:rPr>
+              <a:t>CHAPTER 00</a:t>
+            </a:r>
+            <a:endParaRPr lang="en-US" sz="1150" dirty="0"/>
+          </a:p>
+        </p:txBody>
+      </p:sp>
+      <p:pic>
+        <p:nvPicPr>
+          <p:cNvPr id="5" name="Image 1" descr="/Users/danwahlin/.copilot/session-state/56a7a0da-def8-48d4-b5e8-0ac3878cb8dd/files/slides-build/icons/FaGithub-1F2328.png">
+            <a:hlinkClick r:id="rId3" tooltip="https://github.com/github/copilot-app-for-beginners/tree/main/00-setup"/>
+          </p:cNvPr>
+          <p:cNvPicPr>
+            <a:picLocks noChangeAspect="1"/>
+          </p:cNvPicPr>
+          <p:nvPr/>
+        </p:nvPicPr>
+        <p:blipFill>
+          <a:blip r:embed="rId2"/>
+          <a:stretch>
+            <a:fillRect/>
+          </a:stretch>
+        </p:blipFill>
+        <p:spPr>
+          <a:xfrm>
             <a:off x="8610600" y="165050"/>
             <a:ext cx="304800" cy="304800"/>
           </a:xfrm>
@@ -10980,7 +10870,7 @@
       </p:pic>
       <p:sp>
         <p:nvSpPr>
-          <p:cNvPr id="6" name="Text 3"/>
+          <p:cNvPr id="6" name="Text 2"/>
           <p:cNvSpPr/>
           <p:nvPr/>
         </p:nvSpPr>
@@ -11019,7 +10909,7 @@
       </p:sp>
       <p:sp>
         <p:nvSpPr>
-          <p:cNvPr id="7" name="Text 4"/>
+          <p:cNvPr id="7" name="Text 3"/>
           <p:cNvSpPr/>
           <p:nvPr/>
         </p:nvSpPr>
@@ -11064,7 +10954,7 @@
       </p:sp>
       <p:sp>
         <p:nvSpPr>
-          <p:cNvPr id="8" name="Text 5"/>
+          <p:cNvPr id="8" name="Text 4"/>
           <p:cNvSpPr/>
           <p:nvPr/>
         </p:nvSpPr>
@@ -11096,7 +10986,7 @@
       </p:sp>
       <p:sp>
         <p:nvSpPr>
-          <p:cNvPr id="9" name="Text 6"/>
+          <p:cNvPr id="9" name="Text 5"/>
           <p:cNvSpPr/>
           <p:nvPr/>
         </p:nvSpPr>
@@ -11135,7 +11025,7 @@
       </p:sp>
       <p:sp>
         <p:nvSpPr>
-          <p:cNvPr id="10" name="Text 7"/>
+          <p:cNvPr id="10" name="Text 6"/>
           <p:cNvSpPr/>
           <p:nvPr/>
         </p:nvSpPr>
@@ -11177,7 +11067,7 @@
       </p:sp>
       <p:sp>
         <p:nvSpPr>
-          <p:cNvPr id="11" name="Text 8"/>
+          <p:cNvPr id="11" name="Text 7"/>
           <p:cNvSpPr/>
           <p:nvPr/>
         </p:nvSpPr>
@@ -11219,7 +11109,7 @@
       </p:sp>
       <p:sp>
         <p:nvSpPr>
-          <p:cNvPr id="12" name="Text 9"/>
+          <p:cNvPr id="12" name="Text 8"/>
           <p:cNvSpPr/>
           <p:nvPr/>
         </p:nvSpPr>
@@ -11251,7 +11141,7 @@
       </p:sp>
       <p:sp>
         <p:nvSpPr>
-          <p:cNvPr id="13" name="Text 10"/>
+          <p:cNvPr id="13" name="Text 9"/>
           <p:cNvSpPr/>
           <p:nvPr/>
         </p:nvSpPr>
@@ -11290,7 +11180,7 @@
       </p:sp>
       <p:sp>
         <p:nvSpPr>
-          <p:cNvPr id="14" name="Text 11"/>
+          <p:cNvPr id="14" name="Text 10"/>
           <p:cNvSpPr/>
           <p:nvPr/>
         </p:nvSpPr>
@@ -11332,7 +11222,7 @@
       </p:sp>
       <p:sp>
         <p:nvSpPr>
-          <p:cNvPr id="15" name="Text 12"/>
+          <p:cNvPr id="15" name="Text 11"/>
           <p:cNvSpPr/>
           <p:nvPr/>
         </p:nvSpPr>
@@ -11442,7 +11332,7 @@
       </p:sp>
       <p:sp>
         <p:nvSpPr>
-          <p:cNvPr id="16" name="Text 13"/>
+          <p:cNvPr id="16" name="Text 12"/>
           <p:cNvSpPr/>
           <p:nvPr/>
         </p:nvSpPr>
@@ -11474,7 +11364,7 @@
       </p:sp>
       <p:sp>
         <p:nvSpPr>
-          <p:cNvPr id="17" name="Text 14"/>
+          <p:cNvPr id="17" name="Text 13"/>
           <p:cNvSpPr/>
           <p:nvPr/>
         </p:nvSpPr>
@@ -11513,7 +11403,7 @@
       </p:sp>
       <p:sp>
         <p:nvSpPr>
-          <p:cNvPr id="18" name="Text 15"/>
+          <p:cNvPr id="18" name="Text 14"/>
           <p:cNvSpPr/>
           <p:nvPr/>
         </p:nvSpPr>
@@ -11555,7 +11445,7 @@
       </p:sp>
       <p:sp>
         <p:nvSpPr>
-          <p:cNvPr id="19" name="Text 16"/>
+          <p:cNvPr id="19" name="Text 15"/>
           <p:cNvSpPr/>
           <p:nvPr/>
         </p:nvSpPr>
@@ -11631,7 +11521,7 @@
       </p:sp>
       <p:sp>
         <p:nvSpPr>
-          <p:cNvPr id="20" name="Text 17"/>
+          <p:cNvPr id="20" name="Text 16"/>
           <p:cNvSpPr/>
           <p:nvPr/>
         </p:nvSpPr>
@@ -11674,14 +11564,14 @@
       </p:sp>
       <p:pic>
         <p:nvPicPr>
-          <p:cNvPr id="21" name="Image 1" descr="/Users/danwahlin/.copilot/session-state/56a7a0da-def8-48d4-b5e8-0ac3878cb8dd/files/slides-build/img/00-app-sign-in.png">    </p:cNvPr>
+          <p:cNvPr id="21" name="Image 2" descr="/Users/danwahlin/.copilot/session-state/56a7a0da-def8-48d4-b5e8-0ac3878cb8dd/files/slides-build/img/00-app-sign-in.png">    </p:cNvPr>
           <p:cNvPicPr>
             <a:picLocks noChangeAspect="1"/>
           </p:cNvPicPr>
           <p:nvPr/>
         </p:nvPicPr>
         <p:blipFill>
-          <a:blip r:embed="rId3"/>
+          <a:blip r:embed="rId4"/>
           <a:stretch>
             <a:fillRect/>
           </a:stretch>
@@ -11830,82 +11720,9 @@
           </a:p>
         </p:txBody>
       </p:sp>
-      <p:sp>
-        <p:nvSpPr>
-          <p:cNvPr id="5" name="Text 3"/>
-          <p:cNvSpPr/>
-          <p:nvPr/>
-        </p:nvSpPr>
-        <p:spPr>
-          <a:xfrm>
-            <a:off x="7340501" y="177701"/>
-            <a:ext cx="1168301" cy="279350"/>
-          </a:xfrm>
-          <a:prstGeom prst="roundRect">
-            <a:avLst>
-              <a:gd name="adj" fmla="val 22731"/>
-            </a:avLst>
-          </a:prstGeom>
-          <a:solidFill>
-            <a:srgbClr val="1A7F37"/>
-          </a:solidFill>
-          <a:ln/>
-        </p:spPr>
-        <p:txBody>
-          <a:bodyPr wrap="square" rtlCol="0" anchor="ctr"/>
-          <a:lstStyle/>
-          <a:p>
-            <a:pPr indent="0" marL="0">
-              <a:buNone/>
-            </a:pPr>
-            <a:endParaRPr lang="en-US" dirty="0"/>
-          </a:p>
-        </p:txBody>
-      </p:sp>
-      <p:sp>
-        <p:nvSpPr>
-          <p:cNvPr id="6" name="Text 4"/>
-          <p:cNvSpPr/>
-          <p:nvPr/>
-        </p:nvSpPr>
-        <p:spPr>
-          <a:xfrm>
-            <a:off x="7461041" y="231577"/>
-            <a:ext cx="927071" cy="171450"/>
-          </a:xfrm>
-          <a:prstGeom prst="rect">
-            <a:avLst/>
-          </a:prstGeom>
-          <a:noFill/>
-          <a:ln/>
-        </p:spPr>
-        <p:txBody>
-          <a:bodyPr wrap="square" lIns="0" tIns="0" rIns="0" bIns="0" rtlCol="0" anchor="t"/>
-          <a:lstStyle/>
-          <a:p>
-            <a:pPr algn="ctr" indent="0" marL="0">
-              <a:buNone/>
-            </a:pPr>
-            <a:r>
-              <a:rPr lang="en-US" sz="1150" b="1" dirty="0">
-                <a:solidFill>
-                  <a:srgbClr val="FFFFFF"/>
-                </a:solidFill>
-                <a:latin typeface="Arial" pitchFamily="34" charset="0"/>
-                <a:ea typeface="Arial" pitchFamily="34" charset="-122"/>
-                <a:cs typeface="Arial" pitchFamily="34" charset="-120"/>
-              </a:rPr>
-              <a:t>CHAPTER 00</a:t>
-            </a:r>
-            <a:endParaRPr lang="en-US" sz="1150" dirty="0"/>
-          </a:p>
-        </p:txBody>
-      </p:sp>
       <p:pic>
         <p:nvPicPr>
-          <p:cNvPr id="7" name="Image 0" descr="/Users/danwahlin/.copilot/session-state/56a7a0da-def8-48d4-b5e8-0ac3878cb8dd/files/slides-build/icons/FaGithub-1F2328.png">
-            <a:hlinkClick r:id="rId2" tooltip="https://github.com/github/copilot-app-for-beginners/tree/main/00-setup"/>
-          </p:cNvPr>
+          <p:cNvPr id="5" name="Image 0" descr="/Users/danwahlin/.copilot/session-state/56a7a0da-def8-48d4-b5e8-0ac3878cb8dd/files/slides-build/img/grad-corner.png">    </p:cNvPr>
           <p:cNvPicPr>
             <a:picLocks noChangeAspect="1"/>
           </p:cNvPicPr>
@@ -11919,6 +11736,103 @@
         </p:blipFill>
         <p:spPr>
           <a:xfrm>
+            <a:off x="6349901" y="0"/>
+            <a:ext cx="2793950" cy="1308050"/>
+          </a:xfrm>
+          <a:prstGeom prst="rect">
+            <a:avLst/>
+          </a:prstGeom>
+        </p:spPr>
+      </p:pic>
+      <p:sp>
+        <p:nvSpPr>
+          <p:cNvPr id="6" name="Text 3"/>
+          <p:cNvSpPr/>
+          <p:nvPr/>
+        </p:nvSpPr>
+        <p:spPr>
+          <a:xfrm>
+            <a:off x="7340501" y="177701"/>
+            <a:ext cx="1168301" cy="279350"/>
+          </a:xfrm>
+          <a:prstGeom prst="roundRect">
+            <a:avLst>
+              <a:gd name="adj" fmla="val 22731"/>
+            </a:avLst>
+          </a:prstGeom>
+          <a:solidFill>
+            <a:srgbClr val="1A7F37"/>
+          </a:solidFill>
+          <a:ln/>
+        </p:spPr>
+        <p:txBody>
+          <a:bodyPr wrap="square" rtlCol="0" anchor="ctr"/>
+          <a:lstStyle/>
+          <a:p>
+            <a:pPr indent="0" marL="0">
+              <a:buNone/>
+            </a:pPr>
+            <a:endParaRPr lang="en-US" dirty="0"/>
+          </a:p>
+        </p:txBody>
+      </p:sp>
+      <p:sp>
+        <p:nvSpPr>
+          <p:cNvPr id="7" name="Text 4"/>
+          <p:cNvSpPr/>
+          <p:nvPr/>
+        </p:nvSpPr>
+        <p:spPr>
+          <a:xfrm>
+            <a:off x="7461041" y="231577"/>
+            <a:ext cx="927071" cy="171450"/>
+          </a:xfrm>
+          <a:prstGeom prst="rect">
+            <a:avLst/>
+          </a:prstGeom>
+          <a:noFill/>
+          <a:ln/>
+        </p:spPr>
+        <p:txBody>
+          <a:bodyPr wrap="square" lIns="0" tIns="0" rIns="0" bIns="0" rtlCol="0" anchor="t"/>
+          <a:lstStyle/>
+          <a:p>
+            <a:pPr algn="ctr" indent="0" marL="0">
+              <a:buNone/>
+            </a:pPr>
+            <a:r>
+              <a:rPr lang="en-US" sz="1150" b="1" dirty="0">
+                <a:solidFill>
+                  <a:srgbClr val="FFFFFF"/>
+                </a:solidFill>
+                <a:latin typeface="Arial" pitchFamily="34" charset="0"/>
+                <a:ea typeface="Arial" pitchFamily="34" charset="-122"/>
+                <a:cs typeface="Arial" pitchFamily="34" charset="-120"/>
+              </a:rPr>
+              <a:t>CHAPTER 00</a:t>
+            </a:r>
+            <a:endParaRPr lang="en-US" sz="1150" dirty="0"/>
+          </a:p>
+        </p:txBody>
+      </p:sp>
+      <p:pic>
+        <p:nvPicPr>
+          <p:cNvPr id="8" name="Image 1" descr="/Users/danwahlin/.copilot/session-state/56a7a0da-def8-48d4-b5e8-0ac3878cb8dd/files/slides-build/icons/FaGithub-1F2328.png">
+            <a:hlinkClick r:id="rId3" tooltip="https://github.com/github/copilot-app-for-beginners/tree/main/00-setup"/>
+          </p:cNvPr>
+          <p:cNvPicPr>
+            <a:picLocks noChangeAspect="1"/>
+          </p:cNvPicPr>
+          <p:nvPr/>
+        </p:nvPicPr>
+        <p:blipFill>
+          <a:blip r:embed="rId2"/>
+          <a:stretch>
+            <a:fillRect/>
+          </a:stretch>
+        </p:blipFill>
+        <p:spPr>
+          <a:xfrm>
             <a:off x="8610600" y="165050"/>
             <a:ext cx="304800" cy="304800"/>
           </a:xfrm>
@@ -11929,7 +11843,7 @@
       </p:pic>
       <p:sp>
         <p:nvSpPr>
-          <p:cNvPr id="8" name="Text 5"/>
+          <p:cNvPr id="9" name="Text 5"/>
           <p:cNvSpPr/>
           <p:nvPr/>
         </p:nvSpPr>
@@ -11968,7 +11882,7 @@
       </p:sp>
       <p:sp>
         <p:nvSpPr>
-          <p:cNvPr id="9" name="Text 6"/>
+          <p:cNvPr id="10" name="Text 6"/>
           <p:cNvSpPr/>
           <p:nvPr/>
         </p:nvSpPr>
@@ -12013,7 +11927,7 @@
       </p:sp>
       <p:sp>
         <p:nvSpPr>
-          <p:cNvPr id="10" name="Text 7"/>
+          <p:cNvPr id="11" name="Text 7"/>
           <p:cNvSpPr/>
           <p:nvPr/>
         </p:nvSpPr>
@@ -12045,7 +11959,7 @@
       </p:sp>
       <p:sp>
         <p:nvSpPr>
-          <p:cNvPr id="11" name="Text 8"/>
+          <p:cNvPr id="12" name="Text 8"/>
           <p:cNvSpPr/>
           <p:nvPr/>
         </p:nvSpPr>
@@ -12117,112 +12031,9 @@
           <a:chExt cx="0" cy="0"/>
         </a:xfrm>
       </p:grpSpPr>
-      <p:sp>
-        <p:nvSpPr>
-          <p:cNvPr id="2" name="Text 0"/>
-          <p:cNvSpPr/>
-          <p:nvPr/>
-        </p:nvSpPr>
-        <p:spPr>
-          <a:xfrm>
-            <a:off x="0" y="0"/>
-            <a:ext cx="9144000" cy="76200"/>
-          </a:xfrm>
-          <a:prstGeom prst="rect">
-            <a:avLst/>
-          </a:prstGeom>
-          <a:solidFill>
-            <a:srgbClr val="8250DF"/>
-          </a:solidFill>
-          <a:ln/>
-        </p:spPr>
-        <p:txBody>
-          <a:bodyPr wrap="square" rtlCol="0" anchor="ctr"/>
-          <a:lstStyle/>
-          <a:p>
-            <a:pPr indent="0" marL="0">
-              <a:buNone/>
-            </a:pPr>
-            <a:endParaRPr lang="en-US" dirty="0"/>
-          </a:p>
-        </p:txBody>
-      </p:sp>
-      <p:sp>
-        <p:nvSpPr>
-          <p:cNvPr id="3" name="Text 1"/>
-          <p:cNvSpPr/>
-          <p:nvPr/>
-        </p:nvSpPr>
-        <p:spPr>
-          <a:xfrm>
-            <a:off x="7340501" y="177701"/>
-            <a:ext cx="1168301" cy="279350"/>
-          </a:xfrm>
-          <a:prstGeom prst="roundRect">
-            <a:avLst>
-              <a:gd name="adj" fmla="val 22731"/>
-            </a:avLst>
-          </a:prstGeom>
-          <a:solidFill>
-            <a:srgbClr val="1A7F37"/>
-          </a:solidFill>
-          <a:ln/>
-        </p:spPr>
-        <p:txBody>
-          <a:bodyPr wrap="square" rtlCol="0" anchor="ctr"/>
-          <a:lstStyle/>
-          <a:p>
-            <a:pPr indent="0" marL="0">
-              <a:buNone/>
-            </a:pPr>
-            <a:endParaRPr lang="en-US" dirty="0"/>
-          </a:p>
-        </p:txBody>
-      </p:sp>
-      <p:sp>
-        <p:nvSpPr>
-          <p:cNvPr id="4" name="Text 2"/>
-          <p:cNvSpPr/>
-          <p:nvPr/>
-        </p:nvSpPr>
-        <p:spPr>
-          <a:xfrm>
-            <a:off x="7461041" y="231577"/>
-            <a:ext cx="927071" cy="171450"/>
-          </a:xfrm>
-          <a:prstGeom prst="rect">
-            <a:avLst/>
-          </a:prstGeom>
-          <a:noFill/>
-          <a:ln/>
-        </p:spPr>
-        <p:txBody>
-          <a:bodyPr wrap="square" lIns="0" tIns="0" rIns="0" bIns="0" rtlCol="0" anchor="t"/>
-          <a:lstStyle/>
-          <a:p>
-            <a:pPr algn="ctr" indent="0" marL="0">
-              <a:buNone/>
-            </a:pPr>
-            <a:r>
-              <a:rPr lang="en-US" sz="1150" b="1" dirty="0">
-                <a:solidFill>
-                  <a:srgbClr val="FFFFFF"/>
-                </a:solidFill>
-                <a:latin typeface="Arial" pitchFamily="34" charset="0"/>
-                <a:ea typeface="Arial" pitchFamily="34" charset="-122"/>
-                <a:cs typeface="Arial" pitchFamily="34" charset="-120"/>
-              </a:rPr>
-              <a:t>CHAPTER 00</a:t>
-            </a:r>
-            <a:endParaRPr lang="en-US" sz="1150" dirty="0"/>
-          </a:p>
-        </p:txBody>
-      </p:sp>
       <p:pic>
         <p:nvPicPr>
-          <p:cNvPr id="5" name="Image 0" descr="/Users/danwahlin/.copilot/session-state/56a7a0da-def8-48d4-b5e8-0ac3878cb8dd/files/slides-build/icons/FaGithub-1F2328.png">
-            <a:hlinkClick r:id="rId2" tooltip="https://github.com/github/copilot-app-for-beginners/tree/main/00-setup"/>
-          </p:cNvPr>
+          <p:cNvPr id="2" name="Image 0" descr="/Users/danwahlin/.copilot/session-state/56a7a0da-def8-48d4-b5e8-0ac3878cb8dd/files/slides-build/img/grad-corner.png">    </p:cNvPr>
           <p:cNvPicPr>
             <a:picLocks noChangeAspect="1"/>
           </p:cNvPicPr>
@@ -12236,6 +12047,103 @@
         </p:blipFill>
         <p:spPr>
           <a:xfrm>
+            <a:off x="6349901" y="0"/>
+            <a:ext cx="2793950" cy="1308050"/>
+          </a:xfrm>
+          <a:prstGeom prst="rect">
+            <a:avLst/>
+          </a:prstGeom>
+        </p:spPr>
+      </p:pic>
+      <p:sp>
+        <p:nvSpPr>
+          <p:cNvPr id="3" name="Text 0"/>
+          <p:cNvSpPr/>
+          <p:nvPr/>
+        </p:nvSpPr>
+        <p:spPr>
+          <a:xfrm>
+            <a:off x="7340501" y="177701"/>
+            <a:ext cx="1168301" cy="279350"/>
+          </a:xfrm>
+          <a:prstGeom prst="roundRect">
+            <a:avLst>
+              <a:gd name="adj" fmla="val 22731"/>
+            </a:avLst>
+          </a:prstGeom>
+          <a:solidFill>
+            <a:srgbClr val="1A7F37"/>
+          </a:solidFill>
+          <a:ln/>
+        </p:spPr>
+        <p:txBody>
+          <a:bodyPr wrap="square" rtlCol="0" anchor="ctr"/>
+          <a:lstStyle/>
+          <a:p>
+            <a:pPr indent="0" marL="0">
+              <a:buNone/>
+            </a:pPr>
+            <a:endParaRPr lang="en-US" dirty="0"/>
+          </a:p>
+        </p:txBody>
+      </p:sp>
+      <p:sp>
+        <p:nvSpPr>
+          <p:cNvPr id="4" name="Text 1"/>
+          <p:cNvSpPr/>
+          <p:nvPr/>
+        </p:nvSpPr>
+        <p:spPr>
+          <a:xfrm>
+            <a:off x="7461041" y="231577"/>
+            <a:ext cx="927071" cy="171450"/>
+          </a:xfrm>
+          <a:prstGeom prst="rect">
+            <a:avLst/>
+          </a:prstGeom>
+          <a:noFill/>
+          <a:ln/>
+        </p:spPr>
+        <p:txBody>
+          <a:bodyPr wrap="square" lIns="0" tIns="0" rIns="0" bIns="0" rtlCol="0" anchor="t"/>
+          <a:lstStyle/>
+          <a:p>
+            <a:pPr algn="ctr" indent="0" marL="0">
+              <a:buNone/>
+            </a:pPr>
+            <a:r>
+              <a:rPr lang="en-US" sz="1150" b="1" dirty="0">
+                <a:solidFill>
+                  <a:srgbClr val="FFFFFF"/>
+                </a:solidFill>
+                <a:latin typeface="Arial" pitchFamily="34" charset="0"/>
+                <a:ea typeface="Arial" pitchFamily="34" charset="-122"/>
+                <a:cs typeface="Arial" pitchFamily="34" charset="-120"/>
+              </a:rPr>
+              <a:t>CHAPTER 00</a:t>
+            </a:r>
+            <a:endParaRPr lang="en-US" sz="1150" dirty="0"/>
+          </a:p>
+        </p:txBody>
+      </p:sp>
+      <p:pic>
+        <p:nvPicPr>
+          <p:cNvPr id="5" name="Image 1" descr="/Users/danwahlin/.copilot/session-state/56a7a0da-def8-48d4-b5e8-0ac3878cb8dd/files/slides-build/icons/FaGithub-1F2328.png">
+            <a:hlinkClick r:id="rId3" tooltip="https://github.com/github/copilot-app-for-beginners/tree/main/00-setup"/>
+          </p:cNvPr>
+          <p:cNvPicPr>
+            <a:picLocks noChangeAspect="1"/>
+          </p:cNvPicPr>
+          <p:nvPr/>
+        </p:nvPicPr>
+        <p:blipFill>
+          <a:blip r:embed="rId2"/>
+          <a:stretch>
+            <a:fillRect/>
+          </a:stretch>
+        </p:blipFill>
+        <p:spPr>
+          <a:xfrm>
             <a:off x="8610600" y="165050"/>
             <a:ext cx="304800" cy="304800"/>
           </a:xfrm>
@@ -12246,7 +12154,7 @@
       </p:pic>
       <p:sp>
         <p:nvSpPr>
-          <p:cNvPr id="6" name="Text 3"/>
+          <p:cNvPr id="6" name="Text 2"/>
           <p:cNvSpPr/>
           <p:nvPr/>
         </p:nvSpPr>
@@ -12285,7 +12193,7 @@
       </p:sp>
       <p:sp>
         <p:nvSpPr>
-          <p:cNvPr id="7" name="Text 4"/>
+          <p:cNvPr id="7" name="Text 3"/>
           <p:cNvSpPr/>
           <p:nvPr/>
         </p:nvSpPr>
@@ -12330,7 +12238,7 @@
       </p:sp>
       <p:sp>
         <p:nvSpPr>
-          <p:cNvPr id="8" name="Text 5"/>
+          <p:cNvPr id="8" name="Text 4"/>
           <p:cNvSpPr/>
           <p:nvPr/>
         </p:nvSpPr>
@@ -12375,7 +12283,7 @@
       </p:sp>
       <p:sp>
         <p:nvSpPr>
-          <p:cNvPr id="9" name="Text 6"/>
+          <p:cNvPr id="9" name="Text 5"/>
           <p:cNvSpPr/>
           <p:nvPr/>
         </p:nvSpPr>
@@ -12407,7 +12315,7 @@
       </p:sp>
       <p:sp>
         <p:nvSpPr>
-          <p:cNvPr id="10" name="Text 7"/>
+          <p:cNvPr id="10" name="Text 6"/>
           <p:cNvSpPr/>
           <p:nvPr/>
         </p:nvSpPr>
@@ -12446,7 +12354,7 @@
       </p:sp>
       <p:sp>
         <p:nvSpPr>
-          <p:cNvPr id="11" name="Text 8"/>
+          <p:cNvPr id="11" name="Text 7"/>
           <p:cNvSpPr/>
           <p:nvPr/>
         </p:nvSpPr>
@@ -12488,7 +12396,7 @@
       </p:sp>
       <p:sp>
         <p:nvSpPr>
-          <p:cNvPr id="12" name="Text 9"/>
+          <p:cNvPr id="12" name="Text 8"/>
           <p:cNvSpPr/>
           <p:nvPr/>
         </p:nvSpPr>
@@ -12564,7 +12472,7 @@
       </p:sp>
       <p:sp>
         <p:nvSpPr>
-          <p:cNvPr id="13" name="Text 10"/>
+          <p:cNvPr id="13" name="Text 9"/>
           <p:cNvSpPr/>
           <p:nvPr/>
         </p:nvSpPr>
@@ -12596,7 +12504,7 @@
       </p:sp>
       <p:sp>
         <p:nvSpPr>
-          <p:cNvPr id="14" name="Text 11"/>
+          <p:cNvPr id="14" name="Text 10"/>
           <p:cNvSpPr/>
           <p:nvPr/>
         </p:nvSpPr>
@@ -12635,7 +12543,7 @@
       </p:sp>
       <p:sp>
         <p:nvSpPr>
-          <p:cNvPr id="15" name="Text 12"/>
+          <p:cNvPr id="15" name="Text 11"/>
           <p:cNvSpPr/>
           <p:nvPr/>
         </p:nvSpPr>
@@ -12677,7 +12585,7 @@
       </p:sp>
       <p:sp>
         <p:nvSpPr>
-          <p:cNvPr id="16" name="Text 13"/>
+          <p:cNvPr id="16" name="Text 12"/>
           <p:cNvSpPr/>
           <p:nvPr/>
         </p:nvSpPr>
@@ -12821,7 +12729,7 @@
       </p:sp>
       <p:sp>
         <p:nvSpPr>
-          <p:cNvPr id="17" name="Text 14"/>
+          <p:cNvPr id="17" name="Text 13"/>
           <p:cNvSpPr/>
           <p:nvPr/>
         </p:nvSpPr>
@@ -12853,7 +12761,7 @@
       </p:sp>
       <p:sp>
         <p:nvSpPr>
-          <p:cNvPr id="18" name="Text 15"/>
+          <p:cNvPr id="18" name="Text 14"/>
           <p:cNvSpPr/>
           <p:nvPr/>
         </p:nvSpPr>
@@ -12892,7 +12800,7 @@
       </p:sp>
       <p:sp>
         <p:nvSpPr>
-          <p:cNvPr id="19" name="Text 16"/>
+          <p:cNvPr id="19" name="Text 15"/>
           <p:cNvSpPr/>
           <p:nvPr/>
         </p:nvSpPr>
@@ -12934,7 +12842,7 @@
       </p:sp>
       <p:sp>
         <p:nvSpPr>
-          <p:cNvPr id="20" name="Text 17"/>
+          <p:cNvPr id="20" name="Text 16"/>
           <p:cNvSpPr/>
           <p:nvPr/>
         </p:nvSpPr>
@@ -12976,7 +12884,7 @@
       </p:sp>
       <p:sp>
         <p:nvSpPr>
-          <p:cNvPr id="21" name="Text 18"/>
+          <p:cNvPr id="21" name="Text 17"/>
           <p:cNvSpPr/>
           <p:nvPr/>
         </p:nvSpPr>
@@ -13019,14 +12927,14 @@
       </p:sp>
       <p:pic>
         <p:nvPicPr>
-          <p:cNvPr id="22" name="Image 1" descr="/Users/danwahlin/.copilot/session-state/56a7a0da-def8-48d4-b5e8-0ac3878cb8dd/files/slides-build/img/00-add-project-crop.png">    </p:cNvPr>
+          <p:cNvPr id="22" name="Image 2" descr="/Users/danwahlin/.copilot/session-state/56a7a0da-def8-48d4-b5e8-0ac3878cb8dd/files/slides-build/img/00-add-project-crop.png">    </p:cNvPr>
           <p:cNvPicPr>
             <a:picLocks noChangeAspect="1"/>
           </p:cNvPicPr>
           <p:nvPr/>
         </p:nvPicPr>
         <p:blipFill>
-          <a:blip r:embed="rId3"/>
+          <a:blip r:embed="rId4"/>
           <a:stretch>
             <a:fillRect/>
           </a:stretch>
@@ -13073,112 +12981,9 @@
           <a:chExt cx="0" cy="0"/>
         </a:xfrm>
       </p:grpSpPr>
-      <p:sp>
-        <p:nvSpPr>
-          <p:cNvPr id="2" name="Text 0"/>
-          <p:cNvSpPr/>
-          <p:nvPr/>
-        </p:nvSpPr>
-        <p:spPr>
-          <a:xfrm>
-            <a:off x="0" y="0"/>
-            <a:ext cx="9144000" cy="76200"/>
-          </a:xfrm>
-          <a:prstGeom prst="rect">
-            <a:avLst/>
-          </a:prstGeom>
-          <a:solidFill>
-            <a:srgbClr val="8250DF"/>
-          </a:solidFill>
-          <a:ln/>
-        </p:spPr>
-        <p:txBody>
-          <a:bodyPr wrap="square" rtlCol="0" anchor="ctr"/>
-          <a:lstStyle/>
-          <a:p>
-            <a:pPr indent="0" marL="0">
-              <a:buNone/>
-            </a:pPr>
-            <a:endParaRPr lang="en-US" dirty="0"/>
-          </a:p>
-        </p:txBody>
-      </p:sp>
-      <p:sp>
-        <p:nvSpPr>
-          <p:cNvPr id="3" name="Text 1"/>
-          <p:cNvSpPr/>
-          <p:nvPr/>
-        </p:nvSpPr>
-        <p:spPr>
-          <a:xfrm>
-            <a:off x="7340501" y="177701"/>
-            <a:ext cx="1168301" cy="279350"/>
-          </a:xfrm>
-          <a:prstGeom prst="roundRect">
-            <a:avLst>
-              <a:gd name="adj" fmla="val 22731"/>
-            </a:avLst>
-          </a:prstGeom>
-          <a:solidFill>
-            <a:srgbClr val="1A7F37"/>
-          </a:solidFill>
-          <a:ln/>
-        </p:spPr>
-        <p:txBody>
-          <a:bodyPr wrap="square" rtlCol="0" anchor="ctr"/>
-          <a:lstStyle/>
-          <a:p>
-            <a:pPr indent="0" marL="0">
-              <a:buNone/>
-            </a:pPr>
-            <a:endParaRPr lang="en-US" dirty="0"/>
-          </a:p>
-        </p:txBody>
-      </p:sp>
-      <p:sp>
-        <p:nvSpPr>
-          <p:cNvPr id="4" name="Text 2"/>
-          <p:cNvSpPr/>
-          <p:nvPr/>
-        </p:nvSpPr>
-        <p:spPr>
-          <a:xfrm>
-            <a:off x="7461041" y="231577"/>
-            <a:ext cx="927071" cy="171450"/>
-          </a:xfrm>
-          <a:prstGeom prst="rect">
-            <a:avLst/>
-          </a:prstGeom>
-          <a:noFill/>
-          <a:ln/>
-        </p:spPr>
-        <p:txBody>
-          <a:bodyPr wrap="square" lIns="0" tIns="0" rIns="0" bIns="0" rtlCol="0" anchor="t"/>
-          <a:lstStyle/>
-          <a:p>
-            <a:pPr algn="ctr" indent="0" marL="0">
-              <a:buNone/>
-            </a:pPr>
-            <a:r>
-              <a:rPr lang="en-US" sz="1150" b="1" dirty="0">
-                <a:solidFill>
-                  <a:srgbClr val="FFFFFF"/>
-                </a:solidFill>
-                <a:latin typeface="Arial" pitchFamily="34" charset="0"/>
-                <a:ea typeface="Arial" pitchFamily="34" charset="-122"/>
-                <a:cs typeface="Arial" pitchFamily="34" charset="-120"/>
-              </a:rPr>
-              <a:t>CHAPTER 00</a:t>
-            </a:r>
-            <a:endParaRPr lang="en-US" sz="1150" dirty="0"/>
-          </a:p>
-        </p:txBody>
-      </p:sp>
       <p:pic>
         <p:nvPicPr>
-          <p:cNvPr id="5" name="Image 0" descr="/Users/danwahlin/.copilot/session-state/56a7a0da-def8-48d4-b5e8-0ac3878cb8dd/files/slides-build/icons/FaGithub-1F2328.png">
-            <a:hlinkClick r:id="rId2" tooltip="https://github.com/github/copilot-app-for-beginners/tree/main/00-setup"/>
-          </p:cNvPr>
+          <p:cNvPr id="2" name="Image 0" descr="/Users/danwahlin/.copilot/session-state/56a7a0da-def8-48d4-b5e8-0ac3878cb8dd/files/slides-build/img/grad-corner.png">    </p:cNvPr>
           <p:cNvPicPr>
             <a:picLocks noChangeAspect="1"/>
           </p:cNvPicPr>
@@ -13192,6 +12997,103 @@
         </p:blipFill>
         <p:spPr>
           <a:xfrm>
+            <a:off x="6349901" y="0"/>
+            <a:ext cx="2793950" cy="1308050"/>
+          </a:xfrm>
+          <a:prstGeom prst="rect">
+            <a:avLst/>
+          </a:prstGeom>
+        </p:spPr>
+      </p:pic>
+      <p:sp>
+        <p:nvSpPr>
+          <p:cNvPr id="3" name="Text 0"/>
+          <p:cNvSpPr/>
+          <p:nvPr/>
+        </p:nvSpPr>
+        <p:spPr>
+          <a:xfrm>
+            <a:off x="7340501" y="177701"/>
+            <a:ext cx="1168301" cy="279350"/>
+          </a:xfrm>
+          <a:prstGeom prst="roundRect">
+            <a:avLst>
+              <a:gd name="adj" fmla="val 22731"/>
+            </a:avLst>
+          </a:prstGeom>
+          <a:solidFill>
+            <a:srgbClr val="1A7F37"/>
+          </a:solidFill>
+          <a:ln/>
+        </p:spPr>
+        <p:txBody>
+          <a:bodyPr wrap="square" rtlCol="0" anchor="ctr"/>
+          <a:lstStyle/>
+          <a:p>
+            <a:pPr indent="0" marL="0">
+              <a:buNone/>
+            </a:pPr>
+            <a:endParaRPr lang="en-US" dirty="0"/>
+          </a:p>
+        </p:txBody>
+      </p:sp>
+      <p:sp>
+        <p:nvSpPr>
+          <p:cNvPr id="4" name="Text 1"/>
+          <p:cNvSpPr/>
+          <p:nvPr/>
+        </p:nvSpPr>
+        <p:spPr>
+          <a:xfrm>
+            <a:off x="7461041" y="231577"/>
+            <a:ext cx="927071" cy="171450"/>
+          </a:xfrm>
+          <a:prstGeom prst="rect">
+            <a:avLst/>
+          </a:prstGeom>
+          <a:noFill/>
+          <a:ln/>
+        </p:spPr>
+        <p:txBody>
+          <a:bodyPr wrap="square" lIns="0" tIns="0" rIns="0" bIns="0" rtlCol="0" anchor="t"/>
+          <a:lstStyle/>
+          <a:p>
+            <a:pPr algn="ctr" indent="0" marL="0">
+              <a:buNone/>
+            </a:pPr>
+            <a:r>
+              <a:rPr lang="en-US" sz="1150" b="1" dirty="0">
+                <a:solidFill>
+                  <a:srgbClr val="FFFFFF"/>
+                </a:solidFill>
+                <a:latin typeface="Arial" pitchFamily="34" charset="0"/>
+                <a:ea typeface="Arial" pitchFamily="34" charset="-122"/>
+                <a:cs typeface="Arial" pitchFamily="34" charset="-120"/>
+              </a:rPr>
+              <a:t>CHAPTER 00</a:t>
+            </a:r>
+            <a:endParaRPr lang="en-US" sz="1150" dirty="0"/>
+          </a:p>
+        </p:txBody>
+      </p:sp>
+      <p:pic>
+        <p:nvPicPr>
+          <p:cNvPr id="5" name="Image 1" descr="/Users/danwahlin/.copilot/session-state/56a7a0da-def8-48d4-b5e8-0ac3878cb8dd/files/slides-build/icons/FaGithub-1F2328.png">
+            <a:hlinkClick r:id="rId3" tooltip="https://github.com/github/copilot-app-for-beginners/tree/main/00-setup"/>
+          </p:cNvPr>
+          <p:cNvPicPr>
+            <a:picLocks noChangeAspect="1"/>
+          </p:cNvPicPr>
+          <p:nvPr/>
+        </p:nvPicPr>
+        <p:blipFill>
+          <a:blip r:embed="rId2"/>
+          <a:stretch>
+            <a:fillRect/>
+          </a:stretch>
+        </p:blipFill>
+        <p:spPr>
+          <a:xfrm>
             <a:off x="8610600" y="165050"/>
             <a:ext cx="304800" cy="304800"/>
           </a:xfrm>
@@ -13202,7 +13104,7 @@
       </p:pic>
       <p:sp>
         <p:nvSpPr>
-          <p:cNvPr id="6" name="Text 3"/>
+          <p:cNvPr id="6" name="Text 2"/>
           <p:cNvSpPr/>
           <p:nvPr/>
         </p:nvSpPr>
@@ -13241,7 +13143,7 @@
       </p:sp>
       <p:sp>
         <p:nvSpPr>
-          <p:cNvPr id="7" name="Text 4"/>
+          <p:cNvPr id="7" name="Text 3"/>
           <p:cNvSpPr/>
           <p:nvPr/>
         </p:nvSpPr>
@@ -13286,7 +13188,7 @@
       </p:sp>
       <p:sp>
         <p:nvSpPr>
-          <p:cNvPr id="8" name="Text 5"/>
+          <p:cNvPr id="8" name="Text 4"/>
           <p:cNvSpPr/>
           <p:nvPr/>
         </p:nvSpPr>
@@ -13331,7 +13233,7 @@
       </p:sp>
       <p:sp>
         <p:nvSpPr>
-          <p:cNvPr id="9" name="Text 6"/>
+          <p:cNvPr id="9" name="Text 5"/>
           <p:cNvSpPr/>
           <p:nvPr/>
         </p:nvSpPr>
@@ -13374,14 +13276,14 @@
       </p:sp>
       <p:pic>
         <p:nvPicPr>
-          <p:cNvPr id="10" name="Image 1" descr="/Users/danwahlin/.copilot/session-state/56a7a0da-def8-48d4-b5e8-0ac3878cb8dd/files/slides-build/img/00-checkout-crop.png">    </p:cNvPr>
+          <p:cNvPr id="10" name="Image 2" descr="/Users/danwahlin/.copilot/session-state/56a7a0da-def8-48d4-b5e8-0ac3878cb8dd/files/slides-build/img/00-checkout-crop.png">    </p:cNvPr>
           <p:cNvPicPr>
             <a:picLocks noChangeAspect="1"/>
           </p:cNvPicPr>
           <p:nvPr/>
         </p:nvPicPr>
         <p:blipFill>
-          <a:blip r:embed="rId3"/>
+          <a:blip r:embed="rId4"/>
           <a:stretch>
             <a:fillRect/>
           </a:stretch>
@@ -13398,7 +13300,7 @@
       </p:pic>
       <p:sp>
         <p:nvSpPr>
-          <p:cNvPr id="11" name="Text 7"/>
+          <p:cNvPr id="11" name="Text 6"/>
           <p:cNvSpPr/>
           <p:nvPr/>
         </p:nvSpPr>
@@ -13430,7 +13332,7 @@
       </p:sp>
       <p:sp>
         <p:nvSpPr>
-          <p:cNvPr id="12" name="Text 8"/>
+          <p:cNvPr id="12" name="Text 7"/>
           <p:cNvSpPr/>
           <p:nvPr/>
         </p:nvSpPr>
@@ -13469,7 +13371,7 @@
       </p:sp>
       <p:sp>
         <p:nvSpPr>
-          <p:cNvPr id="13" name="Text 9"/>
+          <p:cNvPr id="13" name="Text 8"/>
           <p:cNvSpPr/>
           <p:nvPr/>
         </p:nvSpPr>
@@ -13511,7 +13413,7 @@
       </p:sp>
       <p:sp>
         <p:nvSpPr>
-          <p:cNvPr id="14" name="Text 10"/>
+          <p:cNvPr id="14" name="Text 9"/>
           <p:cNvSpPr/>
           <p:nvPr/>
         </p:nvSpPr>
@@ -13587,7 +13489,7 @@
       </p:sp>
       <p:sp>
         <p:nvSpPr>
-          <p:cNvPr id="15" name="Text 11"/>
+          <p:cNvPr id="15" name="Text 10"/>
           <p:cNvSpPr/>
           <p:nvPr/>
         </p:nvSpPr>
@@ -13619,7 +13521,7 @@
       </p:sp>
       <p:sp>
         <p:nvSpPr>
-          <p:cNvPr id="16" name="Text 12"/>
+          <p:cNvPr id="16" name="Text 11"/>
           <p:cNvSpPr/>
           <p:nvPr/>
         </p:nvSpPr>
@@ -13658,7 +13560,7 @@
       </p:sp>
       <p:sp>
         <p:nvSpPr>
-          <p:cNvPr id="17" name="Text 13"/>
+          <p:cNvPr id="17" name="Text 12"/>
           <p:cNvSpPr/>
           <p:nvPr/>
         </p:nvSpPr>
@@ -13700,7 +13602,7 @@
       </p:sp>
       <p:sp>
         <p:nvSpPr>
-          <p:cNvPr id="18" name="Text 14"/>
+          <p:cNvPr id="18" name="Text 13"/>
           <p:cNvSpPr/>
           <p:nvPr/>
         </p:nvSpPr>
@@ -13742,7 +13644,7 @@
       </p:sp>
       <p:sp>
         <p:nvSpPr>
-          <p:cNvPr id="19" name="Text 15"/>
+          <p:cNvPr id="19" name="Text 14"/>
           <p:cNvSpPr/>
           <p:nvPr/>
         </p:nvSpPr>
@@ -13774,7 +13676,7 @@
       </p:sp>
       <p:sp>
         <p:nvSpPr>
-          <p:cNvPr id="20" name="Text 16"/>
+          <p:cNvPr id="20" name="Text 15"/>
           <p:cNvSpPr/>
           <p:nvPr/>
         </p:nvSpPr>
@@ -13813,7 +13715,7 @@
       </p:sp>
       <p:sp>
         <p:nvSpPr>
-          <p:cNvPr id="21" name="Text 17"/>
+          <p:cNvPr id="21" name="Text 16"/>
           <p:cNvSpPr/>
           <p:nvPr/>
         </p:nvSpPr>
@@ -13855,7 +13757,7 @@
       </p:sp>
       <p:sp>
         <p:nvSpPr>
-          <p:cNvPr id="22" name="Text 18"/>
+          <p:cNvPr id="22" name="Text 17"/>
           <p:cNvSpPr/>
           <p:nvPr/>
         </p:nvSpPr>

--- a/slides/00-setup.pptx
+++ b/slides/00-setup.pptx
@@ -12890,12 +12890,12 @@
         </p:nvSpPr>
         <p:spPr>
           <a:xfrm>
-            <a:off x="4320927" y="1610916"/>
-            <a:ext cx="4311551" cy="2467570"/>
+            <a:off x="4461867" y="1577876"/>
+            <a:ext cx="4029670" cy="2533650"/>
           </a:xfrm>
           <a:prstGeom prst="roundRect">
             <a:avLst>
-              <a:gd name="adj" fmla="val 3088"/>
+              <a:gd name="adj" fmla="val 3008"/>
             </a:avLst>
           </a:prstGeom>
           <a:solidFill>
@@ -12941,8 +12941,8 @@
         </p:blipFill>
         <p:spPr>
           <a:xfrm>
-            <a:off x="4368552" y="1658541"/>
-            <a:ext cx="4216301" cy="2372320"/>
+            <a:off x="4509492" y="1625501"/>
+            <a:ext cx="3934420" cy="2438400"/>
           </a:xfrm>
           <a:prstGeom prst="rect">
             <a:avLst/>

--- a/slides/00-setup.pptx
+++ b/slides/00-setup.pptx
@@ -12289,7 +12289,7 @@
         </p:nvSpPr>
         <p:spPr>
           <a:xfrm>
-            <a:off x="507950" y="1745307"/>
+            <a:off x="507950" y="1770757"/>
             <a:ext cx="279350" cy="279350"/>
           </a:xfrm>
           <a:prstGeom prst="roundRect">
@@ -12321,7 +12321,7 @@
         </p:nvSpPr>
         <p:spPr>
           <a:xfrm>
-            <a:off x="602615" y="1789658"/>
+            <a:off x="602615" y="1815108"/>
             <a:ext cx="90020" cy="190500"/>
           </a:xfrm>
           <a:prstGeom prst="rect">
@@ -12360,7 +12360,7 @@
         </p:nvSpPr>
         <p:spPr>
           <a:xfrm>
-            <a:off x="939701" y="1745307"/>
+            <a:off x="939701" y="1770757"/>
             <a:ext cx="3186684" cy="222200"/>
           </a:xfrm>
           <a:prstGeom prst="rect">
@@ -12402,7 +12402,7 @@
         </p:nvSpPr>
         <p:spPr>
           <a:xfrm>
-            <a:off x="939701" y="1992809"/>
+            <a:off x="939701" y="2018258"/>
             <a:ext cx="3186684" cy="613321"/>
           </a:xfrm>
           <a:prstGeom prst="rect">
@@ -12478,7 +12478,7 @@
         </p:nvSpPr>
         <p:spPr>
           <a:xfrm>
-            <a:off x="507950" y="2860030"/>
+            <a:off x="507950" y="2885480"/>
             <a:ext cx="279350" cy="279350"/>
           </a:xfrm>
           <a:prstGeom prst="roundRect">
@@ -12510,7 +12510,7 @@
         </p:nvSpPr>
         <p:spPr>
           <a:xfrm>
-            <a:off x="602615" y="2904381"/>
+            <a:off x="602615" y="2929830"/>
             <a:ext cx="90020" cy="190500"/>
           </a:xfrm>
           <a:prstGeom prst="rect">
@@ -12549,7 +12549,7 @@
         </p:nvSpPr>
         <p:spPr>
           <a:xfrm>
-            <a:off x="939701" y="2860030"/>
+            <a:off x="939701" y="2885480"/>
             <a:ext cx="3186684" cy="222200"/>
           </a:xfrm>
           <a:prstGeom prst="rect">
@@ -12591,7 +12591,7 @@
         </p:nvSpPr>
         <p:spPr>
           <a:xfrm>
-            <a:off x="939701" y="3107531"/>
+            <a:off x="939701" y="3132981"/>
             <a:ext cx="3186684" cy="396180"/>
           </a:xfrm>
           <a:prstGeom prst="rect">
@@ -12653,7 +12653,7 @@
                 <a:ea typeface="Arial" pitchFamily="34" charset="-122"/>
                 <a:cs typeface="Arial" pitchFamily="34" charset="-120"/>
               </a:rPr>
-              <a:t> next to </a:t>
+              <a:t> (1), then </a:t>
             </a:r>
             <a:pPr algn="l" indent="0" marL="0">
               <a:lnSpc>
@@ -12670,7 +12670,7 @@
                 <a:ea typeface="Arial" pitchFamily="34" charset="-122"/>
                 <a:cs typeface="Arial" pitchFamily="34" charset="-120"/>
               </a:rPr>
-              <a:t>Projects</a:t>
+              <a:t>Add GitHub repository</a:t>
             </a:r>
             <a:pPr algn="l" indent="0" marL="0">
               <a:lnSpc>
@@ -12687,41 +12687,7 @@
                 <a:ea typeface="Arial" pitchFamily="34" charset="-122"/>
                 <a:cs typeface="Arial" pitchFamily="34" charset="-120"/>
               </a:rPr>
-              <a:t>, then </a:t>
-            </a:r>
-            <a:pPr algn="l" indent="0" marL="0">
-              <a:lnSpc>
-                <a:spcPts val="1560"/>
-              </a:lnSpc>
-              <a:buNone/>
-            </a:pPr>
-            <a:r>
-              <a:rPr lang="en-US" sz="1350" b="1" dirty="0">
-                <a:solidFill>
-                  <a:srgbClr val="59636E"/>
-                </a:solidFill>
-                <a:latin typeface="Arial" pitchFamily="34" charset="0"/>
-                <a:ea typeface="Arial" pitchFamily="34" charset="-122"/>
-                <a:cs typeface="Arial" pitchFamily="34" charset="-120"/>
-              </a:rPr>
-              <a:t>Add GitHub repository</a:t>
-            </a:r>
-            <a:pPr algn="l" indent="0" marL="0">
-              <a:lnSpc>
-                <a:spcPts val="1560"/>
-              </a:lnSpc>
-              <a:buNone/>
-            </a:pPr>
-            <a:r>
-              <a:rPr lang="en-US" sz="1350" dirty="0">
-                <a:solidFill>
-                  <a:srgbClr val="59636E"/>
-                </a:solidFill>
-                <a:latin typeface="Arial" pitchFamily="34" charset="0"/>
-                <a:ea typeface="Arial" pitchFamily="34" charset="-122"/>
-                <a:cs typeface="Arial" pitchFamily="34" charset="-120"/>
-              </a:rPr>
-              <a:t>.</a:t>
+              <a:t> (2).</a:t>
             </a:r>
             <a:endParaRPr lang="en-US" sz="1350" dirty="0"/>
           </a:p>
@@ -12735,7 +12701,7 @@
         </p:nvSpPr>
         <p:spPr>
           <a:xfrm>
-            <a:off x="507950" y="3757613"/>
+            <a:off x="507950" y="3783062"/>
             <a:ext cx="279350" cy="279350"/>
           </a:xfrm>
           <a:prstGeom prst="roundRect">
@@ -12767,7 +12733,7 @@
         </p:nvSpPr>
         <p:spPr>
           <a:xfrm>
-            <a:off x="602615" y="3801963"/>
+            <a:off x="602615" y="3827413"/>
             <a:ext cx="90020" cy="190500"/>
           </a:xfrm>
           <a:prstGeom prst="rect">
@@ -12806,7 +12772,7 @@
         </p:nvSpPr>
         <p:spPr>
           <a:xfrm>
-            <a:off x="939701" y="3757613"/>
+            <a:off x="939701" y="3783062"/>
             <a:ext cx="3186684" cy="222200"/>
           </a:xfrm>
           <a:prstGeom prst="rect">
@@ -12848,7 +12814,7 @@
         </p:nvSpPr>
         <p:spPr>
           <a:xfrm>
-            <a:off x="939701" y="4005114"/>
+            <a:off x="939701" y="4030563"/>
             <a:ext cx="3186684" cy="396180"/>
           </a:xfrm>
           <a:prstGeom prst="rect">
@@ -12890,12 +12856,12 @@
         </p:nvSpPr>
         <p:spPr>
           <a:xfrm>
-            <a:off x="4461867" y="1577876"/>
-            <a:ext cx="4029670" cy="2533650"/>
+            <a:off x="4320927" y="1579811"/>
+            <a:ext cx="4311551" cy="3037731"/>
           </a:xfrm>
           <a:prstGeom prst="roundRect">
             <a:avLst>
-              <a:gd name="adj" fmla="val 3008"/>
+              <a:gd name="adj" fmla="val 2508"/>
             </a:avLst>
           </a:prstGeom>
           <a:solidFill>
@@ -12941,8 +12907,8 @@
         </p:blipFill>
         <p:spPr>
           <a:xfrm>
-            <a:off x="4509492" y="1625501"/>
-            <a:ext cx="3934420" cy="2438400"/>
+            <a:off x="4368552" y="1627436"/>
+            <a:ext cx="4216301" cy="2942481"/>
           </a:xfrm>
           <a:prstGeom prst="rect">
             <a:avLst/>

--- a/slides/00-setup.pptx
+++ b/slides/00-setup.pptx
@@ -11527,12 +11527,12 @@
         </p:nvSpPr>
         <p:spPr>
           <a:xfrm>
-            <a:off x="4320927" y="1950690"/>
-            <a:ext cx="4311551" cy="1940421"/>
+            <a:off x="4320927" y="1974056"/>
+            <a:ext cx="4311551" cy="1893540"/>
           </a:xfrm>
           <a:prstGeom prst="roundRect">
             <a:avLst>
-              <a:gd name="adj" fmla="val 3927"/>
+              <a:gd name="adj" fmla="val 4024"/>
             </a:avLst>
           </a:prstGeom>
           <a:solidFill>
@@ -11564,7 +11564,7 @@
       </p:sp>
       <p:pic>
         <p:nvPicPr>
-          <p:cNvPr id="21" name="Image 2" descr="/Users/danwahlin/.copilot/session-state/56a7a0da-def8-48d4-b5e8-0ac3878cb8dd/files/slides-build/img/00-app-sign-in.png">    </p:cNvPr>
+          <p:cNvPr id="21" name="Image 2" descr="/Users/danwahlin/.copilot/session-state/56a7a0da-def8-48d4-b5e8-0ac3878cb8dd/files/slides-build/img/00-sign-in-crop.png">    </p:cNvPr>
           <p:cNvPicPr>
             <a:picLocks noChangeAspect="1"/>
           </p:cNvPicPr>
@@ -11578,8 +11578,8 @@
         </p:blipFill>
         <p:spPr>
           <a:xfrm>
-            <a:off x="4368552" y="1998315"/>
-            <a:ext cx="4216301" cy="1845171"/>
+            <a:off x="4368552" y="2021681"/>
+            <a:ext cx="4216301" cy="1798290"/>
           </a:xfrm>
           <a:prstGeom prst="rect">
             <a:avLst/>

--- a/slides/00-setup.pptx
+++ b/slides/00-setup.pptx
@@ -2034,7 +2034,7 @@
       </p:grpSpPr>
       <p:pic>
         <p:nvPicPr>
-          <p:cNvPr id="2" name="Image 0" descr="/Users/danwahlin/.copilot/session-state/56a7a0da-def8-48d4-b5e8-0ac3878cb8dd/files/slides-build/img/grad-title.jpg">    </p:cNvPr>
+          <p:cNvPr id="2" name="Image 0" descr="/Users/danwahlin/.copilot/session-state/56a7a0da-def8-48d4-b5e8-0ac3878cb8dd/files/slides-build/img/grad-title-pattern.jpg">    </p:cNvPr>
           <p:cNvPicPr>
             <a:picLocks noChangeAspect="1"/>
           </p:cNvPicPr>
@@ -2446,7 +2446,7 @@
       </p:sp>
       <p:pic>
         <p:nvPicPr>
-          <p:cNvPr id="5" name="Image 0" descr="/Users/danwahlin/.copilot/session-state/56a7a0da-def8-48d4-b5e8-0ac3878cb8dd/files/slides-build/img/grad-corner.png">    </p:cNvPr>
+          <p:cNvPr id="5" name="Image 0" descr="/Users/danwahlin/.copilot/session-state/56a7a0da-def8-48d4-b5e8-0ac3878cb8dd/files/slides-build/img/grad-corner-pattern.png">    </p:cNvPr>
           <p:cNvPicPr>
             <a:picLocks noChangeAspect="1"/>
           </p:cNvPicPr>
@@ -2757,7 +2757,7 @@
       </p:grpSpPr>
       <p:pic>
         <p:nvPicPr>
-          <p:cNvPr id="2" name="Image 0" descr="/Users/danwahlin/.copilot/session-state/56a7a0da-def8-48d4-b5e8-0ac3878cb8dd/files/slides-build/img/grad-corner.png">    </p:cNvPr>
+          <p:cNvPr id="2" name="Image 0" descr="/Users/danwahlin/.copilot/session-state/56a7a0da-def8-48d4-b5e8-0ac3878cb8dd/files/slides-build/img/grad-corner-pattern.png">    </p:cNvPr>
           <p:cNvPicPr>
             <a:picLocks noChangeAspect="1"/>
           </p:cNvPicPr>
@@ -4106,7 +4106,7 @@
       </p:grpSpPr>
       <p:pic>
         <p:nvPicPr>
-          <p:cNvPr id="2" name="Image 0" descr="/Users/danwahlin/.copilot/session-state/56a7a0da-def8-48d4-b5e8-0ac3878cb8dd/files/slides-build/img/grad-corner.png">    </p:cNvPr>
+          <p:cNvPr id="2" name="Image 0" descr="/Users/danwahlin/.copilot/session-state/56a7a0da-def8-48d4-b5e8-0ac3878cb8dd/files/slides-build/img/grad-corner-pattern.png">    </p:cNvPr>
           <p:cNvPicPr>
             <a:picLocks noChangeAspect="1"/>
           </p:cNvPicPr>
@@ -5626,7 +5626,7 @@
       </p:grpSpPr>
       <p:pic>
         <p:nvPicPr>
-          <p:cNvPr id="2" name="Image 0" descr="/Users/danwahlin/.copilot/session-state/56a7a0da-def8-48d4-b5e8-0ac3878cb8dd/files/slides-build/img/grad-corner.png">    </p:cNvPr>
+          <p:cNvPr id="2" name="Image 0" descr="/Users/danwahlin/.copilot/session-state/56a7a0da-def8-48d4-b5e8-0ac3878cb8dd/files/slides-build/img/grad-corner-pattern.png">    </p:cNvPr>
           <p:cNvPicPr>
             <a:picLocks noChangeAspect="1"/>
           </p:cNvPicPr>
@@ -6290,7 +6290,7 @@
       </p:grpSpPr>
       <p:pic>
         <p:nvPicPr>
-          <p:cNvPr id="2" name="Image 0" descr="/Users/danwahlin/.copilot/session-state/56a7a0da-def8-48d4-b5e8-0ac3878cb8dd/files/slides-build/img/grad-corner.png">    </p:cNvPr>
+          <p:cNvPr id="2" name="Image 0" descr="/Users/danwahlin/.copilot/session-state/56a7a0da-def8-48d4-b5e8-0ac3878cb8dd/files/slides-build/img/grad-corner-pattern.png">    </p:cNvPr>
           <p:cNvPicPr>
             <a:picLocks noChangeAspect="1"/>
           </p:cNvPicPr>
@@ -7419,7 +7419,7 @@
       </p:grpSpPr>
       <p:pic>
         <p:nvPicPr>
-          <p:cNvPr id="2" name="Image 0" descr="/Users/danwahlin/.copilot/session-state/56a7a0da-def8-48d4-b5e8-0ac3878cb8dd/files/slides-build/img/grad-corner.png">    </p:cNvPr>
+          <p:cNvPr id="2" name="Image 0" descr="/Users/danwahlin/.copilot/session-state/56a7a0da-def8-48d4-b5e8-0ac3878cb8dd/files/slides-build/img/grad-corner-pattern.png">    </p:cNvPr>
           <p:cNvPicPr>
             <a:picLocks noChangeAspect="1"/>
           </p:cNvPicPr>
@@ -8388,7 +8388,7 @@
       </p:grpSpPr>
       <p:pic>
         <p:nvPicPr>
-          <p:cNvPr id="2" name="Image 0" descr="/Users/danwahlin/.copilot/session-state/56a7a0da-def8-48d4-b5e8-0ac3878cb8dd/files/slides-build/img/grad-corner.png">    </p:cNvPr>
+          <p:cNvPr id="2" name="Image 0" descr="/Users/danwahlin/.copilot/session-state/56a7a0da-def8-48d4-b5e8-0ac3878cb8dd/files/slides-build/img/grad-corner-pattern.png">    </p:cNvPr>
           <p:cNvPicPr>
             <a:picLocks noChangeAspect="1"/>
           </p:cNvPicPr>
@@ -9285,7 +9285,7 @@
       </p:grpSpPr>
       <p:pic>
         <p:nvPicPr>
-          <p:cNvPr id="2" name="Image 0" descr="/Users/danwahlin/.copilot/session-state/56a7a0da-def8-48d4-b5e8-0ac3878cb8dd/files/slides-build/img/grad-corner.png">    </p:cNvPr>
+          <p:cNvPr id="2" name="Image 0" descr="/Users/danwahlin/.copilot/session-state/56a7a0da-def8-48d4-b5e8-0ac3878cb8dd/files/slides-build/img/grad-corner-pattern.png">    </p:cNvPr>
           <p:cNvPicPr>
             <a:picLocks noChangeAspect="1"/>
           </p:cNvPicPr>
@@ -10438,7 +10438,7 @@
       </p:sp>
       <p:pic>
         <p:nvPicPr>
-          <p:cNvPr id="5" name="Image 0" descr="/Users/danwahlin/.copilot/session-state/56a7a0da-def8-48d4-b5e8-0ac3878cb8dd/files/slides-build/img/grad-corner.png">    </p:cNvPr>
+          <p:cNvPr id="5" name="Image 0" descr="/Users/danwahlin/.copilot/session-state/56a7a0da-def8-48d4-b5e8-0ac3878cb8dd/files/slides-build/img/grad-corner-pattern.png">    </p:cNvPr>
           <p:cNvPicPr>
             <a:picLocks noChangeAspect="1"/>
           </p:cNvPicPr>
@@ -10749,7 +10749,7 @@
       </p:grpSpPr>
       <p:pic>
         <p:nvPicPr>
-          <p:cNvPr id="2" name="Image 0" descr="/Users/danwahlin/.copilot/session-state/56a7a0da-def8-48d4-b5e8-0ac3878cb8dd/files/slides-build/img/grad-corner.png">    </p:cNvPr>
+          <p:cNvPr id="2" name="Image 0" descr="/Users/danwahlin/.copilot/session-state/56a7a0da-def8-48d4-b5e8-0ac3878cb8dd/files/slides-build/img/grad-corner-pattern.png">    </p:cNvPr>
           <p:cNvPicPr>
             <a:picLocks noChangeAspect="1"/>
           </p:cNvPicPr>
@@ -11722,7 +11722,7 @@
       </p:sp>
       <p:pic>
         <p:nvPicPr>
-          <p:cNvPr id="5" name="Image 0" descr="/Users/danwahlin/.copilot/session-state/56a7a0da-def8-48d4-b5e8-0ac3878cb8dd/files/slides-build/img/grad-corner.png">    </p:cNvPr>
+          <p:cNvPr id="5" name="Image 0" descr="/Users/danwahlin/.copilot/session-state/56a7a0da-def8-48d4-b5e8-0ac3878cb8dd/files/slides-build/img/grad-corner-pattern.png">    </p:cNvPr>
           <p:cNvPicPr>
             <a:picLocks noChangeAspect="1"/>
           </p:cNvPicPr>
@@ -12033,7 +12033,7 @@
       </p:grpSpPr>
       <p:pic>
         <p:nvPicPr>
-          <p:cNvPr id="2" name="Image 0" descr="/Users/danwahlin/.copilot/session-state/56a7a0da-def8-48d4-b5e8-0ac3878cb8dd/files/slides-build/img/grad-corner.png">    </p:cNvPr>
+          <p:cNvPr id="2" name="Image 0" descr="/Users/danwahlin/.copilot/session-state/56a7a0da-def8-48d4-b5e8-0ac3878cb8dd/files/slides-build/img/grad-corner-pattern.png">    </p:cNvPr>
           <p:cNvPicPr>
             <a:picLocks noChangeAspect="1"/>
           </p:cNvPicPr>
@@ -12949,7 +12949,7 @@
       </p:grpSpPr>
       <p:pic>
         <p:nvPicPr>
-          <p:cNvPr id="2" name="Image 0" descr="/Users/danwahlin/.copilot/session-state/56a7a0da-def8-48d4-b5e8-0ac3878cb8dd/files/slides-build/img/grad-corner.png">    </p:cNvPr>
+          <p:cNvPr id="2" name="Image 0" descr="/Users/danwahlin/.copilot/session-state/56a7a0da-def8-48d4-b5e8-0ac3878cb8dd/files/slides-build/img/grad-corner-pattern.png">    </p:cNvPr>
           <p:cNvPicPr>
             <a:picLocks noChangeAspect="1"/>
           </p:cNvPicPr>

--- a/slides/00-setup.pptx
+++ b/slides/00-setup.pptx
@@ -2034,7 +2034,13 @@
       </p:grpSpPr>
       <p:pic>
         <p:nvPicPr>
-          <p:cNvPr id="2" name="Image 0" descr="/Users/danwahlin/.copilot/session-state/56a7a0da-def8-48d4-b5e8-0ac3878cb8dd/files/slides-build/img/grad-title-pattern.jpg">    </p:cNvPr>
+          <p:cNvPr id="2" name="Image 0" descr="">
+            <a:extLst>
+              <a:ext uri="{C183D7F6-B498-43B3-948B-1728B52AA6E4}">
+                <adec:decorative xmlns:adec="http://schemas.microsoft.com/office/drawing/2017/decorative" val="1"/>
+              </a:ext>
+            </a:extLst>
+          </p:cNvPr>
           <p:cNvPicPr>
             <a:picLocks noChangeAspect="1"/>
           </p:cNvPicPr>
@@ -2058,7 +2064,7 @@
       </p:pic>
       <p:pic>
         <p:nvPicPr>
-          <p:cNvPr id="3" name="Image 1" descr="/Users/danwahlin/.copilot/session-state/56a7a0da-def8-48d4-b5e8-0ac3878cb8dd/files/slides-build/icons/FaGithub-1F2328.png">
+          <p:cNvPr id="3" name="Image 1" descr="Open this chapter on GitHub">
             <a:hlinkClick r:id="rId3" tooltip="https://github.com/github/copilot-app-for-beginners/tree/main/00-setup"/>
           </p:cNvPr>
           <p:cNvPicPr>
@@ -2242,7 +2248,13 @@
       </p:sp>
       <p:pic>
         <p:nvPicPr>
-          <p:cNvPr id="8" name="Image 2" descr="/Users/danwahlin/.copilot/session-state/56a7a0da-def8-48d4-b5e8-0ac3878cb8dd/files/slides-build/icons/FaGithub-0969DA.png">    </p:cNvPr>
+          <p:cNvPr id="8" name="Image 2" descr="">
+            <a:extLst>
+              <a:ext uri="{C183D7F6-B498-43B3-948B-1728B52AA6E4}">
+                <adec:decorative xmlns:adec="http://schemas.microsoft.com/office/drawing/2017/decorative" val="1"/>
+              </a:ext>
+            </a:extLst>
+          </p:cNvPr>
           <p:cNvPicPr>
             <a:picLocks noChangeAspect="1"/>
           </p:cNvPicPr>
@@ -2446,7 +2458,13 @@
       </p:sp>
       <p:pic>
         <p:nvPicPr>
-          <p:cNvPr id="5" name="Image 0" descr="/Users/danwahlin/.copilot/session-state/56a7a0da-def8-48d4-b5e8-0ac3878cb8dd/files/slides-build/img/grad-corner-pattern.png">    </p:cNvPr>
+          <p:cNvPr id="5" name="Image 0" descr="">
+            <a:extLst>
+              <a:ext uri="{C183D7F6-B498-43B3-948B-1728B52AA6E4}">
+                <adec:decorative xmlns:adec="http://schemas.microsoft.com/office/drawing/2017/decorative" val="1"/>
+              </a:ext>
+            </a:extLst>
+          </p:cNvPr>
           <p:cNvPicPr>
             <a:picLocks noChangeAspect="1"/>
           </p:cNvPicPr>
@@ -2541,7 +2559,7 @@
       </p:sp>
       <p:pic>
         <p:nvPicPr>
-          <p:cNvPr id="8" name="Image 1" descr="/Users/danwahlin/.copilot/session-state/56a7a0da-def8-48d4-b5e8-0ac3878cb8dd/files/slides-build/icons/FaGithub-1F2328.png">
+          <p:cNvPr id="8" name="Image 1" descr="Open this chapter on GitHub">
             <a:hlinkClick r:id="rId3" tooltip="https://github.com/github/copilot-app-for-beginners/tree/main/00-setup"/>
           </p:cNvPr>
           <p:cNvPicPr>
@@ -2757,7 +2775,13 @@
       </p:grpSpPr>
       <p:pic>
         <p:nvPicPr>
-          <p:cNvPr id="2" name="Image 0" descr="/Users/danwahlin/.copilot/session-state/56a7a0da-def8-48d4-b5e8-0ac3878cb8dd/files/slides-build/img/grad-corner-pattern.png">    </p:cNvPr>
+          <p:cNvPr id="2" name="Image 0" descr="">
+            <a:extLst>
+              <a:ext uri="{C183D7F6-B498-43B3-948B-1728B52AA6E4}">
+                <adec:decorative xmlns:adec="http://schemas.microsoft.com/office/drawing/2017/decorative" val="1"/>
+              </a:ext>
+            </a:extLst>
+          </p:cNvPr>
           <p:cNvPicPr>
             <a:picLocks noChangeAspect="1"/>
           </p:cNvPicPr>
@@ -2852,7 +2876,7 @@
       </p:sp>
       <p:pic>
         <p:nvPicPr>
-          <p:cNvPr id="5" name="Image 1" descr="/Users/danwahlin/.copilot/session-state/56a7a0da-def8-48d4-b5e8-0ac3878cb8dd/files/slides-build/icons/FaGithub-1F2328.png">
+          <p:cNvPr id="5" name="Image 1" descr="Open this chapter on GitHub">
             <a:hlinkClick r:id="rId3" tooltip="https://github.com/github/copilot-app-for-beginners/tree/main/00-setup"/>
           </p:cNvPr>
           <p:cNvPicPr>
@@ -3756,7 +3780,13 @@
       </p:sp>
       <p:pic>
         <p:nvPicPr>
-          <p:cNvPr id="24" name="Image 2" descr="/Users/danwahlin/.copilot/session-state/56a7a0da-def8-48d4-b5e8-0ac3878cb8dd/files/slides-build/icons/GoCheckCircle-1A7F37.png">    </p:cNvPr>
+          <p:cNvPr id="24" name="Image 2" descr="">
+            <a:extLst>
+              <a:ext uri="{C183D7F6-B498-43B3-948B-1728B52AA6E4}">
+                <adec:decorative xmlns:adec="http://schemas.microsoft.com/office/drawing/2017/decorative" val="1"/>
+              </a:ext>
+            </a:extLst>
+          </p:cNvPr>
           <p:cNvPicPr>
             <a:picLocks noChangeAspect="1"/>
           </p:cNvPicPr>
@@ -3932,7 +3962,13 @@
       </p:sp>
       <p:pic>
         <p:nvPicPr>
-          <p:cNvPr id="29" name="Image 3" descr="/Users/danwahlin/.copilot/session-state/56a7a0da-def8-48d4-b5e8-0ac3878cb8dd/files/slides-build/icons/GoPerson-0969DA.png">    </p:cNvPr>
+          <p:cNvPr id="29" name="Image 3" descr="">
+            <a:extLst>
+              <a:ext uri="{C183D7F6-B498-43B3-948B-1728B52AA6E4}">
+                <adec:decorative xmlns:adec="http://schemas.microsoft.com/office/drawing/2017/decorative" val="1"/>
+              </a:ext>
+            </a:extLst>
+          </p:cNvPr>
           <p:cNvPicPr>
             <a:picLocks noChangeAspect="1"/>
           </p:cNvPicPr>
@@ -4106,7 +4142,13 @@
       </p:grpSpPr>
       <p:pic>
         <p:nvPicPr>
-          <p:cNvPr id="2" name="Image 0" descr="/Users/danwahlin/.copilot/session-state/56a7a0da-def8-48d4-b5e8-0ac3878cb8dd/files/slides-build/img/grad-corner-pattern.png">    </p:cNvPr>
+          <p:cNvPr id="2" name="Image 0" descr="">
+            <a:extLst>
+              <a:ext uri="{C183D7F6-B498-43B3-948B-1728B52AA6E4}">
+                <adec:decorative xmlns:adec="http://schemas.microsoft.com/office/drawing/2017/decorative" val="1"/>
+              </a:ext>
+            </a:extLst>
+          </p:cNvPr>
           <p:cNvPicPr>
             <a:picLocks noChangeAspect="1"/>
           </p:cNvPicPr>
@@ -4201,7 +4243,7 @@
       </p:sp>
       <p:pic>
         <p:nvPicPr>
-          <p:cNvPr id="5" name="Image 1" descr="/Users/danwahlin/.copilot/session-state/56a7a0da-def8-48d4-b5e8-0ac3878cb8dd/files/slides-build/icons/FaGithub-1F2328.png">
+          <p:cNvPr id="5" name="Image 1" descr="Open this chapter on GitHub">
             <a:hlinkClick r:id="rId3" tooltip="https://github.com/github/copilot-app-for-beginners/tree/main/00-setup"/>
           </p:cNvPr>
           <p:cNvPicPr>
@@ -5096,7 +5138,13 @@
       </p:sp>
       <p:pic>
         <p:nvPicPr>
-          <p:cNvPr id="27" name="Image 2" descr="/Users/danwahlin/.copilot/session-state/56a7a0da-def8-48d4-b5e8-0ac3878cb8dd/files/slides-build/icons/GoTasklist-1A7F37.png">    </p:cNvPr>
+          <p:cNvPr id="27" name="Image 2" descr="">
+            <a:extLst>
+              <a:ext uri="{C183D7F6-B498-43B3-948B-1728B52AA6E4}">
+                <adec:decorative xmlns:adec="http://schemas.microsoft.com/office/drawing/2017/decorative" val="1"/>
+              </a:ext>
+            </a:extLst>
+          </p:cNvPr>
           <p:cNvPicPr>
             <a:picLocks noChangeAspect="1"/>
           </p:cNvPicPr>
@@ -5494,7 +5542,13 @@
       </p:sp>
       <p:pic>
         <p:nvPicPr>
-          <p:cNvPr id="38" name="Image 3" descr="/Users/danwahlin/.copilot/session-state/56a7a0da-def8-48d4-b5e8-0ac3878cb8dd/files/slides-build/icons/GoAlert-9A6700.png">    </p:cNvPr>
+          <p:cNvPr id="38" name="Image 3" descr="">
+            <a:extLst>
+              <a:ext uri="{C183D7F6-B498-43B3-948B-1728B52AA6E4}">
+                <adec:decorative xmlns:adec="http://schemas.microsoft.com/office/drawing/2017/decorative" val="1"/>
+              </a:ext>
+            </a:extLst>
+          </p:cNvPr>
           <p:cNvPicPr>
             <a:picLocks noChangeAspect="1"/>
           </p:cNvPicPr>
@@ -5626,7 +5680,13 @@
       </p:grpSpPr>
       <p:pic>
         <p:nvPicPr>
-          <p:cNvPr id="2" name="Image 0" descr="/Users/danwahlin/.copilot/session-state/56a7a0da-def8-48d4-b5e8-0ac3878cb8dd/files/slides-build/img/grad-corner-pattern.png">    </p:cNvPr>
+          <p:cNvPr id="2" name="Image 0" descr="">
+            <a:extLst>
+              <a:ext uri="{C183D7F6-B498-43B3-948B-1728B52AA6E4}">
+                <adec:decorative xmlns:adec="http://schemas.microsoft.com/office/drawing/2017/decorative" val="1"/>
+              </a:ext>
+            </a:extLst>
+          </p:cNvPr>
           <p:cNvPicPr>
             <a:picLocks noChangeAspect="1"/>
           </p:cNvPicPr>
@@ -5721,7 +5781,7 @@
       </p:sp>
       <p:pic>
         <p:nvPicPr>
-          <p:cNvPr id="5" name="Image 1" descr="/Users/danwahlin/.copilot/session-state/56a7a0da-def8-48d4-b5e8-0ac3878cb8dd/files/slides-build/icons/FaGithub-1F2328.png">
+          <p:cNvPr id="5" name="Image 1" descr="Open this chapter on GitHub">
             <a:hlinkClick r:id="rId3" tooltip="https://github.com/github/copilot-app-for-beginners/tree/main/00-setup"/>
           </p:cNvPr>
           <p:cNvPicPr>
@@ -6000,7 +6060,13 @@
       </p:sp>
       <p:pic>
         <p:nvPicPr>
-          <p:cNvPr id="14" name="Image 2" descr="/Users/danwahlin/.copilot/session-state/56a7a0da-def8-48d4-b5e8-0ac3878cb8dd/files/slides-build/icons/GoCopilot-8250DF.png">    </p:cNvPr>
+          <p:cNvPr id="14" name="Image 2" descr="">
+            <a:extLst>
+              <a:ext uri="{C183D7F6-B498-43B3-948B-1728B52AA6E4}">
+                <adec:decorative xmlns:adec="http://schemas.microsoft.com/office/drawing/2017/decorative" val="1"/>
+              </a:ext>
+            </a:extLst>
+          </p:cNvPr>
           <p:cNvPicPr>
             <a:picLocks noChangeAspect="1"/>
           </p:cNvPicPr>
@@ -6141,7 +6207,13 @@
       </p:sp>
       <p:pic>
         <p:nvPicPr>
-          <p:cNvPr id="18" name="Image 3" descr="/Users/danwahlin/.copilot/session-state/56a7a0da-def8-48d4-b5e8-0ac3878cb8dd/files/slides-build/icons/GoCheckCircle-1A7F37.png">    </p:cNvPr>
+          <p:cNvPr id="18" name="Image 3" descr="">
+            <a:extLst>
+              <a:ext uri="{C183D7F6-B498-43B3-948B-1728B52AA6E4}">
+                <adec:decorative xmlns:adec="http://schemas.microsoft.com/office/drawing/2017/decorative" val="1"/>
+              </a:ext>
+            </a:extLst>
+          </p:cNvPr>
           <p:cNvPicPr>
             <a:picLocks noChangeAspect="1"/>
           </p:cNvPicPr>
@@ -6290,7 +6362,13 @@
       </p:grpSpPr>
       <p:pic>
         <p:nvPicPr>
-          <p:cNvPr id="2" name="Image 0" descr="/Users/danwahlin/.copilot/session-state/56a7a0da-def8-48d4-b5e8-0ac3878cb8dd/files/slides-build/img/grad-corner-pattern.png">    </p:cNvPr>
+          <p:cNvPr id="2" name="Image 0" descr="">
+            <a:extLst>
+              <a:ext uri="{C183D7F6-B498-43B3-948B-1728B52AA6E4}">
+                <adec:decorative xmlns:adec="http://schemas.microsoft.com/office/drawing/2017/decorative" val="1"/>
+              </a:ext>
+            </a:extLst>
+          </p:cNvPr>
           <p:cNvPicPr>
             <a:picLocks noChangeAspect="1"/>
           </p:cNvPicPr>
@@ -6385,7 +6463,7 @@
       </p:sp>
       <p:pic>
         <p:nvPicPr>
-          <p:cNvPr id="5" name="Image 1" descr="/Users/danwahlin/.copilot/session-state/56a7a0da-def8-48d4-b5e8-0ac3878cb8dd/files/slides-build/icons/FaGithub-1F2328.png">
+          <p:cNvPr id="5" name="Image 1" descr="Open this chapter on GitHub">
             <a:hlinkClick r:id="rId3" tooltip="https://github.com/github/copilot-app-for-beginners/tree/main/00-setup"/>
           </p:cNvPr>
           <p:cNvPicPr>
@@ -7193,7 +7271,13 @@
       </p:sp>
       <p:pic>
         <p:nvPicPr>
-          <p:cNvPr id="26" name="Image 2" descr="/Users/danwahlin/.copilot/session-state/56a7a0da-def8-48d4-b5e8-0ac3878cb8dd/files/slides-build/icons/FaGithub-0969DA.png">    </p:cNvPr>
+          <p:cNvPr id="26" name="Image 2" descr="">
+            <a:extLst>
+              <a:ext uri="{C183D7F6-B498-43B3-948B-1728B52AA6E4}">
+                <adec:decorative xmlns:adec="http://schemas.microsoft.com/office/drawing/2017/decorative" val="1"/>
+              </a:ext>
+            </a:extLst>
+          </p:cNvPr>
           <p:cNvPicPr>
             <a:picLocks noChangeAspect="1"/>
           </p:cNvPicPr>
@@ -7419,7 +7503,13 @@
       </p:grpSpPr>
       <p:pic>
         <p:nvPicPr>
-          <p:cNvPr id="2" name="Image 0" descr="/Users/danwahlin/.copilot/session-state/56a7a0da-def8-48d4-b5e8-0ac3878cb8dd/files/slides-build/img/grad-corner-pattern.png">    </p:cNvPr>
+          <p:cNvPr id="2" name="Image 0" descr="">
+            <a:extLst>
+              <a:ext uri="{C183D7F6-B498-43B3-948B-1728B52AA6E4}">
+                <adec:decorative xmlns:adec="http://schemas.microsoft.com/office/drawing/2017/decorative" val="1"/>
+              </a:ext>
+            </a:extLst>
+          </p:cNvPr>
           <p:cNvPicPr>
             <a:picLocks noChangeAspect="1"/>
           </p:cNvPicPr>
@@ -7514,7 +7604,7 @@
       </p:sp>
       <p:pic>
         <p:nvPicPr>
-          <p:cNvPr id="5" name="Image 1" descr="/Users/danwahlin/.copilot/session-state/56a7a0da-def8-48d4-b5e8-0ac3878cb8dd/files/slides-build/icons/FaGithub-1F2328.png">
+          <p:cNvPr id="5" name="Image 1" descr="Open this chapter on GitHub">
             <a:hlinkClick r:id="rId3" tooltip="https://github.com/github/copilot-app-for-beginners/tree/main/00-setup"/>
           </p:cNvPr>
           <p:cNvPicPr>
@@ -8388,7 +8478,13 @@
       </p:grpSpPr>
       <p:pic>
         <p:nvPicPr>
-          <p:cNvPr id="2" name="Image 0" descr="/Users/danwahlin/.copilot/session-state/56a7a0da-def8-48d4-b5e8-0ac3878cb8dd/files/slides-build/img/grad-corner-pattern.png">    </p:cNvPr>
+          <p:cNvPr id="2" name="Image 0" descr="">
+            <a:extLst>
+              <a:ext uri="{C183D7F6-B498-43B3-948B-1728B52AA6E4}">
+                <adec:decorative xmlns:adec="http://schemas.microsoft.com/office/drawing/2017/decorative" val="1"/>
+              </a:ext>
+            </a:extLst>
+          </p:cNvPr>
           <p:cNvPicPr>
             <a:picLocks noChangeAspect="1"/>
           </p:cNvPicPr>
@@ -8483,7 +8579,7 @@
       </p:sp>
       <p:pic>
         <p:nvPicPr>
-          <p:cNvPr id="5" name="Image 1" descr="/Users/danwahlin/.copilot/session-state/56a7a0da-def8-48d4-b5e8-0ac3878cb8dd/files/slides-build/icons/FaGithub-1F2328.png">
+          <p:cNvPr id="5" name="Image 1" descr="Open this chapter on GitHub">
             <a:hlinkClick r:id="rId3" tooltip="https://github.com/github/copilot-app-for-beginners/tree/main/00-setup"/>
           </p:cNvPr>
           <p:cNvPicPr>
@@ -8681,7 +8777,7 @@
       </p:sp>
       <p:pic>
         <p:nvPicPr>
-          <p:cNvPr id="10" name="Image 2" descr="/Users/danwahlin/.copilot/session-state/56a7a0da-def8-48d4-b5e8-0ac3878cb8dd/files/slides-build/img/00-studio-setup-soundcheck.jpg">    </p:cNvPr>
+          <p:cNvPr id="10" name="Image 2" descr="Setting up the studio analogy for GitHub Copilot app setup">    </p:cNvPr>
           <p:cNvPicPr>
             <a:picLocks noChangeAspect="1"/>
           </p:cNvPicPr>
@@ -8737,7 +8833,13 @@
       </p:sp>
       <p:pic>
         <p:nvPicPr>
-          <p:cNvPr id="12" name="Image 3" descr="/Users/danwahlin/.copilot/session-state/56a7a0da-def8-48d4-b5e8-0ac3878cb8dd/files/slides-build/icons/FaGithub-0969DA.png">    </p:cNvPr>
+          <p:cNvPr id="12" name="Image 3" descr="">
+            <a:extLst>
+              <a:ext uri="{C183D7F6-B498-43B3-948B-1728B52AA6E4}">
+                <adec:decorative xmlns:adec="http://schemas.microsoft.com/office/drawing/2017/decorative" val="1"/>
+              </a:ext>
+            </a:extLst>
+          </p:cNvPr>
           <p:cNvPicPr>
             <a:picLocks noChangeAspect="1"/>
           </p:cNvPicPr>
@@ -8874,7 +8976,13 @@
       </p:sp>
       <p:pic>
         <p:nvPicPr>
-          <p:cNvPr id="16" name="Image 4" descr="/Users/danwahlin/.copilot/session-state/56a7a0da-def8-48d4-b5e8-0ac3878cb8dd/files/slides-build/icons/GoPlug-8250DF.png">    </p:cNvPr>
+          <p:cNvPr id="16" name="Image 4" descr="">
+            <a:extLst>
+              <a:ext uri="{C183D7F6-B498-43B3-948B-1728B52AA6E4}">
+                <adec:decorative xmlns:adec="http://schemas.microsoft.com/office/drawing/2017/decorative" val="1"/>
+              </a:ext>
+            </a:extLst>
+          </p:cNvPr>
           <p:cNvPicPr>
             <a:picLocks noChangeAspect="1"/>
           </p:cNvPicPr>
@@ -9011,7 +9119,13 @@
       </p:sp>
       <p:pic>
         <p:nvPicPr>
-          <p:cNvPr id="20" name="Image 5" descr="/Users/danwahlin/.copilot/session-state/56a7a0da-def8-48d4-b5e8-0ac3878cb8dd/files/slides-build/icons/GoTasklist-1A7F37.png">    </p:cNvPr>
+          <p:cNvPr id="20" name="Image 5" descr="">
+            <a:extLst>
+              <a:ext uri="{C183D7F6-B498-43B3-948B-1728B52AA6E4}">
+                <adec:decorative xmlns:adec="http://schemas.microsoft.com/office/drawing/2017/decorative" val="1"/>
+              </a:ext>
+            </a:extLst>
+          </p:cNvPr>
           <p:cNvPicPr>
             <a:picLocks noChangeAspect="1"/>
           </p:cNvPicPr>
@@ -9148,7 +9262,13 @@
       </p:sp>
       <p:pic>
         <p:nvPicPr>
-          <p:cNvPr id="24" name="Image 6" descr="/Users/danwahlin/.copilot/session-state/56a7a0da-def8-48d4-b5e8-0ac3878cb8dd/files/slides-build/icons/GoCopilot-BC4C00.png">    </p:cNvPr>
+          <p:cNvPr id="24" name="Image 6" descr="">
+            <a:extLst>
+              <a:ext uri="{C183D7F6-B498-43B3-948B-1728B52AA6E4}">
+                <adec:decorative xmlns:adec="http://schemas.microsoft.com/office/drawing/2017/decorative" val="1"/>
+              </a:ext>
+            </a:extLst>
+          </p:cNvPr>
           <p:cNvPicPr>
             <a:picLocks noChangeAspect="1"/>
           </p:cNvPicPr>
@@ -9285,7 +9405,13 @@
       </p:grpSpPr>
       <p:pic>
         <p:nvPicPr>
-          <p:cNvPr id="2" name="Image 0" descr="/Users/danwahlin/.copilot/session-state/56a7a0da-def8-48d4-b5e8-0ac3878cb8dd/files/slides-build/img/grad-corner-pattern.png">    </p:cNvPr>
+          <p:cNvPr id="2" name="Image 0" descr="">
+            <a:extLst>
+              <a:ext uri="{C183D7F6-B498-43B3-948B-1728B52AA6E4}">
+                <adec:decorative xmlns:adec="http://schemas.microsoft.com/office/drawing/2017/decorative" val="1"/>
+              </a:ext>
+            </a:extLst>
+          </p:cNvPr>
           <p:cNvPicPr>
             <a:picLocks noChangeAspect="1"/>
           </p:cNvPicPr>
@@ -9380,7 +9506,7 @@
       </p:sp>
       <p:pic>
         <p:nvPicPr>
-          <p:cNvPr id="5" name="Image 1" descr="/Users/danwahlin/.copilot/session-state/56a7a0da-def8-48d4-b5e8-0ac3878cb8dd/files/slides-build/icons/FaGithub-1F2328.png">
+          <p:cNvPr id="5" name="Image 1" descr="Open this chapter on GitHub">
             <a:hlinkClick r:id="rId3" tooltip="https://github.com/github/copilot-app-for-beginners/tree/main/00-setup"/>
           </p:cNvPr>
           <p:cNvPicPr>
@@ -10221,7 +10347,13 @@
       </p:sp>
       <p:pic>
         <p:nvPicPr>
-          <p:cNvPr id="25" name="Image 2" descr="/Users/danwahlin/.copilot/session-state/56a7a0da-def8-48d4-b5e8-0ac3878cb8dd/files/slides-build/icons/GoInfo-0969DA.png">    </p:cNvPr>
+          <p:cNvPr id="25" name="Image 2" descr="">
+            <a:extLst>
+              <a:ext uri="{C183D7F6-B498-43B3-948B-1728B52AA6E4}">
+                <adec:decorative xmlns:adec="http://schemas.microsoft.com/office/drawing/2017/decorative" val="1"/>
+              </a:ext>
+            </a:extLst>
+          </p:cNvPr>
           <p:cNvPicPr>
             <a:picLocks noChangeAspect="1"/>
           </p:cNvPicPr>
@@ -10438,7 +10570,13 @@
       </p:sp>
       <p:pic>
         <p:nvPicPr>
-          <p:cNvPr id="5" name="Image 0" descr="/Users/danwahlin/.copilot/session-state/56a7a0da-def8-48d4-b5e8-0ac3878cb8dd/files/slides-build/img/grad-corner-pattern.png">    </p:cNvPr>
+          <p:cNvPr id="5" name="Image 0" descr="">
+            <a:extLst>
+              <a:ext uri="{C183D7F6-B498-43B3-948B-1728B52AA6E4}">
+                <adec:decorative xmlns:adec="http://schemas.microsoft.com/office/drawing/2017/decorative" val="1"/>
+              </a:ext>
+            </a:extLst>
+          </p:cNvPr>
           <p:cNvPicPr>
             <a:picLocks noChangeAspect="1"/>
           </p:cNvPicPr>
@@ -10533,7 +10671,7 @@
       </p:sp>
       <p:pic>
         <p:nvPicPr>
-          <p:cNvPr id="8" name="Image 1" descr="/Users/danwahlin/.copilot/session-state/56a7a0da-def8-48d4-b5e8-0ac3878cb8dd/files/slides-build/icons/FaGithub-1F2328.png">
+          <p:cNvPr id="8" name="Image 1" descr="Open this chapter on GitHub">
             <a:hlinkClick r:id="rId3" tooltip="https://github.com/github/copilot-app-for-beginners/tree/main/00-setup"/>
           </p:cNvPr>
           <p:cNvPicPr>
@@ -10749,7 +10887,13 @@
       </p:grpSpPr>
       <p:pic>
         <p:nvPicPr>
-          <p:cNvPr id="2" name="Image 0" descr="/Users/danwahlin/.copilot/session-state/56a7a0da-def8-48d4-b5e8-0ac3878cb8dd/files/slides-build/img/grad-corner-pattern.png">    </p:cNvPr>
+          <p:cNvPr id="2" name="Image 0" descr="">
+            <a:extLst>
+              <a:ext uri="{C183D7F6-B498-43B3-948B-1728B52AA6E4}">
+                <adec:decorative xmlns:adec="http://schemas.microsoft.com/office/drawing/2017/decorative" val="1"/>
+              </a:ext>
+            </a:extLst>
+          </p:cNvPr>
           <p:cNvPicPr>
             <a:picLocks noChangeAspect="1"/>
           </p:cNvPicPr>
@@ -10844,7 +10988,7 @@
       </p:sp>
       <p:pic>
         <p:nvPicPr>
-          <p:cNvPr id="5" name="Image 1" descr="/Users/danwahlin/.copilot/session-state/56a7a0da-def8-48d4-b5e8-0ac3878cb8dd/files/slides-build/icons/FaGithub-1F2328.png">
+          <p:cNvPr id="5" name="Image 1" descr="Open this chapter on GitHub">
             <a:hlinkClick r:id="rId3" tooltip="https://github.com/github/copilot-app-for-beginners/tree/main/00-setup"/>
           </p:cNvPr>
           <p:cNvPicPr>
@@ -11564,7 +11708,7 @@
       </p:sp>
       <p:pic>
         <p:nvPicPr>
-          <p:cNvPr id="21" name="Image 2" descr="/Users/danwahlin/.copilot/session-state/56a7a0da-def8-48d4-b5e8-0ac3878cb8dd/files/slides-build/img/00-sign-in-crop.png">    </p:cNvPr>
+          <p:cNvPr id="21" name="Image 2" descr="Sign in to the Copilot app">    </p:cNvPr>
           <p:cNvPicPr>
             <a:picLocks noChangeAspect="1"/>
           </p:cNvPicPr>
@@ -11722,7 +11866,13 @@
       </p:sp>
       <p:pic>
         <p:nvPicPr>
-          <p:cNvPr id="5" name="Image 0" descr="/Users/danwahlin/.copilot/session-state/56a7a0da-def8-48d4-b5e8-0ac3878cb8dd/files/slides-build/img/grad-corner-pattern.png">    </p:cNvPr>
+          <p:cNvPr id="5" name="Image 0" descr="">
+            <a:extLst>
+              <a:ext uri="{C183D7F6-B498-43B3-948B-1728B52AA6E4}">
+                <adec:decorative xmlns:adec="http://schemas.microsoft.com/office/drawing/2017/decorative" val="1"/>
+              </a:ext>
+            </a:extLst>
+          </p:cNvPr>
           <p:cNvPicPr>
             <a:picLocks noChangeAspect="1"/>
           </p:cNvPicPr>
@@ -11817,7 +11967,7 @@
       </p:sp>
       <p:pic>
         <p:nvPicPr>
-          <p:cNvPr id="8" name="Image 1" descr="/Users/danwahlin/.copilot/session-state/56a7a0da-def8-48d4-b5e8-0ac3878cb8dd/files/slides-build/icons/FaGithub-1F2328.png">
+          <p:cNvPr id="8" name="Image 1" descr="Open this chapter on GitHub">
             <a:hlinkClick r:id="rId3" tooltip="https://github.com/github/copilot-app-for-beginners/tree/main/00-setup"/>
           </p:cNvPr>
           <p:cNvPicPr>
@@ -12033,7 +12183,13 @@
       </p:grpSpPr>
       <p:pic>
         <p:nvPicPr>
-          <p:cNvPr id="2" name="Image 0" descr="/Users/danwahlin/.copilot/session-state/56a7a0da-def8-48d4-b5e8-0ac3878cb8dd/files/slides-build/img/grad-corner-pattern.png">    </p:cNvPr>
+          <p:cNvPr id="2" name="Image 0" descr="">
+            <a:extLst>
+              <a:ext uri="{C183D7F6-B498-43B3-948B-1728B52AA6E4}">
+                <adec:decorative xmlns:adec="http://schemas.microsoft.com/office/drawing/2017/decorative" val="1"/>
+              </a:ext>
+            </a:extLst>
+          </p:cNvPr>
           <p:cNvPicPr>
             <a:picLocks noChangeAspect="1"/>
           </p:cNvPicPr>
@@ -12128,7 +12284,7 @@
       </p:sp>
       <p:pic>
         <p:nvPicPr>
-          <p:cNvPr id="5" name="Image 1" descr="/Users/danwahlin/.copilot/session-state/56a7a0da-def8-48d4-b5e8-0ac3878cb8dd/files/slides-build/icons/FaGithub-1F2328.png">
+          <p:cNvPr id="5" name="Image 1" descr="Open this chapter on GitHub">
             <a:hlinkClick r:id="rId3" tooltip="https://github.com/github/copilot-app-for-beginners/tree/main/00-setup"/>
           </p:cNvPr>
           <p:cNvPicPr>
@@ -12893,7 +13049,7 @@
       </p:sp>
       <p:pic>
         <p:nvPicPr>
-          <p:cNvPr id="22" name="Image 2" descr="/Users/danwahlin/.copilot/session-state/56a7a0da-def8-48d4-b5e8-0ac3878cb8dd/files/slides-build/img/00-add-project-crop.png">    </p:cNvPr>
+          <p:cNvPr id="22" name="Image 2" descr="Projects menu with callouts for + and Add GitHub repository">    </p:cNvPr>
           <p:cNvPicPr>
             <a:picLocks noChangeAspect="1"/>
           </p:cNvPicPr>
@@ -12949,7 +13105,13 @@
       </p:grpSpPr>
       <p:pic>
         <p:nvPicPr>
-          <p:cNvPr id="2" name="Image 0" descr="/Users/danwahlin/.copilot/session-state/56a7a0da-def8-48d4-b5e8-0ac3878cb8dd/files/slides-build/img/grad-corner-pattern.png">    </p:cNvPr>
+          <p:cNvPr id="2" name="Image 0" descr="">
+            <a:extLst>
+              <a:ext uri="{C183D7F6-B498-43B3-948B-1728B52AA6E4}">
+                <adec:decorative xmlns:adec="http://schemas.microsoft.com/office/drawing/2017/decorative" val="1"/>
+              </a:ext>
+            </a:extLst>
+          </p:cNvPr>
           <p:cNvPicPr>
             <a:picLocks noChangeAspect="1"/>
           </p:cNvPicPr>
@@ -13044,7 +13206,7 @@
       </p:sp>
       <p:pic>
         <p:nvPicPr>
-          <p:cNvPr id="5" name="Image 1" descr="/Users/danwahlin/.copilot/session-state/56a7a0da-def8-48d4-b5e8-0ac3878cb8dd/files/slides-build/icons/FaGithub-1F2328.png">
+          <p:cNvPr id="5" name="Image 1" descr="Open this chapter on GitHub">
             <a:hlinkClick r:id="rId3" tooltip="https://github.com/github/copilot-app-for-beginners/tree/main/00-setup"/>
           </p:cNvPr>
           <p:cNvPicPr>
@@ -13242,7 +13404,7 @@
       </p:sp>
       <p:pic>
         <p:nvPicPr>
-          <p:cNvPr id="10" name="Image 2" descr="/Users/danwahlin/.copilot/session-state/56a7a0da-def8-48d4-b5e8-0ac3878cb8dd/files/slides-build/img/00-checkout-crop.png">    </p:cNvPr>
+          <p:cNvPr id="10" name="Image 2" descr="Where to work menu with callouts for the workspace selector and Current checkout">    </p:cNvPr>
           <p:cNvPicPr>
             <a:picLocks noChangeAspect="1"/>
           </p:cNvPicPr>
